--- a/Part2_CoordFrames/ref/산출물/Chapter2_coordinate_systems.pptx
+++ b/Part2_CoordFrames/ref/산출물/Chapter2_coordinate_systems.pptx
@@ -13,7 +13,6 @@
     <p:sldId id="292" r:id="rId32"/>
     <p:sldId id="265" r:id="rId11"/>
     <p:sldId id="295" r:id="rId30"/>
-    <p:sldId id="267" r:id="rId13"/>
     <p:sldId id="268" r:id="rId14"/>
     <p:sldId id="271" r:id="rId17"/>
     <p:sldId id="272" r:id="rId18"/>
@@ -33,6 +32,7 @@
     <p:sldId id="288" r:id="rId34"/>
     <p:sldId id="270" r:id="rId16"/>
     <p:sldId id="275" r:id="rId21"/>
+    <p:sldId id="267" r:id="rId13"/>
   </p:sldIdLst>
   <p:notesMasterIdLst>
     <p:notesMasterId r:id="rId36"/>
@@ -911,7 +911,7 @@
           </a:p>
           <a:p>
             <a:r>
-              <a:t>주의할 점은 합치는 순서입니다. 회전은 곱셈 순서를 바꾸면 결과가 달라집니다. 그래서 yaw, pitch, roll 순서인 3-2-1 을 문서로 고정해야 합니다. 구현에서도 Rz(yaw) · Ry(pitch) · Rx(roll) 순서로 곱합니다.</a:t>
+              <a:t>주의할 점은 합치는 순서입니다. 회전은 곱셈 순서를 바꾸면 결과가 달라집니다. 책 한 권이면 바로 확인됩니다. 책을 x 축으로 90도 돌린 다음 y 축으로 90도 돌린 것과, 반대로 y 축을 먼저 돌린 것은 서로 다른 자세가 됩니다. 그래서 yaw, pitch, roll 순서인 3-2-1 을 문서로 고정해야 합니다. 구현에서도 Rz(yaw) · Ry(pitch) · Rx(roll) 순서로 곱합니다.</a:t>
             </a:r>
           </a:p>
           <a:p>
@@ -1294,7 +1294,7 @@
           </a:p>
           <a:p>
             <a:r>
-              <a:t>한 가지 주의점이 있습니다. "아래" 는 지구 중심 방향이 아니라 타원체 법선의 반대 방향입니다. 지구 중심 방향과는 위도 45도 부근에서 최대 약 0.19도 어긋나는데, 이 둘을 혼동하면 지표 위치가 약 21 km 틀어집니다.</a:t>
+              <a:t>한 가지 주의점이 있습니다. 여기서 말하는 "아래" 는 지구 중심 쪽이 아니라 발밑 수직 방향입니다. 지구가 완전한 구가 아니라서 둘이 조금 어긋나는데, 얼마나 왜 어긋나는지는 뒤의 LLA 장에서 보겠습니다.</a:t>
             </a:r>
           </a:p>
         </p:txBody>
@@ -1489,6 +1489,11 @@
               <a:t>고도에 함정이 하나 있습니다. LLA 의 고도는 타원체고, HAE 이고 해도나 고도계의 "해발" 과 다릅니다. 해발고도는 타원체고에서 지오이드고를 뺀 값이고, 한국 근해 지오이드고는 약 +20 에서 +25 m 입니다. 시스템 내부는 하나로 통일해야 합니다.</a:t>
             </a:r>
           </a:p>
+          <a:p>
+            <a:r>
+              <a:t>앞에서 미뤄 둔 이야기도 여기서 풀립니다. NED 의 "아래" 는 지구 중심 방향이 아니라 이 타원체 면에 수직인 방향의 반대쪽입니다. 둘은 위도 45도 부근에서 최대 약 0.19도 어긋나고, 이것을 혼동하면 지표 위치가 약 21 km 틀어집니다.</a:t>
+            </a:r>
+          </a:p>
         </p:txBody>
       </p:sp>
       <p:sp>
@@ -1678,6 +1683,11 @@
           </a:p>
           <a:p>
             <a:r>
+              <a:t>2단계에 나오는 말 세 가지를 먼저 풀어 두겠습니다. 설치 방위는 선수를 기준으로 안테나가 보는 각이고, 백틸트는 안테나 면이 위로 들린 각입니다. 레버암은 무게중심에서 안테나까지의 거리를 동체 좌표로 적은 것입니다.</a:t>
+            </a:r>
+          </a:p>
+          <a:p>
+            <a:r>
               <a:t>2단계 안테나에서 동체로는 Rz(설치방위) 곱하기 Ry(백틸트) 로 회전하고 레버암을 더합니다. 설치 도면이 공급하고, 고정형이라 상수입니다.</a:t>
             </a:r>
           </a:p>
@@ -1698,7 +1708,7 @@
           </a:p>
           <a:p>
             <a:r>
-              <a:t>회전은 설치 방위와 INS 의 자세 · 위경도가, 이동은 레버암과 INS 의 배 위치가 공급합니다. 이 구분이 그대로 오차의 출처 목록이 됩니다. 표기를 하나 짚고 가면, C_ned←body 는 동체 좌표를 NED 좌표로 바꾸는 회전행렬이고 화살표 방향이 곧 변환 방향입니다. 거꾸로 갈 때는 전치를 곱합니다.</a:t>
+              <a:t>회전은 설치 방위와 INS 의 자세 · 위경도가, 이동은 레버암과 INS 의 배 위치가 공급합니다. 이 구분이 그대로 오차의 출처 목록이 됩니다.</a:t>
             </a:r>
           </a:p>
         </p:txBody>
@@ -1930,7 +1940,7 @@
           </a:p>
           <a:p>
             <a:r>
-              <a:t>쓰지 않은 좌표계도 이유가 있습니다. INS 는 조건 3 에 의해 동체와 일치해서 항등행렬을 곱하는 셈이고, UV 는 빔 조향이라 데이터 처리 체인 밖이고, ECI 는 관성 동역학 전파가 필요할 때만 쓰고, ENU 는 NED 와 정보량이 같아서 하나로 통일했습니다.</a:t>
+              <a:t>쓰지 않은 좌표계도 한 줄로 정리해 두었습니다. INS 는 조건 3 으로 동체와 일치하고, UV 는 빔 조향용이라 체인 밖이며 부록 C 에 있습니다. ECI 는 관성 동역학 전파가 필요할 때만 쓰고, ENU 는 NED 와 정보량이 같아 하나로 통일했습니다. 각각의 이유는 앞의 해당 장에서 이미 보았습니다.</a:t>
             </a:r>
           </a:p>
         </p:txBody>
@@ -2367,6 +2377,11 @@
               <a:t>역변환에서는 asin 대신 atan2 를 씁니다. 반올림으로 인자가 1 을 살짝 넘으면 asin 은 NaN 을 내고, ±90도 근처에서 정밀도가 무너지기 때문입니다.</a:t>
             </a:r>
           </a:p>
+          <a:p>
+            <a:r>
+              <a:t>끝으로 하나 안내드리면, 안테나 좌표를 적는 방법이 하나 더 있습니다. UV, 방향코사인입니다. 위상배열이 빔을 어디로 쏠지 정할 때 쓰는 표현인데, 거리가 없어서 표적 위치를 옮기는 이번 체인에는 쓸 수가 없습니다. 부록 C 에 정리해 두었습니다.</a:t>
+            </a:r>
+          </a:p>
         </p:txBody>
       </p:sp>
       <p:sp>
@@ -3114,7 +3129,7 @@
           </a:p>
           <a:p>
             <a:r>
-              <a:t>다른 하나는 평행이동입니다. 두 좌표계의 원점이 떨어져 있을 때 떨어진 만큼 옮겨서 자리를 맞춥니다. 이때 방향은 건드리지 않습니다.</a:t>
+              <a:t>다른 하나는 평행이동입니다. 두 좌표계의 원점이 떨어져 있을 때 떨어진 만큼 옮겨서 자리를 맞춥니다. 이때 방향은 건드리지 않습니다. 장비를 설치할 때 이 원점 차이를 레버암이라고 부르는데, 뒤에서 계속 나오는 말이라 여기서 이름만 기억해 두시면 됩니다.</a:t>
             </a:r>
           </a:p>
           <a:p>
@@ -3226,6 +3241,11 @@
           <a:p>
             <a:r>
               <a:t>하나만 더 기억해 두시면, 되돌릴 때 역행렬을 계산하지 않습니다. θ 를 −θ 로 바꾸면 sin 의 부호만 바뀌는데 그것이 곧 행과 열을 맞바꾼 것이라, R 의 역행렬은 R 의 전치입니다. 역변환 장에서 이 성질을 그대로 씁니다.</a:t>
+            </a:r>
+          </a:p>
+          <a:p>
+            <a:r>
+              <a:t>표기도 하나 정해 두겠습니다. C_ned←body 처럼 적으면 동체 좌표를 NED 좌표로 바꾸는 회전행렬이라는 뜻이고, 화살표 방향이 곧 변환 방향입니다. 거꾸로 갈 때는 전치를 곱합니다. 뒤에 나오는 식은 전부 이 표기를 씁니다.</a:t>
             </a:r>
           </a:p>
         </p:txBody>
@@ -3748,1325 +3768,6 @@
 
 <file path=ppt/slides/slide10.xml><?xml version="1.0" encoding="utf-8"?>
 <p:sld xmlns:a="http://schemas.openxmlformats.org/drawingml/2006/main" xmlns:r="http://schemas.openxmlformats.org/officeDocument/2006/relationships" xmlns:p="http://schemas.openxmlformats.org/presentationml/2006/main">
-  <p:cSld name="Slide 13">
-    <p:bg>
-      <p:bgPr>
-        <a:solidFill>
-          <a:srgbClr val="E8EDF5"/>
-        </a:solidFill>
-        <a:effectLst/>
-      </p:bgPr>
-    </p:bg>
-    <p:spTree>
-      <p:nvGrpSpPr>
-        <p:cNvPr id="1" name=""/>
-        <p:cNvGrpSpPr/>
-        <p:nvPr/>
-      </p:nvGrpSpPr>
-      <p:grpSpPr>
-        <a:xfrm>
-          <a:off x="0" y="0"/>
-          <a:ext cx="0" cy="0"/>
-          <a:chOff x="0" y="0"/>
-          <a:chExt cx="0" cy="0"/>
-        </a:xfrm>
-      </p:grpSpPr>
-      <p:sp>
-        <p:nvSpPr>
-          <p:cNvPr id="34" name="Rectangle 33"/>
-          <p:cNvSpPr/>
-          <p:nvPr/>
-        </p:nvSpPr>
-        <p:spPr>
-          <a:xfrm>
-            <a:off x="457200" y="1243584"/>
-            <a:ext cx="11277295" cy="5047488"/>
-          </a:xfrm>
-          <a:prstGeom prst="rect">
-            <a:avLst/>
-          </a:prstGeom>
-          <a:solidFill>
-            <a:srgbClr val="FFFFFF"/>
-          </a:solidFill>
-          <a:ln>
-            <a:noFill/>
-          </a:ln>
-          <a:effectLst/>
-        </p:spPr>
-        <p:style>
-          <a:lnRef idx="1">
-            <a:schemeClr val="accent1"/>
-          </a:lnRef>
-          <a:fillRef idx="3">
-            <a:schemeClr val="accent1"/>
-          </a:fillRef>
-          <a:effectRef idx="2">
-            <a:schemeClr val="accent1"/>
-          </a:effectRef>
-          <a:fontRef idx="minor">
-            <a:schemeClr val="lt1"/>
-          </a:fontRef>
-        </p:style>
-        <p:txBody>
-          <a:bodyPr rtlCol="0" anchor="ctr" wrap="none"/>
-          <a:lstStyle/>
-          <a:p>
-            <a:pPr algn="ctr"/>
-          </a:p>
-        </p:txBody>
-      </p:sp>
-      <p:sp>
-        <p:nvSpPr>
-          <p:cNvPr id="4" name="Shape 2"/>
-          <p:cNvSpPr/>
-          <p:nvPr/>
-        </p:nvSpPr>
-        <p:spPr>
-          <a:xfrm>
-            <a:off x="2112264" y="1371600"/>
-            <a:ext cx="1170432" cy="312724"/>
-          </a:xfrm>
-          <a:prstGeom prst="roundRect">
-            <a:avLst>
-              <a:gd name="adj" fmla="val 47222"/>
-            </a:avLst>
-          </a:prstGeom>
-          <a:solidFill>
-            <a:srgbClr val="EEF1F7"/>
-          </a:solidFill>
-          <a:ln w="12700">
-            <a:solidFill>
-              <a:srgbClr val="C9D6EC"/>
-            </a:solidFill>
-            <a:prstDash val="solid"/>
-          </a:ln>
-        </p:spPr>
-        <p:txBody>
-          <a:bodyPr/>
-          <a:p/>
-        </p:txBody>
-      </p:sp>
-      <p:sp>
-        <p:nvSpPr>
-          <p:cNvPr id="5" name="Text 3"/>
-          <p:cNvSpPr txBox="1"/>
-          <p:nvPr/>
-        </p:nvSpPr>
-        <p:spPr>
-          <a:xfrm>
-            <a:off x="2112264" y="1371600"/>
-            <a:ext cx="1170432" cy="312724"/>
-          </a:xfrm>
-          <a:prstGeom prst="rect">
-            <a:avLst/>
-          </a:prstGeom>
-          <a:noFill/>
-          <a:ln/>
-        </p:spPr>
-        <p:txBody>
-          <a:bodyPr wrap="square" lIns="0" tIns="0" rIns="0" bIns="0" rtlCol="0" anchor="ctr"/>
-          <a:lstStyle/>
-          <a:p>
-            <a:pPr algn="ctr" indent="0" marL="0">
-              <a:buNone/>
-            </a:pPr>
-            <a:r>
-              <a:rPr lang="en-US" sz="1050" dirty="0">
-                <a:solidFill>
-                  <a:srgbClr val="5A6478"/>
-                </a:solidFill>
-                <a:latin typeface="맑은 고딕" pitchFamily="34" charset="0"/>
-                <a:ea typeface="맑은 고딕" pitchFamily="34" charset="-122"/>
-                <a:cs typeface="맑은 고딕" pitchFamily="34" charset="-120"/>
-              </a:rPr>
-              <a:t>측정</a:t>
-            </a:r>
-            <a:endParaRPr lang="en-US" sz="1100" dirty="0"/>
-          </a:p>
-        </p:txBody>
-      </p:sp>
-      <p:sp>
-        <p:nvSpPr>
-          <p:cNvPr id="6" name="Text 4"/>
-          <p:cNvSpPr txBox="1"/>
-          <p:nvPr/>
-        </p:nvSpPr>
-        <p:spPr>
-          <a:xfrm>
-            <a:off x="3282696" y="1371600"/>
-            <a:ext cx="182880" cy="312724"/>
-          </a:xfrm>
-          <a:prstGeom prst="rect">
-            <a:avLst/>
-          </a:prstGeom>
-          <a:noFill/>
-          <a:ln/>
-        </p:spPr>
-        <p:txBody>
-          <a:bodyPr wrap="square" lIns="0" tIns="0" rIns="0" bIns="0" rtlCol="0" anchor="ctr"/>
-          <a:lstStyle/>
-          <a:p>
-            <a:pPr algn="ctr" indent="0" marL="0">
-              <a:buNone/>
-            </a:pPr>
-            <a:r>
-              <a:rPr lang="en-US" sz="950" dirty="0">
-                <a:solidFill>
-                  <a:srgbClr val="C9D6EC"/>
-                </a:solidFill>
-              </a:rPr>
-              <a:t>▸</a:t>
-            </a:r>
-            <a:endParaRPr lang="en-US" sz="1000" dirty="0"/>
-          </a:p>
-        </p:txBody>
-      </p:sp>
-      <p:sp>
-        <p:nvSpPr>
-          <p:cNvPr id="7" name="Shape 5"/>
-          <p:cNvSpPr/>
-          <p:nvPr/>
-        </p:nvSpPr>
-        <p:spPr>
-          <a:xfrm>
-            <a:off x="3465576" y="1371600"/>
-            <a:ext cx="1170432" cy="312724"/>
-          </a:xfrm>
-          <a:prstGeom prst="roundRect">
-            <a:avLst>
-              <a:gd name="adj" fmla="val 47222"/>
-            </a:avLst>
-          </a:prstGeom>
-          <a:solidFill>
-            <a:srgbClr val="EEF1F7"/>
-          </a:solidFill>
-          <a:ln w="12700">
-            <a:solidFill>
-              <a:srgbClr val="C9D6EC"/>
-            </a:solidFill>
-            <a:prstDash val="solid"/>
-          </a:ln>
-        </p:spPr>
-        <p:txBody>
-          <a:bodyPr/>
-          <a:p/>
-        </p:txBody>
-      </p:sp>
-      <p:sp>
-        <p:nvSpPr>
-          <p:cNvPr id="8" name="Text 6"/>
-          <p:cNvSpPr txBox="1"/>
-          <p:nvPr/>
-        </p:nvSpPr>
-        <p:spPr>
-          <a:xfrm>
-            <a:off x="3465576" y="1371600"/>
-            <a:ext cx="1170432" cy="312724"/>
-          </a:xfrm>
-          <a:prstGeom prst="rect">
-            <a:avLst/>
-          </a:prstGeom>
-          <a:noFill/>
-          <a:ln/>
-        </p:spPr>
-        <p:txBody>
-          <a:bodyPr wrap="square" lIns="0" tIns="0" rIns="0" bIns="0" rtlCol="0" anchor="ctr"/>
-          <a:lstStyle/>
-          <a:p>
-            <a:pPr algn="ctr" indent="0" marL="0">
-              <a:buNone/>
-            </a:pPr>
-            <a:r>
-              <a:rPr lang="en-US" sz="1050" dirty="0">
-                <a:solidFill>
-                  <a:srgbClr val="5A6478"/>
-                </a:solidFill>
-                <a:latin typeface="맑은 고딕" pitchFamily="34" charset="0"/>
-                <a:ea typeface="맑은 고딕" pitchFamily="34" charset="-122"/>
-                <a:cs typeface="맑은 고딕" pitchFamily="34" charset="-120"/>
-              </a:rPr>
-              <a:t>안테나</a:t>
-            </a:r>
-            <a:endParaRPr lang="en-US" sz="1100" dirty="0"/>
-          </a:p>
-        </p:txBody>
-      </p:sp>
-      <p:sp>
-        <p:nvSpPr>
-          <p:cNvPr id="9" name="Text 7"/>
-          <p:cNvSpPr txBox="1"/>
-          <p:nvPr/>
-        </p:nvSpPr>
-        <p:spPr>
-          <a:xfrm>
-            <a:off x="4636008" y="1371600"/>
-            <a:ext cx="182880" cy="312724"/>
-          </a:xfrm>
-          <a:prstGeom prst="rect">
-            <a:avLst/>
-          </a:prstGeom>
-          <a:noFill/>
-          <a:ln/>
-        </p:spPr>
-        <p:txBody>
-          <a:bodyPr wrap="square" lIns="0" tIns="0" rIns="0" bIns="0" rtlCol="0" anchor="ctr"/>
-          <a:lstStyle/>
-          <a:p>
-            <a:pPr algn="ctr" indent="0" marL="0">
-              <a:buNone/>
-            </a:pPr>
-            <a:r>
-              <a:rPr lang="en-US" sz="950" dirty="0">
-                <a:solidFill>
-                  <a:srgbClr val="C9D6EC"/>
-                </a:solidFill>
-              </a:rPr>
-              <a:t>▸</a:t>
-            </a:r>
-            <a:endParaRPr lang="en-US" sz="1000" dirty="0"/>
-          </a:p>
-        </p:txBody>
-      </p:sp>
-      <p:sp>
-        <p:nvSpPr>
-          <p:cNvPr id="10" name="Shape 8"/>
-          <p:cNvSpPr/>
-          <p:nvPr/>
-        </p:nvSpPr>
-        <p:spPr>
-          <a:xfrm>
-            <a:off x="4818888" y="1371600"/>
-            <a:ext cx="1170432" cy="312724"/>
-          </a:xfrm>
-          <a:prstGeom prst="roundRect">
-            <a:avLst>
-              <a:gd name="adj" fmla="val 47222"/>
-            </a:avLst>
-          </a:prstGeom>
-          <a:solidFill>
-            <a:srgbClr val="C2521C"/>
-          </a:solidFill>
-          <a:ln w="12700">
-            <a:solidFill>
-              <a:srgbClr val="C2521C"/>
-            </a:solidFill>
-            <a:prstDash val="solid"/>
-          </a:ln>
-        </p:spPr>
-        <p:txBody>
-          <a:bodyPr/>
-          <a:p/>
-        </p:txBody>
-      </p:sp>
-      <p:sp>
-        <p:nvSpPr>
-          <p:cNvPr id="11" name="Text 9"/>
-          <p:cNvSpPr txBox="1"/>
-          <p:nvPr/>
-        </p:nvSpPr>
-        <p:spPr>
-          <a:xfrm>
-            <a:off x="4818888" y="1371600"/>
-            <a:ext cx="1170432" cy="312724"/>
-          </a:xfrm>
-          <a:prstGeom prst="rect">
-            <a:avLst/>
-          </a:prstGeom>
-          <a:noFill/>
-          <a:ln/>
-        </p:spPr>
-        <p:txBody>
-          <a:bodyPr wrap="square" lIns="0" tIns="0" rIns="0" bIns="0" rtlCol="0" anchor="ctr"/>
-          <a:lstStyle/>
-          <a:p>
-            <a:pPr algn="ctr" indent="0" marL="0">
-              <a:buNone/>
-            </a:pPr>
-            <a:r>
-              <a:rPr lang="en-US" sz="1050" b="1" dirty="0">
-                <a:solidFill>
-                  <a:srgbClr val="FFFFFF"/>
-                </a:solidFill>
-                <a:latin typeface="맑은 고딕" pitchFamily="34" charset="0"/>
-                <a:ea typeface="맑은 고딕" pitchFamily="34" charset="-122"/>
-                <a:cs typeface="맑은 고딕" pitchFamily="34" charset="-120"/>
-              </a:rPr>
-              <a:t>동체</a:t>
-            </a:r>
-            <a:endParaRPr lang="en-US" sz="1100" dirty="0"/>
-          </a:p>
-        </p:txBody>
-      </p:sp>
-      <p:sp>
-        <p:nvSpPr>
-          <p:cNvPr id="12" name="Text 10"/>
-          <p:cNvSpPr txBox="1"/>
-          <p:nvPr/>
-        </p:nvSpPr>
-        <p:spPr>
-          <a:xfrm>
-            <a:off x="5989320" y="1371600"/>
-            <a:ext cx="182880" cy="312724"/>
-          </a:xfrm>
-          <a:prstGeom prst="rect">
-            <a:avLst/>
-          </a:prstGeom>
-          <a:noFill/>
-          <a:ln/>
-        </p:spPr>
-        <p:txBody>
-          <a:bodyPr wrap="square" lIns="0" tIns="0" rIns="0" bIns="0" rtlCol="0" anchor="ctr"/>
-          <a:lstStyle/>
-          <a:p>
-            <a:pPr algn="ctr" indent="0" marL="0">
-              <a:buNone/>
-            </a:pPr>
-            <a:r>
-              <a:rPr lang="en-US" sz="950" dirty="0">
-                <a:solidFill>
-                  <a:srgbClr val="C9D6EC"/>
-                </a:solidFill>
-              </a:rPr>
-              <a:t>▸</a:t>
-            </a:r>
-            <a:endParaRPr lang="en-US" sz="1000" dirty="0"/>
-          </a:p>
-        </p:txBody>
-      </p:sp>
-      <p:sp>
-        <p:nvSpPr>
-          <p:cNvPr id="13" name="Shape 11"/>
-          <p:cNvSpPr/>
-          <p:nvPr/>
-        </p:nvSpPr>
-        <p:spPr>
-          <a:xfrm>
-            <a:off x="6172200" y="1371600"/>
-            <a:ext cx="1170432" cy="312724"/>
-          </a:xfrm>
-          <a:prstGeom prst="roundRect">
-            <a:avLst>
-              <a:gd name="adj" fmla="val 47222"/>
-            </a:avLst>
-          </a:prstGeom>
-          <a:solidFill>
-            <a:srgbClr val="EEF1F7"/>
-          </a:solidFill>
-          <a:ln w="12700">
-            <a:solidFill>
-              <a:srgbClr val="C9D6EC"/>
-            </a:solidFill>
-            <a:prstDash val="solid"/>
-          </a:ln>
-        </p:spPr>
-        <p:txBody>
-          <a:bodyPr/>
-          <a:p/>
-        </p:txBody>
-      </p:sp>
-      <p:sp>
-        <p:nvSpPr>
-          <p:cNvPr id="14" name="Text 12"/>
-          <p:cNvSpPr txBox="1"/>
-          <p:nvPr/>
-        </p:nvSpPr>
-        <p:spPr>
-          <a:xfrm>
-            <a:off x="6172200" y="1371600"/>
-            <a:ext cx="1170432" cy="312724"/>
-          </a:xfrm>
-          <a:prstGeom prst="rect">
-            <a:avLst/>
-          </a:prstGeom>
-          <a:noFill/>
-          <a:ln/>
-        </p:spPr>
-        <p:txBody>
-          <a:bodyPr wrap="square" lIns="0" tIns="0" rIns="0" bIns="0" rtlCol="0" anchor="ctr"/>
-          <a:lstStyle/>
-          <a:p>
-            <a:pPr algn="ctr" indent="0" marL="0">
-              <a:buNone/>
-            </a:pPr>
-            <a:r>
-              <a:rPr lang="en-US" sz="1050" dirty="0">
-                <a:solidFill>
-                  <a:srgbClr val="5A6478"/>
-                </a:solidFill>
-                <a:latin typeface="맑은 고딕" pitchFamily="34" charset="0"/>
-                <a:ea typeface="맑은 고딕" pitchFamily="34" charset="-122"/>
-                <a:cs typeface="맑은 고딕" pitchFamily="34" charset="-120"/>
-              </a:rPr>
-              <a:t>NED</a:t>
-            </a:r>
-            <a:endParaRPr lang="en-US" sz="1100" dirty="0"/>
-          </a:p>
-        </p:txBody>
-      </p:sp>
-      <p:sp>
-        <p:nvSpPr>
-          <p:cNvPr id="15" name="Text 13"/>
-          <p:cNvSpPr txBox="1"/>
-          <p:nvPr/>
-        </p:nvSpPr>
-        <p:spPr>
-          <a:xfrm>
-            <a:off x="7342632" y="1371600"/>
-            <a:ext cx="182880" cy="312724"/>
-          </a:xfrm>
-          <a:prstGeom prst="rect">
-            <a:avLst/>
-          </a:prstGeom>
-          <a:noFill/>
-          <a:ln/>
-        </p:spPr>
-        <p:txBody>
-          <a:bodyPr wrap="square" lIns="0" tIns="0" rIns="0" bIns="0" rtlCol="0" anchor="ctr"/>
-          <a:lstStyle/>
-          <a:p>
-            <a:pPr algn="ctr" indent="0" marL="0">
-              <a:buNone/>
-            </a:pPr>
-            <a:r>
-              <a:rPr lang="en-US" sz="950" dirty="0">
-                <a:solidFill>
-                  <a:srgbClr val="C9D6EC"/>
-                </a:solidFill>
-              </a:rPr>
-              <a:t>▸</a:t>
-            </a:r>
-            <a:endParaRPr lang="en-US" sz="1000" dirty="0"/>
-          </a:p>
-        </p:txBody>
-      </p:sp>
-      <p:sp>
-        <p:nvSpPr>
-          <p:cNvPr id="16" name="Shape 14"/>
-          <p:cNvSpPr/>
-          <p:nvPr/>
-        </p:nvSpPr>
-        <p:spPr>
-          <a:xfrm>
-            <a:off x="7525512" y="1371600"/>
-            <a:ext cx="1170432" cy="312724"/>
-          </a:xfrm>
-          <a:prstGeom prst="roundRect">
-            <a:avLst>
-              <a:gd name="adj" fmla="val 47222"/>
-            </a:avLst>
-          </a:prstGeom>
-          <a:solidFill>
-            <a:srgbClr val="EEF1F7"/>
-          </a:solidFill>
-          <a:ln w="12700">
-            <a:solidFill>
-              <a:srgbClr val="C9D6EC"/>
-            </a:solidFill>
-            <a:prstDash val="solid"/>
-          </a:ln>
-        </p:spPr>
-        <p:txBody>
-          <a:bodyPr/>
-          <a:p/>
-        </p:txBody>
-      </p:sp>
-      <p:sp>
-        <p:nvSpPr>
-          <p:cNvPr id="17" name="Text 15"/>
-          <p:cNvSpPr txBox="1"/>
-          <p:nvPr/>
-        </p:nvSpPr>
-        <p:spPr>
-          <a:xfrm>
-            <a:off x="7525512" y="1371600"/>
-            <a:ext cx="1170432" cy="312724"/>
-          </a:xfrm>
-          <a:prstGeom prst="rect">
-            <a:avLst/>
-          </a:prstGeom>
-          <a:noFill/>
-          <a:ln/>
-        </p:spPr>
-        <p:txBody>
-          <a:bodyPr wrap="square" lIns="0" tIns="0" rIns="0" bIns="0" rtlCol="0" anchor="ctr"/>
-          <a:lstStyle/>
-          <a:p>
-            <a:pPr algn="ctr" indent="0" marL="0">
-              <a:buNone/>
-            </a:pPr>
-            <a:r>
-              <a:rPr lang="en-US" sz="1050" dirty="0">
-                <a:solidFill>
-                  <a:srgbClr val="5A6478"/>
-                </a:solidFill>
-                <a:latin typeface="맑은 고딕" pitchFamily="34" charset="0"/>
-                <a:ea typeface="맑은 고딕" pitchFamily="34" charset="-122"/>
-                <a:cs typeface="맑은 고딕" pitchFamily="34" charset="-120"/>
-              </a:rPr>
-              <a:t>ECEF</a:t>
-            </a:r>
-            <a:endParaRPr lang="en-US" sz="1100" dirty="0"/>
-          </a:p>
-        </p:txBody>
-      </p:sp>
-      <p:sp>
-        <p:nvSpPr>
-          <p:cNvPr id="18" name="Text 16"/>
-          <p:cNvSpPr txBox="1"/>
-          <p:nvPr/>
-        </p:nvSpPr>
-        <p:spPr>
-          <a:xfrm>
-            <a:off x="8695944" y="1371600"/>
-            <a:ext cx="182880" cy="312724"/>
-          </a:xfrm>
-          <a:prstGeom prst="rect">
-            <a:avLst/>
-          </a:prstGeom>
-          <a:noFill/>
-          <a:ln/>
-        </p:spPr>
-        <p:txBody>
-          <a:bodyPr wrap="square" lIns="0" tIns="0" rIns="0" bIns="0" rtlCol="0" anchor="ctr"/>
-          <a:lstStyle/>
-          <a:p>
-            <a:pPr algn="ctr" indent="0" marL="0">
-              <a:buNone/>
-            </a:pPr>
-            <a:r>
-              <a:rPr lang="en-US" sz="950" dirty="0">
-                <a:solidFill>
-                  <a:srgbClr val="C9D6EC"/>
-                </a:solidFill>
-              </a:rPr>
-              <a:t>▸</a:t>
-            </a:r>
-            <a:endParaRPr lang="en-US" sz="1000" dirty="0"/>
-          </a:p>
-        </p:txBody>
-      </p:sp>
-      <p:sp>
-        <p:nvSpPr>
-          <p:cNvPr id="19" name="Shape 17"/>
-          <p:cNvSpPr/>
-          <p:nvPr/>
-        </p:nvSpPr>
-        <p:spPr>
-          <a:xfrm>
-            <a:off x="8878824" y="1371600"/>
-            <a:ext cx="1170432" cy="312724"/>
-          </a:xfrm>
-          <a:prstGeom prst="roundRect">
-            <a:avLst>
-              <a:gd name="adj" fmla="val 47222"/>
-            </a:avLst>
-          </a:prstGeom>
-          <a:solidFill>
-            <a:srgbClr val="EEF1F7"/>
-          </a:solidFill>
-          <a:ln w="12700">
-            <a:solidFill>
-              <a:srgbClr val="C9D6EC"/>
-            </a:solidFill>
-            <a:prstDash val="solid"/>
-          </a:ln>
-        </p:spPr>
-        <p:txBody>
-          <a:bodyPr/>
-          <a:p/>
-        </p:txBody>
-      </p:sp>
-      <p:sp>
-        <p:nvSpPr>
-          <p:cNvPr id="20" name="Text 18"/>
-          <p:cNvSpPr txBox="1"/>
-          <p:nvPr/>
-        </p:nvSpPr>
-        <p:spPr>
-          <a:xfrm>
-            <a:off x="8878824" y="1371600"/>
-            <a:ext cx="1170432" cy="312724"/>
-          </a:xfrm>
-          <a:prstGeom prst="rect">
-            <a:avLst/>
-          </a:prstGeom>
-          <a:noFill/>
-          <a:ln/>
-        </p:spPr>
-        <p:txBody>
-          <a:bodyPr wrap="square" lIns="0" tIns="0" rIns="0" bIns="0" rtlCol="0" anchor="ctr"/>
-          <a:lstStyle/>
-          <a:p>
-            <a:pPr algn="ctr" indent="0" marL="0">
-              <a:buNone/>
-            </a:pPr>
-            <a:r>
-              <a:rPr lang="en-US" sz="1050" dirty="0">
-                <a:solidFill>
-                  <a:srgbClr val="5A6478"/>
-                </a:solidFill>
-                <a:latin typeface="맑은 고딕" pitchFamily="34" charset="0"/>
-                <a:ea typeface="맑은 고딕" pitchFamily="34" charset="-122"/>
-                <a:cs typeface="맑은 고딕" pitchFamily="34" charset="-120"/>
-              </a:rPr>
-              <a:t>LLA</a:t>
-            </a:r>
-            <a:endParaRPr lang="en-US" sz="1100" dirty="0"/>
-          </a:p>
-        </p:txBody>
-      </p:sp>
-      <p:pic>
-        <p:nvPicPr>
-          <p:cNvPr id="21" name="Image 0" descr="/home/claude/gitpkg/Part2_CoordFrames/doc/figures/fig06_body.png">    </p:cNvPr>
-          <p:cNvPicPr>
-            <a:picLocks noChangeAspect="1"/>
-          </p:cNvPicPr>
-          <p:nvPr/>
-        </p:nvPicPr>
-        <p:blipFill>
-          <a:blip r:embed="rId1"/>
-          <a:stretch>
-            <a:fillRect/>
-          </a:stretch>
-        </p:blipFill>
-        <p:spPr>
-          <a:xfrm>
-            <a:off x="2176655" y="1788566"/>
-            <a:ext cx="7844785" cy="3353104"/>
-          </a:xfrm>
-          <a:prstGeom prst="rect">
-            <a:avLst/>
-          </a:prstGeom>
-        </p:spPr>
-      </p:pic>
-      <p:sp>
-        <p:nvSpPr>
-          <p:cNvPr id="22" name="Shape 19"/>
-          <p:cNvSpPr/>
-          <p:nvPr/>
-        </p:nvSpPr>
-        <p:spPr>
-          <a:xfrm>
-            <a:off x="566928" y="5193792"/>
-            <a:ext cx="2651760" cy="1042416"/>
-          </a:xfrm>
-          <a:prstGeom prst="roundRect">
-            <a:avLst>
-              <a:gd name="adj" fmla="val 6667"/>
-            </a:avLst>
-          </a:prstGeom>
-          <a:solidFill>
-            <a:srgbClr val="EEF1F7"/>
-          </a:solidFill>
-          <a:ln w="12700">
-            <a:solidFill>
-              <a:srgbClr val="FFFFFF"/>
-            </a:solidFill>
-            <a:prstDash val="solid"/>
-          </a:ln>
-        </p:spPr>
-        <p:txBody>
-          <a:bodyPr/>
-          <a:p/>
-        </p:txBody>
-      </p:sp>
-      <p:sp>
-        <p:nvSpPr>
-          <p:cNvPr id="23" name="Text 20"/>
-          <p:cNvSpPr txBox="1"/>
-          <p:nvPr/>
-        </p:nvSpPr>
-        <p:spPr>
-          <a:xfrm>
-            <a:off x="749808" y="5298033"/>
-            <a:ext cx="2286000" cy="260604"/>
-          </a:xfrm>
-          <a:prstGeom prst="rect">
-            <a:avLst/>
-          </a:prstGeom>
-          <a:noFill/>
-          <a:ln/>
-        </p:spPr>
-        <p:txBody>
-          <a:bodyPr wrap="square" lIns="0" tIns="0" rIns="0" bIns="0" rtlCol="0" anchor="ctr"/>
-          <a:lstStyle/>
-          <a:p>
-            <a:pPr indent="0" marL="0">
-              <a:buNone/>
-            </a:pPr>
-            <a:r>
-              <a:rPr lang="en-US" sz="1140" b="1" dirty="0">
-                <a:solidFill>
-                  <a:srgbClr val="2B57A6"/>
-                </a:solidFill>
-                <a:latin typeface="맑은 고딕" pitchFamily="34" charset="0"/>
-                <a:ea typeface="맑은 고딕" pitchFamily="34" charset="-122"/>
-                <a:cs typeface="맑은 고딕" pitchFamily="34" charset="-120"/>
-              </a:rPr>
-              <a:t>원점</a:t>
-            </a:r>
-            <a:endParaRPr lang="en-US" sz="1200" dirty="0"/>
-          </a:p>
-        </p:txBody>
-      </p:sp>
-      <p:sp>
-        <p:nvSpPr>
-          <p:cNvPr id="24" name="Text 21"/>
-          <p:cNvSpPr txBox="1"/>
-          <p:nvPr/>
-        </p:nvSpPr>
-        <p:spPr>
-          <a:xfrm>
-            <a:off x="749808" y="5576011"/>
-            <a:ext cx="2286000" cy="573328"/>
-          </a:xfrm>
-          <a:prstGeom prst="rect">
-            <a:avLst/>
-          </a:prstGeom>
-          <a:noFill/>
-          <a:ln/>
-        </p:spPr>
-        <p:txBody>
-          <a:bodyPr wrap="square" lIns="0" tIns="0" rIns="0" bIns="0" rtlCol="0" anchor="ctr"/>
-          <a:lstStyle/>
-          <a:p>
-            <a:pPr indent="0" marL="0">
-              <a:lnSpc>
-                <a:spcPts val="1520"/>
-              </a:lnSpc>
-              <a:buNone/>
-            </a:pPr>
-            <a:r>
-              <a:rPr lang="en-US" sz="1090" dirty="0">
-                <a:solidFill>
-                  <a:srgbClr val="1A2233"/>
-                </a:solidFill>
-                <a:latin typeface="맑은 고딕" pitchFamily="34" charset="0"/>
-                <a:ea typeface="맑은 고딕" pitchFamily="34" charset="-122"/>
-                <a:cs typeface="맑은 고딕" pitchFamily="34" charset="-120"/>
-              </a:rPr>
-              <a:t>배의 무게중심</a:t>
-            </a:r>
-            <a:endParaRPr lang="en-US" sz="1150" dirty="0"/>
-          </a:p>
-        </p:txBody>
-      </p:sp>
-      <p:sp>
-        <p:nvSpPr>
-          <p:cNvPr id="25" name="Shape 22"/>
-          <p:cNvSpPr/>
-          <p:nvPr/>
-        </p:nvSpPr>
-        <p:spPr>
-          <a:xfrm>
-            <a:off x="3364992" y="5193792"/>
-            <a:ext cx="2651760" cy="1042416"/>
-          </a:xfrm>
-          <a:prstGeom prst="roundRect">
-            <a:avLst>
-              <a:gd name="adj" fmla="val 6667"/>
-            </a:avLst>
-          </a:prstGeom>
-          <a:solidFill>
-            <a:srgbClr val="EEF1F7"/>
-          </a:solidFill>
-          <a:ln w="12700">
-            <a:solidFill>
-              <a:srgbClr val="FFFFFF"/>
-            </a:solidFill>
-            <a:prstDash val="solid"/>
-          </a:ln>
-        </p:spPr>
-        <p:txBody>
-          <a:bodyPr/>
-          <a:p/>
-        </p:txBody>
-      </p:sp>
-      <p:sp>
-        <p:nvSpPr>
-          <p:cNvPr id="26" name="Text 23"/>
-          <p:cNvSpPr txBox="1"/>
-          <p:nvPr/>
-        </p:nvSpPr>
-        <p:spPr>
-          <a:xfrm>
-            <a:off x="3547872" y="5298033"/>
-            <a:ext cx="2286000" cy="260604"/>
-          </a:xfrm>
-          <a:prstGeom prst="rect">
-            <a:avLst/>
-          </a:prstGeom>
-          <a:noFill/>
-          <a:ln/>
-        </p:spPr>
-        <p:txBody>
-          <a:bodyPr wrap="square" lIns="0" tIns="0" rIns="0" bIns="0" rtlCol="0" anchor="ctr"/>
-          <a:lstStyle/>
-          <a:p>
-            <a:pPr indent="0" marL="0">
-              <a:buNone/>
-            </a:pPr>
-            <a:r>
-              <a:rPr lang="en-US" sz="1140" b="1" dirty="0">
-                <a:solidFill>
-                  <a:srgbClr val="2B57A6"/>
-                </a:solidFill>
-                <a:latin typeface="맑은 고딕" pitchFamily="34" charset="0"/>
-                <a:ea typeface="맑은 고딕" pitchFamily="34" charset="-122"/>
-                <a:cs typeface="맑은 고딕" pitchFamily="34" charset="-120"/>
-              </a:rPr>
-              <a:t>축</a:t>
-            </a:r>
-            <a:endParaRPr lang="en-US" sz="1200" dirty="0"/>
-          </a:p>
-        </p:txBody>
-      </p:sp>
-      <p:sp>
-        <p:nvSpPr>
-          <p:cNvPr id="27" name="Text 24"/>
-          <p:cNvSpPr txBox="1"/>
-          <p:nvPr/>
-        </p:nvSpPr>
-        <p:spPr>
-          <a:xfrm>
-            <a:off x="3547872" y="5576011"/>
-            <a:ext cx="2286000" cy="573328"/>
-          </a:xfrm>
-          <a:prstGeom prst="rect">
-            <a:avLst/>
-          </a:prstGeom>
-          <a:noFill/>
-          <a:ln/>
-        </p:spPr>
-        <p:txBody>
-          <a:bodyPr wrap="square" lIns="0" tIns="0" rIns="0" bIns="0" rtlCol="0" anchor="ctr"/>
-          <a:lstStyle/>
-          <a:p>
-            <a:pPr indent="0" marL="0">
-              <a:lnSpc>
-                <a:spcPts val="1520"/>
-              </a:lnSpc>
-              <a:buNone/>
-            </a:pPr>
-            <a:r>
-              <a:rPr lang="en-US" sz="1090" dirty="0">
-                <a:solidFill>
-                  <a:srgbClr val="1A2233"/>
-                </a:solidFill>
-                <a:latin typeface="맑은 고딕" pitchFamily="34" charset="0"/>
-                <a:ea typeface="맑은 고딕" pitchFamily="34" charset="-122"/>
-                <a:cs typeface="맑은 고딕" pitchFamily="34" charset="-120"/>
-              </a:rPr>
-              <a:t>x 선수(앞) · y 우현(오른쪽) · z 아래  →  FRD</a:t>
-            </a:r>
-            <a:endParaRPr lang="en-US" sz="1150" dirty="0"/>
-          </a:p>
-        </p:txBody>
-      </p:sp>
-      <p:sp>
-        <p:nvSpPr>
-          <p:cNvPr id="28" name="Shape 25"/>
-          <p:cNvSpPr/>
-          <p:nvPr/>
-        </p:nvSpPr>
-        <p:spPr>
-          <a:xfrm>
-            <a:off x="6163056" y="5193792"/>
-            <a:ext cx="2651760" cy="1042416"/>
-          </a:xfrm>
-          <a:prstGeom prst="roundRect">
-            <a:avLst>
-              <a:gd name="adj" fmla="val 6667"/>
-            </a:avLst>
-          </a:prstGeom>
-          <a:solidFill>
-            <a:srgbClr val="EEF1F7"/>
-          </a:solidFill>
-          <a:ln w="12700">
-            <a:solidFill>
-              <a:srgbClr val="FFFFFF"/>
-            </a:solidFill>
-            <a:prstDash val="solid"/>
-          </a:ln>
-        </p:spPr>
-        <p:txBody>
-          <a:bodyPr/>
-          <a:p/>
-        </p:txBody>
-      </p:sp>
-      <p:sp>
-        <p:nvSpPr>
-          <p:cNvPr id="29" name="Text 26"/>
-          <p:cNvSpPr txBox="1"/>
-          <p:nvPr/>
-        </p:nvSpPr>
-        <p:spPr>
-          <a:xfrm>
-            <a:off x="6345936" y="5298033"/>
-            <a:ext cx="2286000" cy="260604"/>
-          </a:xfrm>
-          <a:prstGeom prst="rect">
-            <a:avLst/>
-          </a:prstGeom>
-          <a:noFill/>
-          <a:ln/>
-        </p:spPr>
-        <p:txBody>
-          <a:bodyPr wrap="square" lIns="0" tIns="0" rIns="0" bIns="0" rtlCol="0" anchor="ctr"/>
-          <a:lstStyle/>
-          <a:p>
-            <a:pPr indent="0" marL="0">
-              <a:buNone/>
-            </a:pPr>
-            <a:r>
-              <a:rPr lang="en-US" sz="1140" b="1" dirty="0">
-                <a:solidFill>
-                  <a:srgbClr val="2B57A6"/>
-                </a:solidFill>
-                <a:latin typeface="맑은 고딕" pitchFamily="34" charset="0"/>
-                <a:ea typeface="맑은 고딕" pitchFamily="34" charset="-122"/>
-                <a:cs typeface="맑은 고딕" pitchFamily="34" charset="-120"/>
-              </a:rPr>
-              <a:t>자세각</a:t>
-            </a:r>
-            <a:endParaRPr lang="en-US" sz="1200" dirty="0"/>
-          </a:p>
-        </p:txBody>
-      </p:sp>
-      <p:sp>
-        <p:nvSpPr>
-          <p:cNvPr id="30" name="Text 27"/>
-          <p:cNvSpPr txBox="1"/>
-          <p:nvPr/>
-        </p:nvSpPr>
-        <p:spPr>
-          <a:xfrm>
-            <a:off x="6345936" y="5576011"/>
-            <a:ext cx="2286000" cy="573328"/>
-          </a:xfrm>
-          <a:prstGeom prst="rect">
-            <a:avLst/>
-          </a:prstGeom>
-          <a:noFill/>
-          <a:ln/>
-        </p:spPr>
-        <p:txBody>
-          <a:bodyPr wrap="square" lIns="0" tIns="0" rIns="0" bIns="0" rtlCol="0" anchor="ctr"/>
-          <a:lstStyle/>
-          <a:p>
-            <a:pPr indent="0" marL="0">
-              <a:lnSpc>
-                <a:spcPts val="1520"/>
-              </a:lnSpc>
-              <a:buNone/>
-            </a:pPr>
-            <a:r>
-              <a:rPr lang="en-US" sz="1090" dirty="0">
-                <a:solidFill>
-                  <a:srgbClr val="1A2233"/>
-                </a:solidFill>
-                <a:latin typeface="맑은 고딕" pitchFamily="34" charset="0"/>
-                <a:ea typeface="맑은 고딕" pitchFamily="34" charset="-122"/>
-                <a:cs typeface="맑은 고딕" pitchFamily="34" charset="-120"/>
-              </a:rPr>
-              <a:t>roll 좌우 기울기 · pitch 앞뒤 기울기 · yaw 선수 방위</a:t>
-            </a:r>
-            <a:endParaRPr lang="en-US" sz="1150" dirty="0"/>
-          </a:p>
-        </p:txBody>
-      </p:sp>
-      <p:sp>
-        <p:nvSpPr>
-          <p:cNvPr id="31" name="Shape 28"/>
-          <p:cNvSpPr/>
-          <p:nvPr/>
-        </p:nvSpPr>
-        <p:spPr>
-          <a:xfrm>
-            <a:off x="8961120" y="5193792"/>
-            <a:ext cx="2651760" cy="1042416"/>
-          </a:xfrm>
-          <a:prstGeom prst="roundRect">
-            <a:avLst>
-              <a:gd name="adj" fmla="val 6667"/>
-            </a:avLst>
-          </a:prstGeom>
-          <a:solidFill>
-            <a:srgbClr val="EEF1F7"/>
-          </a:solidFill>
-          <a:ln w="12700">
-            <a:solidFill>
-              <a:srgbClr val="FFFFFF"/>
-            </a:solidFill>
-            <a:prstDash val="solid"/>
-          </a:ln>
-        </p:spPr>
-        <p:txBody>
-          <a:bodyPr/>
-          <a:p/>
-        </p:txBody>
-      </p:sp>
-      <p:sp>
-        <p:nvSpPr>
-          <p:cNvPr id="32" name="Text 29"/>
-          <p:cNvSpPr txBox="1"/>
-          <p:nvPr/>
-        </p:nvSpPr>
-        <p:spPr>
-          <a:xfrm>
-            <a:off x="9144000" y="5298033"/>
-            <a:ext cx="2286000" cy="260604"/>
-          </a:xfrm>
-          <a:prstGeom prst="rect">
-            <a:avLst/>
-          </a:prstGeom>
-          <a:noFill/>
-          <a:ln/>
-        </p:spPr>
-        <p:txBody>
-          <a:bodyPr wrap="square" lIns="0" tIns="0" rIns="0" bIns="0" rtlCol="0" anchor="ctr"/>
-          <a:lstStyle/>
-          <a:p>
-            <a:pPr indent="0" marL="0">
-              <a:buNone/>
-            </a:pPr>
-            <a:r>
-              <a:rPr lang="en-US" sz="1140" b="1" dirty="0">
-                <a:solidFill>
-                  <a:srgbClr val="2B57A6"/>
-                </a:solidFill>
-                <a:latin typeface="맑은 고딕" pitchFamily="34" charset="0"/>
-                <a:ea typeface="맑은 고딕" pitchFamily="34" charset="-122"/>
-                <a:cs typeface="맑은 고딕" pitchFamily="34" charset="-120"/>
-              </a:rPr>
-              <a:t>합치는 순서</a:t>
-            </a:r>
-            <a:endParaRPr lang="en-US" sz="1200" dirty="0"/>
-          </a:p>
-        </p:txBody>
-      </p:sp>
-      <p:sp>
-        <p:nvSpPr>
-          <p:cNvPr id="33" name="Text 30"/>
-          <p:cNvSpPr txBox="1"/>
-          <p:nvPr/>
-        </p:nvSpPr>
-        <p:spPr>
-          <a:xfrm>
-            <a:off x="9144000" y="5576011"/>
-            <a:ext cx="2286000" cy="573328"/>
-          </a:xfrm>
-          <a:prstGeom prst="rect">
-            <a:avLst/>
-          </a:prstGeom>
-          <a:noFill/>
-          <a:ln/>
-        </p:spPr>
-        <p:txBody>
-          <a:bodyPr wrap="square" lIns="0" tIns="0" rIns="0" bIns="0" rtlCol="0" anchor="ctr"/>
-          <a:lstStyle/>
-          <a:p>
-            <a:pPr indent="0" marL="0">
-              <a:lnSpc>
-                <a:spcPts val="1520"/>
-              </a:lnSpc>
-              <a:buNone/>
-            </a:pPr>
-            <a:r>
-              <a:rPr lang="en-US" sz="1090" dirty="0">
-                <a:solidFill>
-                  <a:srgbClr val="1A2233"/>
-                </a:solidFill>
-                <a:latin typeface="맑은 고딕" pitchFamily="34" charset="0"/>
-                <a:ea typeface="맑은 고딕" pitchFamily="34" charset="-122"/>
-                <a:cs typeface="맑은 고딕" pitchFamily="34" charset="-120"/>
-              </a:rPr>
-              <a:t>3-2-1 (yaw → pitch → roll)</a:t>
-            </a:r>
-            <a:endParaRPr lang="en-US" sz="1150" dirty="0"/>
-          </a:p>
-        </p:txBody>
-      </p:sp>
-      <p:sp>
-        <p:nvSpPr>
-          <p:cNvPr id="35" name="Rectangle 34"/>
-          <p:cNvSpPr/>
-          <p:nvPr/>
-        </p:nvSpPr>
-        <p:spPr>
-          <a:xfrm>
-            <a:off x="457200" y="411480"/>
-            <a:ext cx="11277295" cy="777240"/>
-          </a:xfrm>
-          <a:prstGeom prst="rect">
-            <a:avLst/>
-          </a:prstGeom>
-          <a:solidFill>
-            <a:srgbClr val="13233F"/>
-          </a:solidFill>
-          <a:ln>
-            <a:noFill/>
-          </a:ln>
-          <a:effectLst/>
-        </p:spPr>
-        <p:style>
-          <a:lnRef idx="1">
-            <a:schemeClr val="accent1"/>
-          </a:lnRef>
-          <a:fillRef idx="3">
-            <a:schemeClr val="accent1"/>
-          </a:fillRef>
-          <a:effectRef idx="2">
-            <a:schemeClr val="accent1"/>
-          </a:effectRef>
-          <a:fontRef idx="minor">
-            <a:schemeClr val="lt1"/>
-          </a:fontRef>
-        </p:style>
-        <p:txBody>
-          <a:bodyPr rtlCol="0" anchor="ctr" wrap="none"/>
-          <a:lstStyle/>
-          <a:p>
-            <a:pPr algn="ctr"/>
-          </a:p>
-        </p:txBody>
-      </p:sp>
-      <p:sp>
-        <p:nvSpPr>
-          <p:cNvPr id="36" name="TextBox 35"/>
-          <p:cNvSpPr txBox="1"/>
-          <p:nvPr/>
-        </p:nvSpPr>
-        <p:spPr>
-          <a:xfrm>
-            <a:off x="640080" y="411480"/>
-            <a:ext cx="8732520" cy="777240"/>
-          </a:xfrm>
-          <a:prstGeom prst="rect">
-            <a:avLst/>
-          </a:prstGeom>
-          <a:noFill/>
-        </p:spPr>
-        <p:txBody>
-          <a:bodyPr wrap="square" anchor="ctr" lIns="0" rIns="0" tIns="0" bIns="0">
-            <a:spAutoFit/>
-          </a:bodyPr>
-          <a:lstStyle/>
-          <a:p>
-            <a:pPr algn="l">
-              <a:spcAft>
-                <a:spcPts val="300"/>
-              </a:spcAft>
-            </a:pPr>
-            <a:r>
-              <a:rPr sz="1900" b="1">
-                <a:solidFill>
-                  <a:srgbClr val="FFFFFF"/>
-                </a:solidFill>
-                <a:latin typeface="맑은 고딕"/>
-              </a:rPr>
-              <a:t>01. 동체(Body) 좌표계</a:t>
-            </a:r>
-          </a:p>
-          <a:p>
-            <a:pPr algn="l">
-              <a:lnSpc>
-                <a:spcPts val="1400"/>
-              </a:lnSpc>
-            </a:pPr>
-            <a:r>
-              <a:rPr sz="1100" b="0">
-                <a:solidFill>
-                  <a:srgbClr val="C9D6EC"/>
-                </a:solidFill>
-                <a:latin typeface="맑은 고딕"/>
-              </a:rPr>
-              <a:t>배에 실린 모든 장비의 공통 기준 — 안테나 · INS (Inertial Navigation System) · 무장이 여기로 모입니다</a:t>
-            </a:r>
-          </a:p>
-        </p:txBody>
-      </p:sp>
-      <p:cxnSp>
-        <p:nvCxnSpPr>
-          <p:cNvPr id="38" name="Connector 37"/>
-          <p:cNvCxnSpPr/>
-          <p:nvPr/>
-        </p:nvCxnSpPr>
-        <p:spPr>
-          <a:xfrm>
-            <a:off x="457200" y="6355080"/>
-            <a:ext cx="11277295" cy="0"/>
-          </a:xfrm>
-          <a:prstGeom prst="line">
-            <a:avLst/>
-          </a:prstGeom>
-          <a:ln w="9525">
-            <a:solidFill>
-              <a:srgbClr val="B9C0CC"/>
-            </a:solidFill>
-          </a:ln>
-        </p:spPr>
-        <p:style>
-          <a:lnRef idx="2">
-            <a:schemeClr val="accent1"/>
-          </a:lnRef>
-          <a:fillRef idx="0">
-            <a:schemeClr val="accent1"/>
-          </a:fillRef>
-          <a:effectRef idx="1">
-            <a:schemeClr val="accent1"/>
-          </a:effectRef>
-          <a:fontRef idx="minor">
-            <a:schemeClr val="tx1"/>
-          </a:fontRef>
-        </p:style>
-      </p:cxnSp>
-      <p:sp>
-        <p:nvSpPr>
-          <p:cNvPr id="40" name="TextBox 39"/>
-          <p:cNvSpPr txBox="1"/>
-          <p:nvPr/>
-        </p:nvSpPr>
-        <p:spPr>
-          <a:xfrm>
-            <a:off x="5669280" y="6400800"/>
-            <a:ext cx="914400" cy="274320"/>
-          </a:xfrm>
-          <a:prstGeom prst="rect">
-            <a:avLst/>
-          </a:prstGeom>
-          <a:noFill/>
-        </p:spPr>
-        <p:txBody>
-          <a:bodyPr wrap="none" lIns="0" rIns="0" tIns="0" bIns="0">
-            <a:spAutoFit/>
-          </a:bodyPr>
-          <a:lstStyle/>
-          <a:p>
-            <a:pPr algn="ctr"/>
-            <a:fld id="{1D0B0B0B-0000-4000-8000-00000000C0DE}" type="slidenum">
-              <a:rPr lang="ko-KR" altLang="en-US" sz="1000" b="0" dirty="0">
-                <a:solidFill>
-                  <a:srgbClr val="1A2233"/>
-                </a:solidFill>
-                <a:latin typeface="Arial"/>
-                <a:ea typeface="Arial"/>
-              </a:rPr>
-              <a:t>1</a:t>
-            </a:fld>
-          </a:p>
-        </p:txBody>
-      </p:sp>
-    </p:spTree>
-  </p:cSld>
-  <p:clrMapOvr>
-    <a:masterClrMapping/>
-  </p:clrMapOvr>
-</p:sld>
-</file>
-
-<file path=ppt/slides/slide11.xml><?xml version="1.0" encoding="utf-8"?>
-<p:sld xmlns:a="http://schemas.openxmlformats.org/drawingml/2006/main" xmlns:r="http://schemas.openxmlformats.org/officeDocument/2006/relationships" xmlns:p="http://schemas.openxmlformats.org/presentationml/2006/main">
   <p:cSld name="Slide 16">
     <p:bg>
       <p:bgPr>
@@ -7016,7 +5717,7 @@
 </p:sld>
 </file>
 
-<file path=ppt/slides/slide12.xml><?xml version="1.0" encoding="utf-8"?>
+<file path=ppt/slides/slide11.xml><?xml version="1.0" encoding="utf-8"?>
 <p:sld xmlns:a="http://schemas.openxmlformats.org/drawingml/2006/main" xmlns:r="http://schemas.openxmlformats.org/officeDocument/2006/relationships" xmlns:p="http://schemas.openxmlformats.org/presentationml/2006/main">
   <p:cSld name="Slide 17">
     <p:bg>
@@ -7983,7 +6684,7 @@
                 <a:ea typeface="맑은 고딕" pitchFamily="34" charset="-122"/>
                 <a:cs typeface="맑은 고딕" pitchFamily="34" charset="-120"/>
               </a:rPr>
-              <a:t>"아래"는 지구 중심 방향이 아니다</a:t>
+              <a:t>"아래" 는 지구 중심 쪽이 아니다</a:t>
             </a:r>
             <a:endParaRPr lang="en-US" sz="1400" dirty="0"/>
           </a:p>
@@ -8022,7 +6723,7 @@
                 <a:ea typeface="맑은 고딕"/>
                 <a:cs typeface="맑은 고딕"/>
               </a:rPr>
-              <a:t>타원체 법선의 반대 방향이다. 지구 중심 방향과는 위도 45° 부근에서 최대 약 0.19° 어긋나는데, 이 둘을 혼동하면 지표 위치가 약 21 km 틀어진다.</a:t>
+              <a:t>발밑 수직 방향이다. 지구가 완전한 구가 아니라서 이 둘이 조금 어긋나는데, 얼마나 왜 어긋나는지는 뒤의 LLA 장에서 보겠습니다.</a:t>
             </a:r>
           </a:p>
         </p:txBody>
@@ -8205,7 +6906,7 @@
 </p:sld>
 </file>
 
-<file path=ppt/slides/slide13.xml><?xml version="1.0" encoding="utf-8"?>
+<file path=ppt/slides/slide12.xml><?xml version="1.0" encoding="utf-8"?>
 <p:sld xmlns:a="http://schemas.openxmlformats.org/drawingml/2006/main" xmlns:r="http://schemas.openxmlformats.org/officeDocument/2006/relationships" xmlns:p="http://schemas.openxmlformats.org/presentationml/2006/main">
   <p:cSld name="Slide 18">
     <p:bg>
@@ -9380,7 +8081,7 @@
 </p:sld>
 </file>
 
-<file path=ppt/slides/slide14.xml><?xml version="1.0" encoding="utf-8"?>
+<file path=ppt/slides/slide13.xml><?xml version="1.0" encoding="utf-8"?>
 <p:sld xmlns:a="http://schemas.openxmlformats.org/drawingml/2006/main" xmlns:r="http://schemas.openxmlformats.org/officeDocument/2006/relationships" xmlns:p="http://schemas.openxmlformats.org/presentationml/2006/main">
   <p:cSld name="Slide 19">
     <p:bg>
@@ -10374,8 +9075,8 @@
         </p:nvSpPr>
         <p:spPr>
           <a:xfrm>
-            <a:off x="566928" y="5413774"/>
-            <a:ext cx="11064240" cy="822433"/>
+            <a:off x="566928" y="5340096"/>
+            <a:ext cx="11064240" cy="914400"/>
           </a:xfrm>
           <a:prstGeom prst="roundRect">
             <a:avLst>
@@ -10405,8 +9106,8 @@
         </p:nvSpPr>
         <p:spPr>
           <a:xfrm>
-            <a:off x="566928" y="5501267"/>
-            <a:ext cx="11064240" cy="332473"/>
+            <a:off x="566928" y="5413248"/>
+            <a:ext cx="11064240" cy="256032"/>
           </a:xfrm>
           <a:prstGeom prst="rect">
             <a:avLst/>
@@ -10444,8 +9145,8 @@
         </p:nvSpPr>
         <p:spPr>
           <a:xfrm>
-            <a:off x="566928" y="5851239"/>
-            <a:ext cx="11064240" cy="332473"/>
+            <a:off x="566928" y="5687568"/>
+            <a:ext cx="11064240" cy="256032"/>
           </a:xfrm>
           <a:prstGeom prst="rect">
             <a:avLst/>
@@ -10645,6 +9346,44 @@
           </a:p>
         </p:txBody>
       </p:sp>
+      <p:sp>
+        <p:nvSpPr>
+          <p:cNvPr id="37" name="Text 27"/>
+          <p:cNvSpPr txBox="1"/>
+          <p:nvPr/>
+        </p:nvSpPr>
+        <p:spPr>
+          <a:xfrm>
+            <a:off x="566928" y="5961888"/>
+            <a:ext cx="11064240" cy="256032"/>
+          </a:xfrm>
+          <a:prstGeom prst="rect">
+            <a:avLst/>
+          </a:prstGeom>
+          <a:noFill/>
+          <a:ln/>
+        </p:spPr>
+        <p:txBody>
+          <a:bodyPr wrap="square" lIns="0" tIns="0" rIns="0" bIns="0" rtlCol="0" anchor="ctr"/>
+          <a:lstStyle/>
+          <a:p>
+            <a:pPr indent="0" marL="0">
+              <a:buNone/>
+            </a:pPr>
+            <a:r>
+              <a:rPr lang="ko-KR" sz="1100" b="0" dirty="0">
+                <a:solidFill>
+                  <a:srgbClr val="5A6478"/>
+                </a:solidFill>
+                <a:latin typeface="맑은 고딕" pitchFamily="34" charset="0"/>
+                <a:ea typeface="맑은 고딕" pitchFamily="34" charset="-122"/>
+                <a:cs typeface="맑은 고딕" pitchFamily="34" charset="-120"/>
+              </a:rPr>
+              <a:t>앞에서 미뤄 둔 것 —  NED 의 "아래" 는 지구 중심 쪽이 아니라 타원체 면에 수직으로 내려갑니다.  최대 0.19° 차이, 혼동하면 지표에서 21 km 틀어집니다.</a:t>
+            </a:r>
+          </a:p>
+        </p:txBody>
+      </p:sp>
     </p:spTree>
   </p:cSld>
   <p:clrMapOvr>
@@ -10653,7 +9392,7 @@
 </p:sld>
 </file>
 
-<file path=ppt/slides/slide15.xml><?xml version="1.0" encoding="utf-8"?>
+<file path=ppt/slides/slide14.xml><?xml version="1.0" encoding="utf-8"?>
 <p:sld xmlns:a="http://schemas.openxmlformats.org/drawingml/2006/main" xmlns:r="http://schemas.openxmlformats.org/officeDocument/2006/relationships" xmlns:p="http://schemas.openxmlformats.org/presentationml/2006/main">
   <p:cSld name="Slide 21">
     <p:bg>
@@ -12024,7 +10763,7 @@
                 <a:ea typeface="맑은 고딕" pitchFamily="34" charset="-122"/>
                 <a:cs typeface="맑은 고딕" pitchFamily="34" charset="-120"/>
               </a:rPr>
-              <a:t>표기 :  C_ned←body 는 동체 좌표를 NED 좌표로 바꾸는 회전행렬.</a:t>
+              <a:t>설치방위 :  선수를 기준으로 안테나가 보는 각    ·    백틸트 :  안테나 면이 위로 들린 각</a:t>
             </a:r>
             <a:endParaRPr lang="en-US" sz="1150" dirty="0"/>
           </a:p>
@@ -12044,7 +10783,7 @@
                 <a:ea typeface="맑은 고딕" pitchFamily="34" charset="-122"/>
                 <a:cs typeface="맑은 고딕" pitchFamily="34" charset="-120"/>
               </a:rPr>
-              <a:t>v_ned = C_ned←body × v_body — 화살표 방향이 곧 변환 방향.</a:t>
+              <a:t>레버암 :  무게중심에서 안테나까지의 거리를 동체 좌표로 적은 것</a:t>
             </a:r>
             <a:endParaRPr lang="en-US" sz="1150" dirty="0"/>
           </a:p>
@@ -12064,7 +10803,7 @@
                 <a:ea typeface="맑은 고딕" pitchFamily="34" charset="-122"/>
                 <a:cs typeface="맑은 고딕" pitchFamily="34" charset="-120"/>
               </a:rPr>
-              <a:t>거꾸로 갈 때는 전치 C_ned←bodyᵀ 를 곱한다.</a:t>
+              <a:t>표기 C_ned←body 는 회전행렬 장에서 정한 대로 — 화살표 방향이 곧 변환 방향입니다.</a:t>
             </a:r>
             <a:endParaRPr lang="en-US" sz="1150" dirty="0"/>
           </a:p>
@@ -12248,7 +10987,7 @@
 </p:sld>
 </file>
 
-<file path=ppt/slides/slide16.xml><?xml version="1.0" encoding="utf-8"?>
+<file path=ppt/slides/slide15.xml><?xml version="1.0" encoding="utf-8"?>
 <p:sld xmlns:a="http://schemas.openxmlformats.org/drawingml/2006/main" xmlns:p="http://schemas.openxmlformats.org/presentationml/2006/main" xmlns:r="http://schemas.openxmlformats.org/officeDocument/2006/relationships">
   <p:cSld>
     <p:bg>
@@ -12997,7 +11736,7 @@
 </p:sld>
 </file>
 
-<file path=ppt/slides/slide17.xml><?xml version="1.0" encoding="utf-8"?>
+<file path=ppt/slides/slide16.xml><?xml version="1.0" encoding="utf-8"?>
 <p:sld xmlns:a="http://schemas.openxmlformats.org/drawingml/2006/main" xmlns:r="http://schemas.openxmlformats.org/officeDocument/2006/relationships" xmlns:p="http://schemas.openxmlformats.org/presentationml/2006/main">
   <p:cSld name="Slide 23">
     <p:bg>
@@ -14817,7 +13556,7 @@
 </p:sld>
 </file>
 
-<file path=ppt/slides/slide18.xml><?xml version="1.0" encoding="utf-8"?>
+<file path=ppt/slides/slide17.xml><?xml version="1.0" encoding="utf-8"?>
 <p:sld xmlns:a="http://schemas.openxmlformats.org/drawingml/2006/main" xmlns:r="http://schemas.openxmlformats.org/officeDocument/2006/relationships" xmlns:p="http://schemas.openxmlformats.org/presentationml/2006/main">
   <p:cSld name="Slide 24">
     <p:bg>
@@ -16355,7 +15094,7 @@
         </p:nvSpPr>
         <p:spPr>
           <a:xfrm>
-            <a:off x="566928" y="5110779"/>
+            <a:off x="566928" y="5175504"/>
             <a:ext cx="2743200" cy="310896"/>
           </a:xfrm>
           <a:prstGeom prst="rect">
@@ -16383,454 +15122,6 @@
               <a:t>쓰지 않은 좌표계</a:t>
             </a:r>
             <a:endParaRPr lang="en-US" sz="1400" dirty="0"/>
-          </a:p>
-        </p:txBody>
-      </p:sp>
-      <p:sp>
-        <p:nvSpPr>
-          <p:cNvPr id="5" name="Shape 2"/>
-          <p:cNvSpPr/>
-          <p:nvPr/>
-        </p:nvSpPr>
-        <p:spPr>
-          <a:xfrm>
-            <a:off x="566928" y="5449823"/>
-            <a:ext cx="2651760" cy="786384"/>
-          </a:xfrm>
-          <a:prstGeom prst="roundRect">
-            <a:avLst>
-              <a:gd name="adj" fmla="val 9302"/>
-            </a:avLst>
-          </a:prstGeom>
-          <a:solidFill>
-            <a:srgbClr val="F4F6FA"/>
-          </a:solidFill>
-          <a:ln w="12700">
-            <a:solidFill>
-              <a:srgbClr val="FFFFFF"/>
-            </a:solidFill>
-            <a:prstDash val="solid"/>
-          </a:ln>
-        </p:spPr>
-        <p:txBody>
-          <a:bodyPr/>
-          <a:p/>
-        </p:txBody>
-      </p:sp>
-      <p:sp>
-        <p:nvSpPr>
-          <p:cNvPr id="6" name="Text 3"/>
-          <p:cNvSpPr txBox="1"/>
-          <p:nvPr/>
-        </p:nvSpPr>
-        <p:spPr>
-          <a:xfrm>
-            <a:off x="713232" y="5522975"/>
-            <a:ext cx="2377440" cy="256032"/>
-          </a:xfrm>
-          <a:prstGeom prst="rect">
-            <a:avLst/>
-          </a:prstGeom>
-          <a:noFill/>
-          <a:ln/>
-        </p:spPr>
-        <p:txBody>
-          <a:bodyPr wrap="square" lIns="0" tIns="0" rIns="0" bIns="0" rtlCol="0" anchor="ctr"/>
-          <a:lstStyle/>
-          <a:p>
-            <a:pPr indent="0" marL="0">
-              <a:buNone/>
-            </a:pPr>
-            <a:r>
-              <a:rPr lang="en-US" sz="1200" b="1" dirty="0">
-                <a:solidFill>
-                  <a:srgbClr val="5A6478"/>
-                </a:solidFill>
-                <a:latin typeface="맑은 고딕" pitchFamily="34" charset="0"/>
-                <a:ea typeface="맑은 고딕" pitchFamily="34" charset="-122"/>
-                <a:cs typeface="맑은 고딕" pitchFamily="34" charset="-120"/>
-              </a:rPr>
-              <a:t>INS</a:t>
-            </a:r>
-            <a:endParaRPr lang="en-US" sz="1200" dirty="0"/>
-          </a:p>
-        </p:txBody>
-      </p:sp>
-      <p:sp>
-        <p:nvSpPr>
-          <p:cNvPr id="7" name="Text 4"/>
-          <p:cNvSpPr txBox="1"/>
-          <p:nvPr/>
-        </p:nvSpPr>
-        <p:spPr>
-          <a:xfrm>
-            <a:off x="713232" y="5760720"/>
-            <a:ext cx="2377440" cy="420624"/>
-          </a:xfrm>
-          <a:prstGeom prst="rect">
-            <a:avLst/>
-          </a:prstGeom>
-          <a:noFill/>
-          <a:ln/>
-        </p:spPr>
-        <p:txBody>
-          <a:bodyPr wrap="square" lIns="0" tIns="0" rIns="0" bIns="0" rtlCol="0" anchor="ctr"/>
-          <a:lstStyle/>
-          <a:p>
-            <a:pPr indent="0" marL="0">
-              <a:lnSpc>
-                <a:spcPts val="1400"/>
-              </a:lnSpc>
-              <a:buNone/>
-            </a:pPr>
-            <a:r>
-              <a:rPr lang="en-US" sz="1050" dirty="0">
-                <a:solidFill>
-                  <a:srgbClr val="5A6478"/>
-                </a:solidFill>
-                <a:latin typeface="맑은 고딕" pitchFamily="34" charset="0"/>
-                <a:ea typeface="맑은 고딕" pitchFamily="34" charset="-122"/>
-                <a:cs typeface="맑은 고딕" pitchFamily="34" charset="-120"/>
-              </a:rPr>
-              <a:t>③ 에 의해 동체와 일치. 항등행렬을 곱하는 셈</a:t>
-            </a:r>
-            <a:endParaRPr lang="en-US" sz="1050" dirty="0"/>
-          </a:p>
-        </p:txBody>
-      </p:sp>
-      <p:sp>
-        <p:nvSpPr>
-          <p:cNvPr id="8" name="Shape 5"/>
-          <p:cNvSpPr/>
-          <p:nvPr/>
-        </p:nvSpPr>
-        <p:spPr>
-          <a:xfrm>
-            <a:off x="3364992" y="5449823"/>
-            <a:ext cx="2651760" cy="786384"/>
-          </a:xfrm>
-          <a:prstGeom prst="roundRect">
-            <a:avLst>
-              <a:gd name="adj" fmla="val 9302"/>
-            </a:avLst>
-          </a:prstGeom>
-          <a:solidFill>
-            <a:srgbClr val="F4F6FA"/>
-          </a:solidFill>
-          <a:ln w="12700">
-            <a:solidFill>
-              <a:srgbClr val="FFFFFF"/>
-            </a:solidFill>
-            <a:prstDash val="solid"/>
-          </a:ln>
-        </p:spPr>
-        <p:txBody>
-          <a:bodyPr/>
-          <a:p/>
-        </p:txBody>
-      </p:sp>
-      <p:sp>
-        <p:nvSpPr>
-          <p:cNvPr id="9" name="Text 6"/>
-          <p:cNvSpPr txBox="1"/>
-          <p:nvPr/>
-        </p:nvSpPr>
-        <p:spPr>
-          <a:xfrm>
-            <a:off x="3511296" y="5522975"/>
-            <a:ext cx="2377440" cy="256032"/>
-          </a:xfrm>
-          <a:prstGeom prst="rect">
-            <a:avLst/>
-          </a:prstGeom>
-          <a:noFill/>
-          <a:ln/>
-        </p:spPr>
-        <p:txBody>
-          <a:bodyPr wrap="square" lIns="0" tIns="0" rIns="0" bIns="0" rtlCol="0" anchor="ctr"/>
-          <a:lstStyle/>
-          <a:p>
-            <a:pPr indent="0" marL="0">
-              <a:buNone/>
-            </a:pPr>
-            <a:r>
-              <a:rPr lang="en-US" sz="1200" b="1" dirty="0">
-                <a:solidFill>
-                  <a:srgbClr val="5A6478"/>
-                </a:solidFill>
-                <a:latin typeface="맑은 고딕" pitchFamily="34" charset="0"/>
-                <a:ea typeface="맑은 고딕" pitchFamily="34" charset="-122"/>
-                <a:cs typeface="맑은 고딕" pitchFamily="34" charset="-120"/>
-              </a:rPr>
-              <a:t>UV</a:t>
-            </a:r>
-            <a:endParaRPr lang="en-US" sz="1200" dirty="0"/>
-          </a:p>
-        </p:txBody>
-      </p:sp>
-      <p:sp>
-        <p:nvSpPr>
-          <p:cNvPr id="10" name="Text 7"/>
-          <p:cNvSpPr txBox="1"/>
-          <p:nvPr/>
-        </p:nvSpPr>
-        <p:spPr>
-          <a:xfrm>
-            <a:off x="3511296" y="5760720"/>
-            <a:ext cx="2377440" cy="420624"/>
-          </a:xfrm>
-          <a:prstGeom prst="rect">
-            <a:avLst/>
-          </a:prstGeom>
-          <a:noFill/>
-          <a:ln/>
-        </p:spPr>
-        <p:txBody>
-          <a:bodyPr wrap="square" lIns="0" tIns="0" rIns="0" bIns="0" rtlCol="0" anchor="ctr"/>
-          <a:lstStyle/>
-          <a:p>
-            <a:pPr indent="0" marL="0">
-              <a:lnSpc>
-                <a:spcPts val="1400"/>
-              </a:lnSpc>
-              <a:buNone/>
-            </a:pPr>
-            <a:r>
-              <a:rPr lang="en-US" sz="1050" dirty="0">
-                <a:solidFill>
-                  <a:srgbClr val="5A6478"/>
-                </a:solidFill>
-                <a:latin typeface="맑은 고딕" pitchFamily="34" charset="0"/>
-                <a:ea typeface="맑은 고딕" pitchFamily="34" charset="-122"/>
-                <a:cs typeface="맑은 고딕" pitchFamily="34" charset="-120"/>
-              </a:rPr>
-              <a:t>빔 조향은 안테나 내부의 일 — 데이터 처리 체인 밖</a:t>
-            </a:r>
-            <a:endParaRPr lang="en-US" sz="1050" dirty="0"/>
-          </a:p>
-        </p:txBody>
-      </p:sp>
-      <p:sp>
-        <p:nvSpPr>
-          <p:cNvPr id="11" name="Shape 8"/>
-          <p:cNvSpPr/>
-          <p:nvPr/>
-        </p:nvSpPr>
-        <p:spPr>
-          <a:xfrm>
-            <a:off x="6163056" y="5449823"/>
-            <a:ext cx="2651760" cy="786384"/>
-          </a:xfrm>
-          <a:prstGeom prst="roundRect">
-            <a:avLst>
-              <a:gd name="adj" fmla="val 9302"/>
-            </a:avLst>
-          </a:prstGeom>
-          <a:solidFill>
-            <a:srgbClr val="F4F6FA"/>
-          </a:solidFill>
-          <a:ln w="12700">
-            <a:solidFill>
-              <a:srgbClr val="FFFFFF"/>
-            </a:solidFill>
-            <a:prstDash val="solid"/>
-          </a:ln>
-        </p:spPr>
-        <p:txBody>
-          <a:bodyPr/>
-          <a:p/>
-        </p:txBody>
-      </p:sp>
-      <p:sp>
-        <p:nvSpPr>
-          <p:cNvPr id="12" name="Text 9"/>
-          <p:cNvSpPr txBox="1"/>
-          <p:nvPr/>
-        </p:nvSpPr>
-        <p:spPr>
-          <a:xfrm>
-            <a:off x="6309360" y="5522975"/>
-            <a:ext cx="2377440" cy="256032"/>
-          </a:xfrm>
-          <a:prstGeom prst="rect">
-            <a:avLst/>
-          </a:prstGeom>
-          <a:noFill/>
-          <a:ln/>
-        </p:spPr>
-        <p:txBody>
-          <a:bodyPr wrap="square" lIns="0" tIns="0" rIns="0" bIns="0" rtlCol="0" anchor="ctr"/>
-          <a:lstStyle/>
-          <a:p>
-            <a:pPr indent="0" marL="0">
-              <a:buNone/>
-            </a:pPr>
-            <a:r>
-              <a:rPr lang="en-US" sz="1200" b="1" dirty="0">
-                <a:solidFill>
-                  <a:srgbClr val="5A6478"/>
-                </a:solidFill>
-                <a:latin typeface="맑은 고딕" pitchFamily="34" charset="0"/>
-                <a:ea typeface="맑은 고딕" pitchFamily="34" charset="-122"/>
-                <a:cs typeface="맑은 고딕" pitchFamily="34" charset="-120"/>
-              </a:rPr>
-              <a:t>ECI</a:t>
-            </a:r>
-            <a:endParaRPr lang="en-US" sz="1200" dirty="0"/>
-          </a:p>
-        </p:txBody>
-      </p:sp>
-      <p:sp>
-        <p:nvSpPr>
-          <p:cNvPr id="13" name="Text 10"/>
-          <p:cNvSpPr txBox="1"/>
-          <p:nvPr/>
-        </p:nvSpPr>
-        <p:spPr>
-          <a:xfrm>
-            <a:off x="6309360" y="5760720"/>
-            <a:ext cx="2377440" cy="420624"/>
-          </a:xfrm>
-          <a:prstGeom prst="rect">
-            <a:avLst/>
-          </a:prstGeom>
-          <a:noFill/>
-          <a:ln/>
-        </p:spPr>
-        <p:txBody>
-          <a:bodyPr wrap="square" lIns="0" tIns="0" rIns="0" bIns="0" rtlCol="0" anchor="ctr"/>
-          <a:lstStyle/>
-          <a:p>
-            <a:pPr indent="0" marL="0">
-              <a:lnSpc>
-                <a:spcPts val="1400"/>
-              </a:lnSpc>
-              <a:buNone/>
-            </a:pPr>
-            <a:r>
-              <a:rPr lang="en-US" sz="1050" dirty="0">
-                <a:solidFill>
-                  <a:srgbClr val="5A6478"/>
-                </a:solidFill>
-                <a:latin typeface="맑은 고딕" pitchFamily="34" charset="0"/>
-                <a:ea typeface="맑은 고딕" pitchFamily="34" charset="-122"/>
-                <a:cs typeface="맑은 고딕" pitchFamily="34" charset="-120"/>
-              </a:rPr>
-              <a:t>관성 동역학 전파가 필요할 때만 (위성·탄도탄)</a:t>
-            </a:r>
-            <a:endParaRPr lang="en-US" sz="1050" dirty="0"/>
-          </a:p>
-        </p:txBody>
-      </p:sp>
-      <p:sp>
-        <p:nvSpPr>
-          <p:cNvPr id="14" name="Shape 11"/>
-          <p:cNvSpPr/>
-          <p:nvPr/>
-        </p:nvSpPr>
-        <p:spPr>
-          <a:xfrm>
-            <a:off x="8961120" y="5449823"/>
-            <a:ext cx="2651760" cy="786384"/>
-          </a:xfrm>
-          <a:prstGeom prst="roundRect">
-            <a:avLst>
-              <a:gd name="adj" fmla="val 9302"/>
-            </a:avLst>
-          </a:prstGeom>
-          <a:solidFill>
-            <a:srgbClr val="F4F6FA"/>
-          </a:solidFill>
-          <a:ln w="12700">
-            <a:solidFill>
-              <a:srgbClr val="FFFFFF"/>
-            </a:solidFill>
-            <a:prstDash val="solid"/>
-          </a:ln>
-        </p:spPr>
-        <p:txBody>
-          <a:bodyPr/>
-          <a:p/>
-        </p:txBody>
-      </p:sp>
-      <p:sp>
-        <p:nvSpPr>
-          <p:cNvPr id="15" name="Text 12"/>
-          <p:cNvSpPr txBox="1"/>
-          <p:nvPr/>
-        </p:nvSpPr>
-        <p:spPr>
-          <a:xfrm>
-            <a:off x="9107424" y="5522975"/>
-            <a:ext cx="2377440" cy="256032"/>
-          </a:xfrm>
-          <a:prstGeom prst="rect">
-            <a:avLst/>
-          </a:prstGeom>
-          <a:noFill/>
-          <a:ln/>
-        </p:spPr>
-        <p:txBody>
-          <a:bodyPr wrap="square" lIns="0" tIns="0" rIns="0" bIns="0" rtlCol="0" anchor="ctr"/>
-          <a:lstStyle/>
-          <a:p>
-            <a:pPr indent="0" marL="0">
-              <a:buNone/>
-            </a:pPr>
-            <a:r>
-              <a:rPr lang="en-US" sz="1200" b="1" dirty="0">
-                <a:solidFill>
-                  <a:srgbClr val="5A6478"/>
-                </a:solidFill>
-                <a:latin typeface="맑은 고딕" pitchFamily="34" charset="0"/>
-                <a:ea typeface="맑은 고딕" pitchFamily="34" charset="-122"/>
-                <a:cs typeface="맑은 고딕" pitchFamily="34" charset="-120"/>
-              </a:rPr>
-              <a:t>ENU</a:t>
-            </a:r>
-            <a:endParaRPr lang="en-US" sz="1200" dirty="0"/>
-          </a:p>
-        </p:txBody>
-      </p:sp>
-      <p:sp>
-        <p:nvSpPr>
-          <p:cNvPr id="16" name="Text 13"/>
-          <p:cNvSpPr txBox="1"/>
-          <p:nvPr/>
-        </p:nvSpPr>
-        <p:spPr>
-          <a:xfrm>
-            <a:off x="9107424" y="5760720"/>
-            <a:ext cx="2377440" cy="420624"/>
-          </a:xfrm>
-          <a:prstGeom prst="rect">
-            <a:avLst/>
-          </a:prstGeom>
-          <a:noFill/>
-          <a:ln/>
-        </p:spPr>
-        <p:txBody>
-          <a:bodyPr wrap="square" lIns="0" tIns="0" rIns="0" bIns="0" rtlCol="0" anchor="ctr"/>
-          <a:lstStyle/>
-          <a:p>
-            <a:pPr indent="0" marL="0">
-              <a:lnSpc>
-                <a:spcPts val="1400"/>
-              </a:lnSpc>
-              <a:buNone/>
-            </a:pPr>
-            <a:r>
-              <a:rPr lang="en-US" sz="1050" dirty="0">
-                <a:solidFill>
-                  <a:srgbClr val="5A6478"/>
-                </a:solidFill>
-                <a:latin typeface="맑은 고딕" pitchFamily="34" charset="0"/>
-                <a:ea typeface="맑은 고딕" pitchFamily="34" charset="-122"/>
-                <a:cs typeface="맑은 고딕" pitchFamily="34" charset="-120"/>
-              </a:rPr>
-              <a:t>NED 와 정보량이 같다 — 하나로 통일</a:t>
-            </a:r>
-            <a:endParaRPr lang="en-US" sz="1050" dirty="0"/>
           </a:p>
         </p:txBody>
       </p:sp>
@@ -16875,45 +15166,6 @@
           <a:lstStyle/>
           <a:p>
             <a:pPr algn="ctr"/>
-          </a:p>
-        </p:txBody>
-      </p:sp>
-      <p:sp>
-        <p:nvSpPr>
-          <p:cNvPr id="28" name="TextBox 27"/>
-          <p:cNvSpPr txBox="1"/>
-          <p:nvPr/>
-        </p:nvSpPr>
-        <p:spPr>
-          <a:xfrm>
-            <a:off x="640080" y="411480"/>
-            <a:ext cx="8732520" cy="777240"/>
-          </a:xfrm>
-          <a:prstGeom prst="rect">
-            <a:avLst/>
-          </a:prstGeom>
-          <a:noFill/>
-        </p:spPr>
-        <p:txBody>
-          <a:bodyPr wrap="square" anchor="ctr" lIns="0" rIns="0" tIns="0" bIns="0">
-            <a:spAutoFit/>
-          </a:bodyPr>
-          <a:lstStyle/>
-          <a:p>
-            <a:pPr algn="l">
-              <a:spcAft>
-                <a:spcPts val="300"/>
-              </a:spcAft>
-            </a:pPr>
-            <a:r>
-              <a:rPr sz="2000" b="1">
-                <a:solidFill>
-                  <a:srgbClr val="FFFFFF"/>
-                </a:solidFill>
-                <a:latin typeface="맑은 고딕"/>
-              </a:rPr>
-              <a:t>02. 단계별 좌표계 선정</a:t>
-            </a:r>
           </a:p>
         </p:txBody>
       </p:sp>
@@ -16988,6 +15240,151 @@
           </a:p>
         </p:txBody>
       </p:sp>
+      <p:sp>
+        <p:nvSpPr>
+          <p:cNvPr id="33" name="Shape 2"/>
+          <p:cNvSpPr/>
+          <p:nvPr/>
+        </p:nvSpPr>
+        <p:spPr>
+          <a:xfrm>
+            <a:off x="566928" y="5504688"/>
+            <a:ext cx="11064240" cy="731520"/>
+          </a:xfrm>
+          <a:prstGeom prst="roundRect">
+            <a:avLst>
+              <a:gd name="adj" fmla="val 8696"/>
+            </a:avLst>
+          </a:prstGeom>
+          <a:solidFill>
+            <a:srgbClr val="EEF1F7"/>
+          </a:solidFill>
+          <a:ln w="12700">
+            <a:solidFill>
+              <a:srgbClr val="FFFFFF"/>
+            </a:solidFill>
+            <a:prstDash val="solid"/>
+          </a:ln>
+        </p:spPr>
+        <p:txBody>
+          <a:bodyPr/>
+          <a:p/>
+        </p:txBody>
+      </p:sp>
+      <p:sp>
+        <p:nvSpPr>
+          <p:cNvPr id="34" name="Text 3"/>
+          <p:cNvSpPr txBox="1"/>
+          <p:nvPr/>
+        </p:nvSpPr>
+        <p:spPr>
+          <a:xfrm>
+            <a:off x="786384" y="5504688"/>
+            <a:ext cx="10625328" cy="731520"/>
+          </a:xfrm>
+          <a:prstGeom prst="rect">
+            <a:avLst/>
+          </a:prstGeom>
+          <a:noFill/>
+          <a:ln/>
+        </p:spPr>
+        <p:txBody>
+          <a:bodyPr wrap="square" lIns="0" tIns="0" rIns="0" bIns="0" rtlCol="0" anchor="ctr"/>
+          <a:lstStyle/>
+          <a:p>
+            <a:pPr indent="0" marL="0">
+              <a:lnSpc>
+                <a:spcPts val="1700"/>
+              </a:lnSpc>
+              <a:buNone/>
+            </a:pPr>
+            <a:r>
+              <a:rPr lang="ko-KR" sz="1150" b="0" dirty="0">
+                <a:solidFill>
+                  <a:srgbClr val="1A2233"/>
+                </a:solidFill>
+                <a:latin typeface="맑은 고딕" pitchFamily="34" charset="0"/>
+                <a:ea typeface="맑은 고딕" pitchFamily="34" charset="-122"/>
+                <a:cs typeface="맑은 고딕" pitchFamily="34" charset="-120"/>
+              </a:rPr>
+              <a:t>INS — 조건 ③ 으로 동체와 일치 (항등행렬을 곱하는 셈)      ·      UV — 빔 조향용, 데이터 처리 체인 밖  →  부록 C</a:t>
+            </a:r>
+          </a:p>
+          <a:p>
+            <a:pPr indent="0" marL="0">
+              <a:lnSpc>
+                <a:spcPts val="1700"/>
+              </a:lnSpc>
+              <a:buNone/>
+            </a:pPr>
+            <a:r>
+              <a:rPr lang="ko-KR" sz="1150" b="0" dirty="0">
+                <a:solidFill>
+                  <a:srgbClr val="1A2233"/>
+                </a:solidFill>
+                <a:latin typeface="맑은 고딕" pitchFamily="34" charset="0"/>
+                <a:ea typeface="맑은 고딕" pitchFamily="34" charset="-122"/>
+                <a:cs typeface="맑은 고딕" pitchFamily="34" charset="-120"/>
+              </a:rPr>
+              <a:t>ECI — 관성 동역학 전파가 필요할 때만 (위성 · 탄도탄)      ·      ENU — NED 와 정보량이 같아 하나로 통일</a:t>
+            </a:r>
+          </a:p>
+        </p:txBody>
+      </p:sp>
+      <p:sp>
+        <p:nvSpPr>
+          <p:cNvPr id="35" name="TextBox 27"/>
+          <p:cNvSpPr txBox="1"/>
+          <p:nvPr/>
+        </p:nvSpPr>
+        <p:spPr>
+          <a:xfrm>
+            <a:off x="640080" y="411480"/>
+            <a:ext cx="8732520" cy="777240"/>
+          </a:xfrm>
+          <a:prstGeom prst="rect">
+            <a:avLst/>
+          </a:prstGeom>
+          <a:noFill/>
+          <a:ln/>
+        </p:spPr>
+        <p:txBody>
+          <a:bodyPr wrap="square" lIns="0" tIns="0" rIns="0" bIns="0" rtlCol="0" anchor="ctr"/>
+          <a:lstStyle/>
+          <a:p>
+            <a:pPr indent="0" marL="0">
+              <a:buNone/>
+            </a:pPr>
+            <a:r>
+              <a:rPr lang="ko-KR" sz="2000" b="1" dirty="0">
+                <a:solidFill>
+                  <a:srgbClr val="FFFFFF"/>
+                </a:solidFill>
+                <a:latin typeface="맑은 고딕" pitchFamily="34" charset="0"/>
+                <a:ea typeface="맑은 고딕" pitchFamily="34" charset="-122"/>
+                <a:cs typeface="맑은 고딕" pitchFamily="34" charset="-120"/>
+              </a:rPr>
+              <a:t>02. 단계별 좌표계 선정</a:t>
+            </a:r>
+          </a:p>
+          <a:p>
+            <a:pPr indent="0" marL="0">
+              <a:buNone/>
+            </a:pPr>
+            <a:r>
+              <a:rPr lang="ko-KR" sz="1100" b="0" dirty="0">
+                <a:solidFill>
+                  <a:srgbClr val="C9D6EC"/>
+                </a:solidFill>
+                <a:latin typeface="맑은 고딕" pitchFamily="34" charset="0"/>
+                <a:ea typeface="맑은 고딕" pitchFamily="34" charset="-122"/>
+                <a:cs typeface="맑은 고딕" pitchFamily="34" charset="-120"/>
+              </a:rPr>
+              <a:t>앞의 변환 체인이 "무엇을 하는가" 였다면, 여기는 "왜 이 좌표계인가" 입니다</a:t>
+            </a:r>
+          </a:p>
+        </p:txBody>
+      </p:sp>
     </p:spTree>
   </p:cSld>
   <p:clrMapOvr>
@@ -16996,7 +15393,7 @@
 </p:sld>
 </file>
 
-<file path=ppt/slides/slide19.xml><?xml version="1.0" encoding="utf-8"?>
+<file path=ppt/slides/slide18.xml><?xml version="1.0" encoding="utf-8"?>
 <p:sld xmlns:a="http://schemas.openxmlformats.org/drawingml/2006/main" xmlns:r="http://schemas.openxmlformats.org/officeDocument/2006/relationships" xmlns:p="http://schemas.openxmlformats.org/presentationml/2006/main">
   <p:cSld name="Slide 26">
     <p:bg>
@@ -18031,6 +16428,987 @@
       <p:sp>
         <p:nvSpPr>
           <p:cNvPr id="29" name="TextBox 28"/>
+          <p:cNvSpPr txBox="1"/>
+          <p:nvPr/>
+        </p:nvSpPr>
+        <p:spPr>
+          <a:xfrm>
+            <a:off x="5669280" y="6400800"/>
+            <a:ext cx="914400" cy="274320"/>
+          </a:xfrm>
+          <a:prstGeom prst="rect">
+            <a:avLst/>
+          </a:prstGeom>
+          <a:noFill/>
+        </p:spPr>
+        <p:txBody>
+          <a:bodyPr wrap="none" lIns="0" rIns="0" tIns="0" bIns="0">
+            <a:spAutoFit/>
+          </a:bodyPr>
+          <a:lstStyle/>
+          <a:p>
+            <a:pPr algn="ctr"/>
+            <a:fld id="{1D0B0B0B-0000-4000-8000-00000000C0DE}" type="slidenum">
+              <a:rPr lang="ko-KR" altLang="en-US" sz="1000" b="0" dirty="0">
+                <a:solidFill>
+                  <a:srgbClr val="1A2233"/>
+                </a:solidFill>
+                <a:latin typeface="Arial"/>
+                <a:ea typeface="Arial"/>
+              </a:rPr>
+              <a:t>1</a:t>
+            </a:fld>
+          </a:p>
+        </p:txBody>
+      </p:sp>
+    </p:spTree>
+  </p:cSld>
+  <p:clrMapOvr>
+    <a:masterClrMapping/>
+  </p:clrMapOvr>
+</p:sld>
+</file>
+
+<file path=ppt/slides/slide19.xml><?xml version="1.0" encoding="utf-8"?>
+<p:sld xmlns:a="http://schemas.openxmlformats.org/drawingml/2006/main" xmlns:r="http://schemas.openxmlformats.org/officeDocument/2006/relationships" xmlns:p="http://schemas.openxmlformats.org/presentationml/2006/main">
+  <p:cSld name="Slide 27">
+    <p:bg>
+      <p:bgPr>
+        <a:solidFill>
+          <a:srgbClr val="E8EDF5"/>
+        </a:solidFill>
+        <a:effectLst/>
+      </p:bgPr>
+    </p:bg>
+    <p:spTree>
+      <p:nvGrpSpPr>
+        <p:cNvPr id="1" name=""/>
+        <p:cNvGrpSpPr/>
+        <p:nvPr/>
+      </p:nvGrpSpPr>
+      <p:grpSpPr>
+        <a:xfrm>
+          <a:off x="0" y="0"/>
+          <a:ext cx="0" cy="0"/>
+          <a:chOff x="0" y="0"/>
+          <a:chExt cx="0" cy="0"/>
+        </a:xfrm>
+      </p:grpSpPr>
+      <p:sp>
+        <p:nvSpPr>
+          <p:cNvPr id="20" name="Rectangle 19"/>
+          <p:cNvSpPr/>
+          <p:nvPr/>
+        </p:nvSpPr>
+        <p:spPr>
+          <a:xfrm>
+            <a:off x="457200" y="1243584"/>
+            <a:ext cx="11277295" cy="5047488"/>
+          </a:xfrm>
+          <a:prstGeom prst="rect">
+            <a:avLst/>
+          </a:prstGeom>
+          <a:solidFill>
+            <a:srgbClr val="FFFFFF"/>
+          </a:solidFill>
+          <a:ln>
+            <a:noFill/>
+          </a:ln>
+          <a:effectLst/>
+        </p:spPr>
+        <p:style>
+          <a:lnRef idx="1">
+            <a:schemeClr val="accent1"/>
+          </a:lnRef>
+          <a:fillRef idx="3">
+            <a:schemeClr val="accent1"/>
+          </a:fillRef>
+          <a:effectRef idx="2">
+            <a:schemeClr val="accent1"/>
+          </a:effectRef>
+          <a:fontRef idx="minor">
+            <a:schemeClr val="lt1"/>
+          </a:fontRef>
+        </p:style>
+        <p:txBody>
+          <a:bodyPr rtlCol="0" anchor="ctr" wrap="none"/>
+          <a:lstStyle/>
+          <a:p>
+            <a:pPr algn="ctr"/>
+          </a:p>
+        </p:txBody>
+      </p:sp>
+      <p:sp>
+        <p:nvSpPr>
+          <p:cNvPr id="3" name="Shape 1"/>
+          <p:cNvSpPr/>
+          <p:nvPr/>
+        </p:nvSpPr>
+        <p:spPr>
+          <a:xfrm>
+            <a:off x="566928" y="1371600"/>
+            <a:ext cx="5486400" cy="2139696"/>
+          </a:xfrm>
+          <a:prstGeom prst="roundRect">
+            <a:avLst>
+              <a:gd name="adj" fmla="val 3419"/>
+            </a:avLst>
+          </a:prstGeom>
+          <a:solidFill>
+            <a:srgbClr val="EEF1F7"/>
+          </a:solidFill>
+          <a:ln w="12700">
+            <a:solidFill>
+              <a:srgbClr val="FFFFFF"/>
+            </a:solidFill>
+            <a:prstDash val="solid"/>
+          </a:ln>
+        </p:spPr>
+        <p:txBody>
+          <a:bodyPr/>
+          <a:p/>
+        </p:txBody>
+      </p:sp>
+      <p:sp>
+        <p:nvSpPr>
+          <p:cNvPr id="4" name="Shape 2"/>
+          <p:cNvSpPr/>
+          <p:nvPr/>
+        </p:nvSpPr>
+        <p:spPr>
+          <a:xfrm>
+            <a:off x="822960" y="1554480"/>
+            <a:ext cx="402336" cy="402336"/>
+          </a:xfrm>
+          <a:prstGeom prst="ellipse">
+            <a:avLst/>
+          </a:prstGeom>
+          <a:solidFill>
+            <a:srgbClr val="2B57A6"/>
+          </a:solidFill>
+          <a:ln/>
+        </p:spPr>
+        <p:txBody>
+          <a:bodyPr/>
+          <a:p/>
+        </p:txBody>
+      </p:sp>
+      <p:sp>
+        <p:nvSpPr>
+          <p:cNvPr id="5" name="Text 3"/>
+          <p:cNvSpPr txBox="1"/>
+          <p:nvPr/>
+        </p:nvSpPr>
+        <p:spPr>
+          <a:xfrm>
+            <a:off x="822960" y="1554480"/>
+            <a:ext cx="402336" cy="402336"/>
+          </a:xfrm>
+          <a:prstGeom prst="rect">
+            <a:avLst/>
+          </a:prstGeom>
+          <a:noFill/>
+          <a:ln/>
+        </p:spPr>
+        <p:txBody>
+          <a:bodyPr wrap="square" lIns="0" tIns="0" rIns="0" bIns="0" rtlCol="0" anchor="ctr"/>
+          <a:lstStyle/>
+          <a:p>
+            <a:pPr algn="ctr" indent="0" marL="0">
+              <a:buNone/>
+            </a:pPr>
+            <a:r>
+              <a:rPr lang="en-US" sz="1500" b="1" dirty="0">
+                <a:solidFill>
+                  <a:srgbClr val="FFFFFF"/>
+                </a:solidFill>
+                <a:latin typeface="맑은 고딕" pitchFamily="34" charset="0"/>
+                <a:ea typeface="맑은 고딕" pitchFamily="34" charset="-122"/>
+                <a:cs typeface="맑은 고딕" pitchFamily="34" charset="-120"/>
+              </a:rPr>
+              <a:t>4</a:t>
+            </a:r>
+            <a:endParaRPr lang="en-US" sz="1500" dirty="0"/>
+          </a:p>
+        </p:txBody>
+      </p:sp>
+      <p:sp>
+        <p:nvSpPr>
+          <p:cNvPr id="6" name="Text 4"/>
+          <p:cNvSpPr txBox="1"/>
+          <p:nvPr/>
+        </p:nvSpPr>
+        <p:spPr>
+          <a:xfrm>
+            <a:off x="1371600" y="1536192"/>
+            <a:ext cx="3840480" cy="329184"/>
+          </a:xfrm>
+          <a:prstGeom prst="rect">
+            <a:avLst/>
+          </a:prstGeom>
+          <a:noFill/>
+          <a:ln/>
+        </p:spPr>
+        <p:txBody>
+          <a:bodyPr wrap="square" lIns="0" tIns="0" rIns="0" bIns="0" rtlCol="0" anchor="ctr"/>
+          <a:lstStyle/>
+          <a:p>
+            <a:pPr indent="0" marL="0">
+              <a:buNone/>
+            </a:pPr>
+            <a:r>
+              <a:rPr lang="en-US" sz="1600" b="1" dirty="0">
+                <a:solidFill>
+                  <a:srgbClr val="2B57A6"/>
+                </a:solidFill>
+                <a:latin typeface="맑은 고딕" pitchFamily="34" charset="0"/>
+                <a:ea typeface="맑은 고딕" pitchFamily="34" charset="-122"/>
+                <a:cs typeface="맑은 고딕" pitchFamily="34" charset="-120"/>
+              </a:rPr>
+              <a:t>로컬 → ECEF</a:t>
+            </a:r>
+            <a:endParaRPr lang="en-US" sz="1600" dirty="0"/>
+          </a:p>
+        </p:txBody>
+      </p:sp>
+      <p:sp>
+        <p:nvSpPr>
+          <p:cNvPr id="7" name="Text 5"/>
+          <p:cNvSpPr txBox="1"/>
+          <p:nvPr/>
+        </p:nvSpPr>
+        <p:spPr>
+          <a:xfrm>
+            <a:off x="1371600" y="1883664"/>
+            <a:ext cx="3840480" cy="274320"/>
+          </a:xfrm>
+          <a:prstGeom prst="rect">
+            <a:avLst/>
+          </a:prstGeom>
+          <a:noFill/>
+          <a:ln/>
+        </p:spPr>
+        <p:txBody>
+          <a:bodyPr wrap="square" lIns="0" tIns="0" rIns="0" bIns="0" rtlCol="0" anchor="ctr"/>
+          <a:lstStyle/>
+          <a:p>
+            <a:pPr indent="0" marL="0">
+              <a:buNone/>
+            </a:pPr>
+            <a:r>
+              <a:rPr lang="en-US" sz="1200" i="1" dirty="0">
+                <a:solidFill>
+                  <a:srgbClr val="5A6478"/>
+                </a:solidFill>
+                <a:latin typeface="맑은 고딕" pitchFamily="34" charset="0"/>
+                <a:ea typeface="맑은 고딕" pitchFamily="34" charset="-122"/>
+                <a:cs typeface="맑은 고딕" pitchFamily="34" charset="-120"/>
+              </a:rPr>
+              <a:t>회전 + 평행이동</a:t>
+            </a:r>
+            <a:endParaRPr lang="en-US" sz="1200" dirty="0"/>
+          </a:p>
+        </p:txBody>
+      </p:sp>
+      <p:sp>
+        <p:nvSpPr>
+          <p:cNvPr id="8" name="Text 6"/>
+          <p:cNvSpPr txBox="1"/>
+          <p:nvPr/>
+        </p:nvSpPr>
+        <p:spPr>
+          <a:xfrm>
+            <a:off x="822960" y="2286000"/>
+            <a:ext cx="5029200" cy="1097280"/>
+          </a:xfrm>
+          <a:prstGeom prst="rect">
+            <a:avLst/>
+          </a:prstGeom>
+          <a:noFill/>
+          <a:ln/>
+        </p:spPr>
+        <p:txBody>
+          <a:bodyPr wrap="square" lIns="0" tIns="0" rIns="0" bIns="0" rtlCol="0" anchor="ctr"/>
+          <a:lstStyle/>
+          <a:p>
+            <a:pPr indent="0" marL="0">
+              <a:lnSpc>
+                <a:spcPts val="1800"/>
+              </a:lnSpc>
+              <a:buNone/>
+            </a:pPr>
+            <a:r>
+              <a:rPr lang="en-US" sz="1250" dirty="0">
+                <a:solidFill>
+                  <a:srgbClr val="1A2233"/>
+                </a:solidFill>
+                <a:latin typeface="맑은 고딕" pitchFamily="34" charset="0"/>
+                <a:ea typeface="맑은 고딕" pitchFamily="34" charset="-122"/>
+                <a:cs typeface="맑은 고딕" pitchFamily="34" charset="-120"/>
+              </a:rPr>
+              <a:t>① 배의 위치를 ECEF 로</a:t>
+            </a:r>
+            <a:endParaRPr lang="en-US" sz="1250" dirty="0"/>
+          </a:p>
+          <a:p>
+            <a:pPr indent="0" marL="0">
+              <a:lnSpc>
+                <a:spcPts val="1800"/>
+              </a:lnSpc>
+              <a:buNone/>
+            </a:pPr>
+            <a:r>
+              <a:rPr lang="en-US" sz="1250" dirty="0">
+                <a:solidFill>
+                  <a:srgbClr val="1A2233"/>
+                </a:solidFill>
+                <a:latin typeface="맑은 고딕" pitchFamily="34" charset="0"/>
+                <a:ea typeface="맑은 고딕" pitchFamily="34" charset="-122"/>
+                <a:cs typeface="맑은 고딕" pitchFamily="34" charset="-120"/>
+              </a:rPr>
+              <a:t>② 로컬 벡터를 지구 방향으로 회전</a:t>
+            </a:r>
+            <a:endParaRPr lang="en-US" sz="1250" dirty="0"/>
+          </a:p>
+          <a:p>
+            <a:pPr indent="0" marL="0">
+              <a:lnSpc>
+                <a:spcPts val="1800"/>
+              </a:lnSpc>
+              <a:buNone/>
+            </a:pPr>
+            <a:r>
+              <a:rPr lang="en-US" sz="1250" dirty="0">
+                <a:solidFill>
+                  <a:srgbClr val="1A2233"/>
+                </a:solidFill>
+                <a:latin typeface="맑은 고딕" pitchFamily="34" charset="0"/>
+                <a:ea typeface="맑은 고딕" pitchFamily="34" charset="-122"/>
+                <a:cs typeface="맑은 고딕" pitchFamily="34" charset="-120"/>
+              </a:rPr>
+              <a:t>   (회전량은 배의 위도·경도가 결정)</a:t>
+            </a:r>
+            <a:endParaRPr lang="en-US" sz="1250" dirty="0"/>
+          </a:p>
+          <a:p>
+            <a:pPr indent="0" marL="0">
+              <a:lnSpc>
+                <a:spcPts val="1800"/>
+              </a:lnSpc>
+              <a:buNone/>
+            </a:pPr>
+            <a:r>
+              <a:rPr lang="en-US" sz="1250" dirty="0">
+                <a:solidFill>
+                  <a:srgbClr val="1A2233"/>
+                </a:solidFill>
+                <a:latin typeface="맑은 고딕" pitchFamily="34" charset="0"/>
+                <a:ea typeface="맑은 고딕" pitchFamily="34" charset="-122"/>
+                <a:cs typeface="맑은 고딕" pitchFamily="34" charset="-120"/>
+              </a:rPr>
+              <a:t>③ 더한다</a:t>
+            </a:r>
+            <a:endParaRPr lang="en-US" sz="1250" dirty="0"/>
+          </a:p>
+        </p:txBody>
+      </p:sp>
+      <p:sp>
+        <p:nvSpPr>
+          <p:cNvPr id="9" name="Shape 7"/>
+          <p:cNvSpPr/>
+          <p:nvPr/>
+        </p:nvSpPr>
+        <p:spPr>
+          <a:xfrm>
+            <a:off x="6144768" y="1371600"/>
+            <a:ext cx="5486400" cy="2139696"/>
+          </a:xfrm>
+          <a:prstGeom prst="roundRect">
+            <a:avLst>
+              <a:gd name="adj" fmla="val 3419"/>
+            </a:avLst>
+          </a:prstGeom>
+          <a:solidFill>
+            <a:srgbClr val="EEF1F7"/>
+          </a:solidFill>
+          <a:ln w="12700">
+            <a:solidFill>
+              <a:srgbClr val="FFFFFF"/>
+            </a:solidFill>
+            <a:prstDash val="solid"/>
+          </a:ln>
+        </p:spPr>
+        <p:txBody>
+          <a:bodyPr/>
+          <a:p/>
+        </p:txBody>
+      </p:sp>
+      <p:sp>
+        <p:nvSpPr>
+          <p:cNvPr id="10" name="Shape 8"/>
+          <p:cNvSpPr/>
+          <p:nvPr/>
+        </p:nvSpPr>
+        <p:spPr>
+          <a:xfrm>
+            <a:off x="6400800" y="1554480"/>
+            <a:ext cx="402336" cy="402336"/>
+          </a:xfrm>
+          <a:prstGeom prst="ellipse">
+            <a:avLst/>
+          </a:prstGeom>
+          <a:solidFill>
+            <a:srgbClr val="2B57A6"/>
+          </a:solidFill>
+          <a:ln/>
+        </p:spPr>
+        <p:txBody>
+          <a:bodyPr/>
+          <a:p/>
+        </p:txBody>
+      </p:sp>
+      <p:sp>
+        <p:nvSpPr>
+          <p:cNvPr id="11" name="Text 9"/>
+          <p:cNvSpPr txBox="1"/>
+          <p:nvPr/>
+        </p:nvSpPr>
+        <p:spPr>
+          <a:xfrm>
+            <a:off x="6400800" y="1554480"/>
+            <a:ext cx="402336" cy="402336"/>
+          </a:xfrm>
+          <a:prstGeom prst="rect">
+            <a:avLst/>
+          </a:prstGeom>
+          <a:noFill/>
+          <a:ln/>
+        </p:spPr>
+        <p:txBody>
+          <a:bodyPr wrap="square" lIns="0" tIns="0" rIns="0" bIns="0" rtlCol="0" anchor="ctr"/>
+          <a:lstStyle/>
+          <a:p>
+            <a:pPr algn="ctr" indent="0" marL="0">
+              <a:buNone/>
+            </a:pPr>
+            <a:r>
+              <a:rPr lang="en-US" sz="1500" b="1" dirty="0">
+                <a:solidFill>
+                  <a:srgbClr val="FFFFFF"/>
+                </a:solidFill>
+                <a:latin typeface="맑은 고딕" pitchFamily="34" charset="0"/>
+                <a:ea typeface="맑은 고딕" pitchFamily="34" charset="-122"/>
+                <a:cs typeface="맑은 고딕" pitchFamily="34" charset="-120"/>
+              </a:rPr>
+              <a:t>5</a:t>
+            </a:r>
+            <a:endParaRPr lang="en-US" sz="1500" dirty="0"/>
+          </a:p>
+        </p:txBody>
+      </p:sp>
+      <p:sp>
+        <p:nvSpPr>
+          <p:cNvPr id="12" name="Text 10"/>
+          <p:cNvSpPr txBox="1"/>
+          <p:nvPr/>
+        </p:nvSpPr>
+        <p:spPr>
+          <a:xfrm>
+            <a:off x="6949440" y="1536192"/>
+            <a:ext cx="3840480" cy="329184"/>
+          </a:xfrm>
+          <a:prstGeom prst="rect">
+            <a:avLst/>
+          </a:prstGeom>
+          <a:noFill/>
+          <a:ln/>
+        </p:spPr>
+        <p:txBody>
+          <a:bodyPr wrap="square" lIns="0" tIns="0" rIns="0" bIns="0" rtlCol="0" anchor="ctr"/>
+          <a:lstStyle/>
+          <a:p>
+            <a:pPr indent="0" marL="0">
+              <a:buNone/>
+            </a:pPr>
+            <a:r>
+              <a:rPr lang="en-US" sz="1600" b="1" dirty="0">
+                <a:solidFill>
+                  <a:srgbClr val="2B57A6"/>
+                </a:solidFill>
+                <a:latin typeface="맑은 고딕" pitchFamily="34" charset="0"/>
+                <a:ea typeface="맑은 고딕" pitchFamily="34" charset="-122"/>
+                <a:cs typeface="맑은 고딕" pitchFamily="34" charset="-120"/>
+              </a:rPr>
+              <a:t>ECEF → LLA</a:t>
+            </a:r>
+            <a:endParaRPr lang="en-US" sz="1600" dirty="0"/>
+          </a:p>
+        </p:txBody>
+      </p:sp>
+      <p:sp>
+        <p:nvSpPr>
+          <p:cNvPr id="13" name="Text 11"/>
+          <p:cNvSpPr txBox="1"/>
+          <p:nvPr/>
+        </p:nvSpPr>
+        <p:spPr>
+          <a:xfrm>
+            <a:off x="6949440" y="1883664"/>
+            <a:ext cx="3840480" cy="274320"/>
+          </a:xfrm>
+          <a:prstGeom prst="rect">
+            <a:avLst/>
+          </a:prstGeom>
+          <a:noFill/>
+          <a:ln/>
+        </p:spPr>
+        <p:txBody>
+          <a:bodyPr wrap="square" lIns="0" tIns="0" rIns="0" bIns="0" rtlCol="0" anchor="ctr"/>
+          <a:lstStyle/>
+          <a:p>
+            <a:pPr indent="0" marL="0">
+              <a:buNone/>
+            </a:pPr>
+            <a:r>
+              <a:rPr lang="en-US" sz="1200" i="1" dirty="0">
+                <a:solidFill>
+                  <a:srgbClr val="5A6478"/>
+                </a:solidFill>
+                <a:latin typeface="맑은 고딕" pitchFamily="34" charset="0"/>
+                <a:ea typeface="맑은 고딕" pitchFamily="34" charset="-122"/>
+                <a:cs typeface="맑은 고딕" pitchFamily="34" charset="-120"/>
+              </a:rPr>
+              <a:t>위도 · 고도 반복 계산</a:t>
+            </a:r>
+            <a:endParaRPr lang="en-US" sz="1200" dirty="0"/>
+          </a:p>
+        </p:txBody>
+      </p:sp>
+      <p:sp>
+        <p:nvSpPr>
+          <p:cNvPr id="14" name="Text 12"/>
+          <p:cNvSpPr txBox="1"/>
+          <p:nvPr/>
+        </p:nvSpPr>
+        <p:spPr>
+          <a:xfrm>
+            <a:off x="6400800" y="2286000"/>
+            <a:ext cx="5029200" cy="1097280"/>
+          </a:xfrm>
+          <a:prstGeom prst="rect">
+            <a:avLst/>
+          </a:prstGeom>
+          <a:noFill/>
+          <a:ln/>
+        </p:spPr>
+        <p:txBody>
+          <a:bodyPr wrap="square" lIns="0" tIns="0" rIns="0" bIns="0" rtlCol="0" anchor="ctr"/>
+          <a:lstStyle/>
+          <a:p>
+            <a:pPr indent="0" marL="0">
+              <a:lnSpc>
+                <a:spcPts val="1800"/>
+              </a:lnSpc>
+              <a:buNone/>
+            </a:pPr>
+            <a:r>
+              <a:rPr lang="en-US" sz="1250" dirty="0">
+                <a:solidFill>
+                  <a:srgbClr val="1A2233"/>
+                </a:solidFill>
+                <a:latin typeface="맑은 고딕" pitchFamily="34" charset="0"/>
+                <a:ea typeface="맑은 고딕" pitchFamily="34" charset="-122"/>
+                <a:cs typeface="맑은 고딕" pitchFamily="34" charset="-120"/>
+              </a:rPr>
+              <a:t>닭-달걀 관계라 딱 떨어지는 공식이 없다.</a:t>
+            </a:r>
+            <a:endParaRPr lang="en-US" sz="1250" dirty="0"/>
+          </a:p>
+          <a:p>
+            <a:pPr indent="0" marL="0">
+              <a:lnSpc>
+                <a:spcPts val="1800"/>
+              </a:lnSpc>
+              <a:buNone/>
+            </a:pPr>
+            <a:r>
+              <a:rPr lang="en-US" sz="1250" dirty="0">
+                <a:solidFill>
+                  <a:srgbClr val="1A2233"/>
+                </a:solidFill>
+                <a:latin typeface="맑은 고딕" pitchFamily="34" charset="0"/>
+                <a:ea typeface="맑은 고딕" pitchFamily="34" charset="-122"/>
+                <a:cs typeface="맑은 고딕" pitchFamily="34" charset="-120"/>
+              </a:rPr>
+              <a:t>위도를 알아야 곡률반경 N 을 구하는데</a:t>
+            </a:r>
+            <a:endParaRPr lang="en-US" sz="1250" dirty="0"/>
+          </a:p>
+          <a:p>
+            <a:pPr indent="0" marL="0">
+              <a:lnSpc>
+                <a:spcPts val="1800"/>
+              </a:lnSpc>
+              <a:buNone/>
+            </a:pPr>
+            <a:r>
+              <a:rPr lang="en-US" sz="1250" dirty="0">
+                <a:solidFill>
+                  <a:srgbClr val="1A2233"/>
+                </a:solidFill>
+                <a:latin typeface="맑은 고딕" pitchFamily="34" charset="0"/>
+                <a:ea typeface="맑은 고딕" pitchFamily="34" charset="-122"/>
+                <a:cs typeface="맑은 고딕" pitchFamily="34" charset="-120"/>
+              </a:rPr>
+              <a:t>N 을 알아야 위도를 구할 수 있기 때문.</a:t>
+            </a:r>
+            <a:endParaRPr lang="en-US" sz="1250" dirty="0"/>
+          </a:p>
+          <a:p>
+            <a:pPr indent="0" marL="0">
+              <a:lnSpc>
+                <a:spcPts val="1800"/>
+              </a:lnSpc>
+              <a:buNone/>
+            </a:pPr>
+            <a:r>
+              <a:rPr lang="en-US" sz="1250" dirty="0">
+                <a:solidFill>
+                  <a:srgbClr val="1A2233"/>
+                </a:solidFill>
+                <a:latin typeface="맑은 고딕" pitchFamily="34" charset="0"/>
+                <a:ea typeface="맑은 고딕" pitchFamily="34" charset="-122"/>
+                <a:cs typeface="맑은 고딕" pitchFamily="34" charset="-120"/>
+              </a:rPr>
+              <a:t>→ 구로 본 위도에서 출발, 값이 안 변할 때까지 반복</a:t>
+            </a:r>
+            <a:endParaRPr lang="en-US" sz="1250" dirty="0"/>
+          </a:p>
+        </p:txBody>
+      </p:sp>
+      <p:sp>
+        <p:nvSpPr>
+          <p:cNvPr id="15" name="Shape 13"/>
+          <p:cNvSpPr/>
+          <p:nvPr/>
+        </p:nvSpPr>
+        <p:spPr>
+          <a:xfrm>
+            <a:off x="566928" y="3626510"/>
+            <a:ext cx="11064240" cy="914400"/>
+          </a:xfrm>
+          <a:prstGeom prst="roundRect">
+            <a:avLst>
+              <a:gd name="adj" fmla="val 8000"/>
+            </a:avLst>
+          </a:prstGeom>
+          <a:solidFill>
+            <a:srgbClr val="FBEADF"/>
+          </a:solidFill>
+          <a:ln w="12700">
+            <a:solidFill>
+              <a:srgbClr val="FFFFFF"/>
+            </a:solidFill>
+            <a:prstDash val="solid"/>
+          </a:ln>
+        </p:spPr>
+        <p:txBody>
+          <a:bodyPr/>
+          <a:p/>
+        </p:txBody>
+      </p:sp>
+      <p:sp>
+        <p:nvSpPr>
+          <p:cNvPr id="16" name="Text 14"/>
+          <p:cNvSpPr txBox="1"/>
+          <p:nvPr/>
+        </p:nvSpPr>
+        <p:spPr>
+          <a:xfrm>
+            <a:off x="566928" y="3626510"/>
+            <a:ext cx="11064240" cy="914400"/>
+          </a:xfrm>
+          <a:prstGeom prst="rect">
+            <a:avLst/>
+          </a:prstGeom>
+          <a:noFill/>
+          <a:ln/>
+        </p:spPr>
+        <p:txBody>
+          <a:bodyPr wrap="square" lIns="0" tIns="0" rIns="0" bIns="0" rtlCol="0" anchor="ctr"/>
+          <a:lstStyle/>
+          <a:p>
+            <a:pPr algn="ctr" indent="0" marL="0">
+              <a:buNone/>
+            </a:pPr>
+            <a:r>
+              <a:rPr lang="en-US" sz="2200" b="1" dirty="0">
+                <a:solidFill>
+                  <a:srgbClr val="C2521C"/>
+                </a:solidFill>
+                <a:latin typeface="Consolas" pitchFamily="34" charset="0"/>
+                <a:ea typeface="Consolas" pitchFamily="34" charset="-122"/>
+                <a:cs typeface="Consolas" pitchFamily="34" charset="-120"/>
+              </a:rPr>
+              <a:t>표적 LLA  =  36.233700252°N   127.364344961°E   고도 41.4952 m</a:t>
+            </a:r>
+            <a:endParaRPr lang="en-US" sz="2200" dirty="0"/>
+          </a:p>
+        </p:txBody>
+      </p:sp>
+      <p:sp>
+        <p:nvSpPr>
+          <p:cNvPr id="17" name="Shape 15"/>
+          <p:cNvSpPr/>
+          <p:nvPr/>
+        </p:nvSpPr>
+        <p:spPr>
+          <a:xfrm>
+            <a:off x="566928" y="4681728"/>
+            <a:ext cx="11064240" cy="1554480"/>
+          </a:xfrm>
+          <a:prstGeom prst="roundRect">
+            <a:avLst>
+              <a:gd name="adj" fmla="val 4706"/>
+            </a:avLst>
+          </a:prstGeom>
+          <a:solidFill>
+            <a:srgbClr val="F4F6FA"/>
+          </a:solidFill>
+          <a:ln w="12700">
+            <a:solidFill>
+              <a:srgbClr val="FFFFFF"/>
+            </a:solidFill>
+            <a:prstDash val="solid"/>
+          </a:ln>
+        </p:spPr>
+        <p:txBody>
+          <a:bodyPr/>
+          <a:p/>
+        </p:txBody>
+      </p:sp>
+      <p:sp>
+        <p:nvSpPr>
+          <p:cNvPr id="18" name="Text 16"/>
+          <p:cNvSpPr txBox="1"/>
+          <p:nvPr/>
+        </p:nvSpPr>
+        <p:spPr>
+          <a:xfrm>
+            <a:off x="859536" y="4828032"/>
+            <a:ext cx="10424160" cy="347472"/>
+          </a:xfrm>
+          <a:prstGeom prst="rect">
+            <a:avLst/>
+          </a:prstGeom>
+          <a:noFill/>
+          <a:ln/>
+        </p:spPr>
+        <p:txBody>
+          <a:bodyPr wrap="square" lIns="0" tIns="0" rIns="0" bIns="0" rtlCol="0" anchor="ctr"/>
+          <a:lstStyle/>
+          <a:p>
+            <a:pPr indent="0" marL="0">
+              <a:buNone/>
+            </a:pPr>
+            <a:r>
+              <a:rPr lang="en-US" sz="1600" b="1" dirty="0">
+                <a:solidFill>
+                  <a:srgbClr val="1A2233"/>
+                </a:solidFill>
+                <a:latin typeface="맑은 고딕" pitchFamily="34" charset="0"/>
+                <a:ea typeface="맑은 고딕" pitchFamily="34" charset="-122"/>
+                <a:cs typeface="맑은 고딕" pitchFamily="34" charset="-120"/>
+              </a:rPr>
+              <a:t>왜 고도가 10 m 가 아니라 41.5 m 인가?</a:t>
+            </a:r>
+            <a:endParaRPr lang="en-US" sz="1600" dirty="0"/>
+          </a:p>
+        </p:txBody>
+      </p:sp>
+      <p:sp>
+        <p:nvSpPr>
+          <p:cNvPr id="19" name="Text 17"/>
+          <p:cNvSpPr txBox="1"/>
+          <p:nvPr/>
+        </p:nvSpPr>
+        <p:spPr>
+          <a:xfrm>
+            <a:off x="859536" y="5230368"/>
+            <a:ext cx="10424160" cy="822960"/>
+          </a:xfrm>
+          <a:prstGeom prst="rect">
+            <a:avLst/>
+          </a:prstGeom>
+          <a:noFill/>
+          <a:ln/>
+        </p:spPr>
+        <p:txBody>
+          <a:bodyPr wrap="square" lIns="0" tIns="0" rIns="0" bIns="0" rtlCol="0" anchor="ctr"/>
+          <a:lstStyle/>
+          <a:p>
+            <a:pPr indent="0" marL="0">
+              <a:lnSpc>
+                <a:spcPts val="2000"/>
+              </a:lnSpc>
+              <a:buNone/>
+            </a:pPr>
+            <a:r>
+              <a:rPr lang="en-US" sz="1350" dirty="0">
+                <a:solidFill>
+                  <a:srgbClr val="1A2233"/>
+                </a:solidFill>
+                <a:latin typeface="맑은 고딕" pitchFamily="34" charset="0"/>
+                <a:ea typeface="맑은 고딕" pitchFamily="34" charset="-122"/>
+                <a:cs typeface="맑은 고딕" pitchFamily="34" charset="-120"/>
+              </a:rPr>
+              <a:t>레이다는 수평(El = 0°)으로 쐈고 안테나는 10 m 높이니 "표적 고도 10 m" 일 것 같습니다.</a:t>
+            </a:r>
+            <a:endParaRPr lang="en-US" sz="1350" dirty="0"/>
+          </a:p>
+          <a:p>
+            <a:pPr indent="0" marL="0">
+              <a:lnSpc>
+                <a:spcPts val="2000"/>
+              </a:lnSpc>
+              <a:buNone/>
+            </a:pPr>
+            <a:r>
+              <a:rPr lang="en-US" sz="1350" dirty="0">
+                <a:solidFill>
+                  <a:srgbClr val="1A2233"/>
+                </a:solidFill>
+                <a:latin typeface="맑은 고딕" pitchFamily="34" charset="0"/>
+                <a:ea typeface="맑은 고딕" pitchFamily="34" charset="-122"/>
+                <a:cs typeface="맑은 고딕" pitchFamily="34" charset="-120"/>
+              </a:rPr>
+              <a:t>그런데 빔은 직진하는데 바다 표면은 멀어질수록 아래로 휘어 내려갑니다. 20 km 지점에서 그 차이가 31.5 m,  10 + 31.5 = 41.5 m.</a:t>
+            </a:r>
+            <a:endParaRPr lang="en-US" sz="1350" dirty="0"/>
+          </a:p>
+        </p:txBody>
+      </p:sp>
+      <p:sp>
+        <p:nvSpPr>
+          <p:cNvPr id="21" name="Rectangle 20"/>
+          <p:cNvSpPr/>
+          <p:nvPr/>
+        </p:nvSpPr>
+        <p:spPr>
+          <a:xfrm>
+            <a:off x="457200" y="411480"/>
+            <a:ext cx="11277295" cy="777240"/>
+          </a:xfrm>
+          <a:prstGeom prst="rect">
+            <a:avLst/>
+          </a:prstGeom>
+          <a:solidFill>
+            <a:srgbClr val="13233F"/>
+          </a:solidFill>
+          <a:ln>
+            <a:noFill/>
+          </a:ln>
+          <a:effectLst/>
+        </p:spPr>
+        <p:style>
+          <a:lnRef idx="1">
+            <a:schemeClr val="accent1"/>
+          </a:lnRef>
+          <a:fillRef idx="3">
+            <a:schemeClr val="accent1"/>
+          </a:fillRef>
+          <a:effectRef idx="2">
+            <a:schemeClr val="accent1"/>
+          </a:effectRef>
+          <a:fontRef idx="minor">
+            <a:schemeClr val="lt1"/>
+          </a:fontRef>
+        </p:style>
+        <p:txBody>
+          <a:bodyPr rtlCol="0" anchor="ctr" wrap="none"/>
+          <a:lstStyle/>
+          <a:p>
+            <a:pPr algn="ctr"/>
+          </a:p>
+        </p:txBody>
+      </p:sp>
+      <p:sp>
+        <p:nvSpPr>
+          <p:cNvPr id="22" name="TextBox 21"/>
+          <p:cNvSpPr txBox="1"/>
+          <p:nvPr/>
+        </p:nvSpPr>
+        <p:spPr>
+          <a:xfrm>
+            <a:off x="640080" y="411480"/>
+            <a:ext cx="8732520" cy="777240"/>
+          </a:xfrm>
+          <a:prstGeom prst="rect">
+            <a:avLst/>
+          </a:prstGeom>
+          <a:noFill/>
+        </p:spPr>
+        <p:txBody>
+          <a:bodyPr wrap="square" anchor="ctr" lIns="0" rIns="0" tIns="0" bIns="0">
+            <a:spAutoFit/>
+          </a:bodyPr>
+          <a:lstStyle/>
+          <a:p>
+            <a:pPr algn="l">
+              <a:spcAft>
+                <a:spcPts val="300"/>
+              </a:spcAft>
+            </a:pPr>
+            <a:r>
+              <a:rPr sz="2000" b="1">
+                <a:solidFill>
+                  <a:srgbClr val="FFFFFF"/>
+                </a:solidFill>
+                <a:latin typeface="맑은 고딕"/>
+              </a:rPr>
+              <a:t>02. 단계별 변환  ④~⑤  로컬 → ECEF → 위경도</a:t>
+            </a:r>
+          </a:p>
+        </p:txBody>
+      </p:sp>
+      <p:cxnSp>
+        <p:nvCxnSpPr>
+          <p:cNvPr id="24" name="Connector 23"/>
+          <p:cNvCxnSpPr/>
+          <p:nvPr/>
+        </p:nvCxnSpPr>
+        <p:spPr>
+          <a:xfrm>
+            <a:off x="457200" y="6355080"/>
+            <a:ext cx="11277295" cy="0"/>
+          </a:xfrm>
+          <a:prstGeom prst="line">
+            <a:avLst/>
+          </a:prstGeom>
+          <a:ln w="9525">
+            <a:solidFill>
+              <a:srgbClr val="B9C0CC"/>
+            </a:solidFill>
+          </a:ln>
+        </p:spPr>
+        <p:style>
+          <a:lnRef idx="2">
+            <a:schemeClr val="accent1"/>
+          </a:lnRef>
+          <a:fillRef idx="0">
+            <a:schemeClr val="accent1"/>
+          </a:fillRef>
+          <a:effectRef idx="1">
+            <a:schemeClr val="accent1"/>
+          </a:effectRef>
+          <a:fontRef idx="minor">
+            <a:schemeClr val="tx1"/>
+          </a:fontRef>
+        </p:style>
+      </p:cxnSp>
+      <p:sp>
+        <p:nvSpPr>
+          <p:cNvPr id="26" name="TextBox 25"/>
           <p:cNvSpPr txBox="1"/>
           <p:nvPr/>
         </p:nvSpPr>
@@ -18572,987 +17950,6 @@
 
 <file path=ppt/slides/slide20.xml><?xml version="1.0" encoding="utf-8"?>
 <p:sld xmlns:a="http://schemas.openxmlformats.org/drawingml/2006/main" xmlns:r="http://schemas.openxmlformats.org/officeDocument/2006/relationships" xmlns:p="http://schemas.openxmlformats.org/presentationml/2006/main">
-  <p:cSld name="Slide 27">
-    <p:bg>
-      <p:bgPr>
-        <a:solidFill>
-          <a:srgbClr val="E8EDF5"/>
-        </a:solidFill>
-        <a:effectLst/>
-      </p:bgPr>
-    </p:bg>
-    <p:spTree>
-      <p:nvGrpSpPr>
-        <p:cNvPr id="1" name=""/>
-        <p:cNvGrpSpPr/>
-        <p:nvPr/>
-      </p:nvGrpSpPr>
-      <p:grpSpPr>
-        <a:xfrm>
-          <a:off x="0" y="0"/>
-          <a:ext cx="0" cy="0"/>
-          <a:chOff x="0" y="0"/>
-          <a:chExt cx="0" cy="0"/>
-        </a:xfrm>
-      </p:grpSpPr>
-      <p:sp>
-        <p:nvSpPr>
-          <p:cNvPr id="20" name="Rectangle 19"/>
-          <p:cNvSpPr/>
-          <p:nvPr/>
-        </p:nvSpPr>
-        <p:spPr>
-          <a:xfrm>
-            <a:off x="457200" y="1243584"/>
-            <a:ext cx="11277295" cy="5047488"/>
-          </a:xfrm>
-          <a:prstGeom prst="rect">
-            <a:avLst/>
-          </a:prstGeom>
-          <a:solidFill>
-            <a:srgbClr val="FFFFFF"/>
-          </a:solidFill>
-          <a:ln>
-            <a:noFill/>
-          </a:ln>
-          <a:effectLst/>
-        </p:spPr>
-        <p:style>
-          <a:lnRef idx="1">
-            <a:schemeClr val="accent1"/>
-          </a:lnRef>
-          <a:fillRef idx="3">
-            <a:schemeClr val="accent1"/>
-          </a:fillRef>
-          <a:effectRef idx="2">
-            <a:schemeClr val="accent1"/>
-          </a:effectRef>
-          <a:fontRef idx="minor">
-            <a:schemeClr val="lt1"/>
-          </a:fontRef>
-        </p:style>
-        <p:txBody>
-          <a:bodyPr rtlCol="0" anchor="ctr" wrap="none"/>
-          <a:lstStyle/>
-          <a:p>
-            <a:pPr algn="ctr"/>
-          </a:p>
-        </p:txBody>
-      </p:sp>
-      <p:sp>
-        <p:nvSpPr>
-          <p:cNvPr id="3" name="Shape 1"/>
-          <p:cNvSpPr/>
-          <p:nvPr/>
-        </p:nvSpPr>
-        <p:spPr>
-          <a:xfrm>
-            <a:off x="566928" y="1371600"/>
-            <a:ext cx="5486400" cy="2139696"/>
-          </a:xfrm>
-          <a:prstGeom prst="roundRect">
-            <a:avLst>
-              <a:gd name="adj" fmla="val 3419"/>
-            </a:avLst>
-          </a:prstGeom>
-          <a:solidFill>
-            <a:srgbClr val="EEF1F7"/>
-          </a:solidFill>
-          <a:ln w="12700">
-            <a:solidFill>
-              <a:srgbClr val="FFFFFF"/>
-            </a:solidFill>
-            <a:prstDash val="solid"/>
-          </a:ln>
-        </p:spPr>
-        <p:txBody>
-          <a:bodyPr/>
-          <a:p/>
-        </p:txBody>
-      </p:sp>
-      <p:sp>
-        <p:nvSpPr>
-          <p:cNvPr id="4" name="Shape 2"/>
-          <p:cNvSpPr/>
-          <p:nvPr/>
-        </p:nvSpPr>
-        <p:spPr>
-          <a:xfrm>
-            <a:off x="822960" y="1554480"/>
-            <a:ext cx="402336" cy="402336"/>
-          </a:xfrm>
-          <a:prstGeom prst="ellipse">
-            <a:avLst/>
-          </a:prstGeom>
-          <a:solidFill>
-            <a:srgbClr val="2B57A6"/>
-          </a:solidFill>
-          <a:ln/>
-        </p:spPr>
-        <p:txBody>
-          <a:bodyPr/>
-          <a:p/>
-        </p:txBody>
-      </p:sp>
-      <p:sp>
-        <p:nvSpPr>
-          <p:cNvPr id="5" name="Text 3"/>
-          <p:cNvSpPr txBox="1"/>
-          <p:nvPr/>
-        </p:nvSpPr>
-        <p:spPr>
-          <a:xfrm>
-            <a:off x="822960" y="1554480"/>
-            <a:ext cx="402336" cy="402336"/>
-          </a:xfrm>
-          <a:prstGeom prst="rect">
-            <a:avLst/>
-          </a:prstGeom>
-          <a:noFill/>
-          <a:ln/>
-        </p:spPr>
-        <p:txBody>
-          <a:bodyPr wrap="square" lIns="0" tIns="0" rIns="0" bIns="0" rtlCol="0" anchor="ctr"/>
-          <a:lstStyle/>
-          <a:p>
-            <a:pPr algn="ctr" indent="0" marL="0">
-              <a:buNone/>
-            </a:pPr>
-            <a:r>
-              <a:rPr lang="en-US" sz="1500" b="1" dirty="0">
-                <a:solidFill>
-                  <a:srgbClr val="FFFFFF"/>
-                </a:solidFill>
-                <a:latin typeface="맑은 고딕" pitchFamily="34" charset="0"/>
-                <a:ea typeface="맑은 고딕" pitchFamily="34" charset="-122"/>
-                <a:cs typeface="맑은 고딕" pitchFamily="34" charset="-120"/>
-              </a:rPr>
-              <a:t>4</a:t>
-            </a:r>
-            <a:endParaRPr lang="en-US" sz="1500" dirty="0"/>
-          </a:p>
-        </p:txBody>
-      </p:sp>
-      <p:sp>
-        <p:nvSpPr>
-          <p:cNvPr id="6" name="Text 4"/>
-          <p:cNvSpPr txBox="1"/>
-          <p:nvPr/>
-        </p:nvSpPr>
-        <p:spPr>
-          <a:xfrm>
-            <a:off x="1371600" y="1536192"/>
-            <a:ext cx="3840480" cy="329184"/>
-          </a:xfrm>
-          <a:prstGeom prst="rect">
-            <a:avLst/>
-          </a:prstGeom>
-          <a:noFill/>
-          <a:ln/>
-        </p:spPr>
-        <p:txBody>
-          <a:bodyPr wrap="square" lIns="0" tIns="0" rIns="0" bIns="0" rtlCol="0" anchor="ctr"/>
-          <a:lstStyle/>
-          <a:p>
-            <a:pPr indent="0" marL="0">
-              <a:buNone/>
-            </a:pPr>
-            <a:r>
-              <a:rPr lang="en-US" sz="1600" b="1" dirty="0">
-                <a:solidFill>
-                  <a:srgbClr val="2B57A6"/>
-                </a:solidFill>
-                <a:latin typeface="맑은 고딕" pitchFamily="34" charset="0"/>
-                <a:ea typeface="맑은 고딕" pitchFamily="34" charset="-122"/>
-                <a:cs typeface="맑은 고딕" pitchFamily="34" charset="-120"/>
-              </a:rPr>
-              <a:t>로컬 → ECEF</a:t>
-            </a:r>
-            <a:endParaRPr lang="en-US" sz="1600" dirty="0"/>
-          </a:p>
-        </p:txBody>
-      </p:sp>
-      <p:sp>
-        <p:nvSpPr>
-          <p:cNvPr id="7" name="Text 5"/>
-          <p:cNvSpPr txBox="1"/>
-          <p:nvPr/>
-        </p:nvSpPr>
-        <p:spPr>
-          <a:xfrm>
-            <a:off x="1371600" y="1883664"/>
-            <a:ext cx="3840480" cy="274320"/>
-          </a:xfrm>
-          <a:prstGeom prst="rect">
-            <a:avLst/>
-          </a:prstGeom>
-          <a:noFill/>
-          <a:ln/>
-        </p:spPr>
-        <p:txBody>
-          <a:bodyPr wrap="square" lIns="0" tIns="0" rIns="0" bIns="0" rtlCol="0" anchor="ctr"/>
-          <a:lstStyle/>
-          <a:p>
-            <a:pPr indent="0" marL="0">
-              <a:buNone/>
-            </a:pPr>
-            <a:r>
-              <a:rPr lang="en-US" sz="1200" i="1" dirty="0">
-                <a:solidFill>
-                  <a:srgbClr val="5A6478"/>
-                </a:solidFill>
-                <a:latin typeface="맑은 고딕" pitchFamily="34" charset="0"/>
-                <a:ea typeface="맑은 고딕" pitchFamily="34" charset="-122"/>
-                <a:cs typeface="맑은 고딕" pitchFamily="34" charset="-120"/>
-              </a:rPr>
-              <a:t>회전 + 평행이동</a:t>
-            </a:r>
-            <a:endParaRPr lang="en-US" sz="1200" dirty="0"/>
-          </a:p>
-        </p:txBody>
-      </p:sp>
-      <p:sp>
-        <p:nvSpPr>
-          <p:cNvPr id="8" name="Text 6"/>
-          <p:cNvSpPr txBox="1"/>
-          <p:nvPr/>
-        </p:nvSpPr>
-        <p:spPr>
-          <a:xfrm>
-            <a:off x="822960" y="2286000"/>
-            <a:ext cx="5029200" cy="1097280"/>
-          </a:xfrm>
-          <a:prstGeom prst="rect">
-            <a:avLst/>
-          </a:prstGeom>
-          <a:noFill/>
-          <a:ln/>
-        </p:spPr>
-        <p:txBody>
-          <a:bodyPr wrap="square" lIns="0" tIns="0" rIns="0" bIns="0" rtlCol="0" anchor="ctr"/>
-          <a:lstStyle/>
-          <a:p>
-            <a:pPr indent="0" marL="0">
-              <a:lnSpc>
-                <a:spcPts val="1800"/>
-              </a:lnSpc>
-              <a:buNone/>
-            </a:pPr>
-            <a:r>
-              <a:rPr lang="en-US" sz="1250" dirty="0">
-                <a:solidFill>
-                  <a:srgbClr val="1A2233"/>
-                </a:solidFill>
-                <a:latin typeface="맑은 고딕" pitchFamily="34" charset="0"/>
-                <a:ea typeface="맑은 고딕" pitchFamily="34" charset="-122"/>
-                <a:cs typeface="맑은 고딕" pitchFamily="34" charset="-120"/>
-              </a:rPr>
-              <a:t>① 배의 위치를 ECEF 로</a:t>
-            </a:r>
-            <a:endParaRPr lang="en-US" sz="1250" dirty="0"/>
-          </a:p>
-          <a:p>
-            <a:pPr indent="0" marL="0">
-              <a:lnSpc>
-                <a:spcPts val="1800"/>
-              </a:lnSpc>
-              <a:buNone/>
-            </a:pPr>
-            <a:r>
-              <a:rPr lang="en-US" sz="1250" dirty="0">
-                <a:solidFill>
-                  <a:srgbClr val="1A2233"/>
-                </a:solidFill>
-                <a:latin typeface="맑은 고딕" pitchFamily="34" charset="0"/>
-                <a:ea typeface="맑은 고딕" pitchFamily="34" charset="-122"/>
-                <a:cs typeface="맑은 고딕" pitchFamily="34" charset="-120"/>
-              </a:rPr>
-              <a:t>② 로컬 벡터를 지구 방향으로 회전</a:t>
-            </a:r>
-            <a:endParaRPr lang="en-US" sz="1250" dirty="0"/>
-          </a:p>
-          <a:p>
-            <a:pPr indent="0" marL="0">
-              <a:lnSpc>
-                <a:spcPts val="1800"/>
-              </a:lnSpc>
-              <a:buNone/>
-            </a:pPr>
-            <a:r>
-              <a:rPr lang="en-US" sz="1250" dirty="0">
-                <a:solidFill>
-                  <a:srgbClr val="1A2233"/>
-                </a:solidFill>
-                <a:latin typeface="맑은 고딕" pitchFamily="34" charset="0"/>
-                <a:ea typeface="맑은 고딕" pitchFamily="34" charset="-122"/>
-                <a:cs typeface="맑은 고딕" pitchFamily="34" charset="-120"/>
-              </a:rPr>
-              <a:t>   (회전량은 배의 위도·경도가 결정)</a:t>
-            </a:r>
-            <a:endParaRPr lang="en-US" sz="1250" dirty="0"/>
-          </a:p>
-          <a:p>
-            <a:pPr indent="0" marL="0">
-              <a:lnSpc>
-                <a:spcPts val="1800"/>
-              </a:lnSpc>
-              <a:buNone/>
-            </a:pPr>
-            <a:r>
-              <a:rPr lang="en-US" sz="1250" dirty="0">
-                <a:solidFill>
-                  <a:srgbClr val="1A2233"/>
-                </a:solidFill>
-                <a:latin typeface="맑은 고딕" pitchFamily="34" charset="0"/>
-                <a:ea typeface="맑은 고딕" pitchFamily="34" charset="-122"/>
-                <a:cs typeface="맑은 고딕" pitchFamily="34" charset="-120"/>
-              </a:rPr>
-              <a:t>③ 더한다</a:t>
-            </a:r>
-            <a:endParaRPr lang="en-US" sz="1250" dirty="0"/>
-          </a:p>
-        </p:txBody>
-      </p:sp>
-      <p:sp>
-        <p:nvSpPr>
-          <p:cNvPr id="9" name="Shape 7"/>
-          <p:cNvSpPr/>
-          <p:nvPr/>
-        </p:nvSpPr>
-        <p:spPr>
-          <a:xfrm>
-            <a:off x="6144768" y="1371600"/>
-            <a:ext cx="5486400" cy="2139696"/>
-          </a:xfrm>
-          <a:prstGeom prst="roundRect">
-            <a:avLst>
-              <a:gd name="adj" fmla="val 3419"/>
-            </a:avLst>
-          </a:prstGeom>
-          <a:solidFill>
-            <a:srgbClr val="EEF1F7"/>
-          </a:solidFill>
-          <a:ln w="12700">
-            <a:solidFill>
-              <a:srgbClr val="FFFFFF"/>
-            </a:solidFill>
-            <a:prstDash val="solid"/>
-          </a:ln>
-        </p:spPr>
-        <p:txBody>
-          <a:bodyPr/>
-          <a:p/>
-        </p:txBody>
-      </p:sp>
-      <p:sp>
-        <p:nvSpPr>
-          <p:cNvPr id="10" name="Shape 8"/>
-          <p:cNvSpPr/>
-          <p:nvPr/>
-        </p:nvSpPr>
-        <p:spPr>
-          <a:xfrm>
-            <a:off x="6400800" y="1554480"/>
-            <a:ext cx="402336" cy="402336"/>
-          </a:xfrm>
-          <a:prstGeom prst="ellipse">
-            <a:avLst/>
-          </a:prstGeom>
-          <a:solidFill>
-            <a:srgbClr val="2B57A6"/>
-          </a:solidFill>
-          <a:ln/>
-        </p:spPr>
-        <p:txBody>
-          <a:bodyPr/>
-          <a:p/>
-        </p:txBody>
-      </p:sp>
-      <p:sp>
-        <p:nvSpPr>
-          <p:cNvPr id="11" name="Text 9"/>
-          <p:cNvSpPr txBox="1"/>
-          <p:nvPr/>
-        </p:nvSpPr>
-        <p:spPr>
-          <a:xfrm>
-            <a:off x="6400800" y="1554480"/>
-            <a:ext cx="402336" cy="402336"/>
-          </a:xfrm>
-          <a:prstGeom prst="rect">
-            <a:avLst/>
-          </a:prstGeom>
-          <a:noFill/>
-          <a:ln/>
-        </p:spPr>
-        <p:txBody>
-          <a:bodyPr wrap="square" lIns="0" tIns="0" rIns="0" bIns="0" rtlCol="0" anchor="ctr"/>
-          <a:lstStyle/>
-          <a:p>
-            <a:pPr algn="ctr" indent="0" marL="0">
-              <a:buNone/>
-            </a:pPr>
-            <a:r>
-              <a:rPr lang="en-US" sz="1500" b="1" dirty="0">
-                <a:solidFill>
-                  <a:srgbClr val="FFFFFF"/>
-                </a:solidFill>
-                <a:latin typeface="맑은 고딕" pitchFamily="34" charset="0"/>
-                <a:ea typeface="맑은 고딕" pitchFamily="34" charset="-122"/>
-                <a:cs typeface="맑은 고딕" pitchFamily="34" charset="-120"/>
-              </a:rPr>
-              <a:t>5</a:t>
-            </a:r>
-            <a:endParaRPr lang="en-US" sz="1500" dirty="0"/>
-          </a:p>
-        </p:txBody>
-      </p:sp>
-      <p:sp>
-        <p:nvSpPr>
-          <p:cNvPr id="12" name="Text 10"/>
-          <p:cNvSpPr txBox="1"/>
-          <p:nvPr/>
-        </p:nvSpPr>
-        <p:spPr>
-          <a:xfrm>
-            <a:off x="6949440" y="1536192"/>
-            <a:ext cx="3840480" cy="329184"/>
-          </a:xfrm>
-          <a:prstGeom prst="rect">
-            <a:avLst/>
-          </a:prstGeom>
-          <a:noFill/>
-          <a:ln/>
-        </p:spPr>
-        <p:txBody>
-          <a:bodyPr wrap="square" lIns="0" tIns="0" rIns="0" bIns="0" rtlCol="0" anchor="ctr"/>
-          <a:lstStyle/>
-          <a:p>
-            <a:pPr indent="0" marL="0">
-              <a:buNone/>
-            </a:pPr>
-            <a:r>
-              <a:rPr lang="en-US" sz="1600" b="1" dirty="0">
-                <a:solidFill>
-                  <a:srgbClr val="2B57A6"/>
-                </a:solidFill>
-                <a:latin typeface="맑은 고딕" pitchFamily="34" charset="0"/>
-                <a:ea typeface="맑은 고딕" pitchFamily="34" charset="-122"/>
-                <a:cs typeface="맑은 고딕" pitchFamily="34" charset="-120"/>
-              </a:rPr>
-              <a:t>ECEF → LLA</a:t>
-            </a:r>
-            <a:endParaRPr lang="en-US" sz="1600" dirty="0"/>
-          </a:p>
-        </p:txBody>
-      </p:sp>
-      <p:sp>
-        <p:nvSpPr>
-          <p:cNvPr id="13" name="Text 11"/>
-          <p:cNvSpPr txBox="1"/>
-          <p:nvPr/>
-        </p:nvSpPr>
-        <p:spPr>
-          <a:xfrm>
-            <a:off x="6949440" y="1883664"/>
-            <a:ext cx="3840480" cy="274320"/>
-          </a:xfrm>
-          <a:prstGeom prst="rect">
-            <a:avLst/>
-          </a:prstGeom>
-          <a:noFill/>
-          <a:ln/>
-        </p:spPr>
-        <p:txBody>
-          <a:bodyPr wrap="square" lIns="0" tIns="0" rIns="0" bIns="0" rtlCol="0" anchor="ctr"/>
-          <a:lstStyle/>
-          <a:p>
-            <a:pPr indent="0" marL="0">
-              <a:buNone/>
-            </a:pPr>
-            <a:r>
-              <a:rPr lang="en-US" sz="1200" i="1" dirty="0">
-                <a:solidFill>
-                  <a:srgbClr val="5A6478"/>
-                </a:solidFill>
-                <a:latin typeface="맑은 고딕" pitchFamily="34" charset="0"/>
-                <a:ea typeface="맑은 고딕" pitchFamily="34" charset="-122"/>
-                <a:cs typeface="맑은 고딕" pitchFamily="34" charset="-120"/>
-              </a:rPr>
-              <a:t>위도 · 고도 반복 계산</a:t>
-            </a:r>
-            <a:endParaRPr lang="en-US" sz="1200" dirty="0"/>
-          </a:p>
-        </p:txBody>
-      </p:sp>
-      <p:sp>
-        <p:nvSpPr>
-          <p:cNvPr id="14" name="Text 12"/>
-          <p:cNvSpPr txBox="1"/>
-          <p:nvPr/>
-        </p:nvSpPr>
-        <p:spPr>
-          <a:xfrm>
-            <a:off x="6400800" y="2286000"/>
-            <a:ext cx="5029200" cy="1097280"/>
-          </a:xfrm>
-          <a:prstGeom prst="rect">
-            <a:avLst/>
-          </a:prstGeom>
-          <a:noFill/>
-          <a:ln/>
-        </p:spPr>
-        <p:txBody>
-          <a:bodyPr wrap="square" lIns="0" tIns="0" rIns="0" bIns="0" rtlCol="0" anchor="ctr"/>
-          <a:lstStyle/>
-          <a:p>
-            <a:pPr indent="0" marL="0">
-              <a:lnSpc>
-                <a:spcPts val="1800"/>
-              </a:lnSpc>
-              <a:buNone/>
-            </a:pPr>
-            <a:r>
-              <a:rPr lang="en-US" sz="1250" dirty="0">
-                <a:solidFill>
-                  <a:srgbClr val="1A2233"/>
-                </a:solidFill>
-                <a:latin typeface="맑은 고딕" pitchFamily="34" charset="0"/>
-                <a:ea typeface="맑은 고딕" pitchFamily="34" charset="-122"/>
-                <a:cs typeface="맑은 고딕" pitchFamily="34" charset="-120"/>
-              </a:rPr>
-              <a:t>닭-달걀 관계라 딱 떨어지는 공식이 없다.</a:t>
-            </a:r>
-            <a:endParaRPr lang="en-US" sz="1250" dirty="0"/>
-          </a:p>
-          <a:p>
-            <a:pPr indent="0" marL="0">
-              <a:lnSpc>
-                <a:spcPts val="1800"/>
-              </a:lnSpc>
-              <a:buNone/>
-            </a:pPr>
-            <a:r>
-              <a:rPr lang="en-US" sz="1250" dirty="0">
-                <a:solidFill>
-                  <a:srgbClr val="1A2233"/>
-                </a:solidFill>
-                <a:latin typeface="맑은 고딕" pitchFamily="34" charset="0"/>
-                <a:ea typeface="맑은 고딕" pitchFamily="34" charset="-122"/>
-                <a:cs typeface="맑은 고딕" pitchFamily="34" charset="-120"/>
-              </a:rPr>
-              <a:t>위도를 알아야 곡률반경 N 을 구하는데</a:t>
-            </a:r>
-            <a:endParaRPr lang="en-US" sz="1250" dirty="0"/>
-          </a:p>
-          <a:p>
-            <a:pPr indent="0" marL="0">
-              <a:lnSpc>
-                <a:spcPts val="1800"/>
-              </a:lnSpc>
-              <a:buNone/>
-            </a:pPr>
-            <a:r>
-              <a:rPr lang="en-US" sz="1250" dirty="0">
-                <a:solidFill>
-                  <a:srgbClr val="1A2233"/>
-                </a:solidFill>
-                <a:latin typeface="맑은 고딕" pitchFamily="34" charset="0"/>
-                <a:ea typeface="맑은 고딕" pitchFamily="34" charset="-122"/>
-                <a:cs typeface="맑은 고딕" pitchFamily="34" charset="-120"/>
-              </a:rPr>
-              <a:t>N 을 알아야 위도를 구할 수 있기 때문.</a:t>
-            </a:r>
-            <a:endParaRPr lang="en-US" sz="1250" dirty="0"/>
-          </a:p>
-          <a:p>
-            <a:pPr indent="0" marL="0">
-              <a:lnSpc>
-                <a:spcPts val="1800"/>
-              </a:lnSpc>
-              <a:buNone/>
-            </a:pPr>
-            <a:r>
-              <a:rPr lang="en-US" sz="1250" dirty="0">
-                <a:solidFill>
-                  <a:srgbClr val="1A2233"/>
-                </a:solidFill>
-                <a:latin typeface="맑은 고딕" pitchFamily="34" charset="0"/>
-                <a:ea typeface="맑은 고딕" pitchFamily="34" charset="-122"/>
-                <a:cs typeface="맑은 고딕" pitchFamily="34" charset="-120"/>
-              </a:rPr>
-              <a:t>→ 구로 본 위도에서 출발, 값이 안 변할 때까지 반복</a:t>
-            </a:r>
-            <a:endParaRPr lang="en-US" sz="1250" dirty="0"/>
-          </a:p>
-        </p:txBody>
-      </p:sp>
-      <p:sp>
-        <p:nvSpPr>
-          <p:cNvPr id="15" name="Shape 13"/>
-          <p:cNvSpPr/>
-          <p:nvPr/>
-        </p:nvSpPr>
-        <p:spPr>
-          <a:xfrm>
-            <a:off x="566928" y="3626510"/>
-            <a:ext cx="11064240" cy="914400"/>
-          </a:xfrm>
-          <a:prstGeom prst="roundRect">
-            <a:avLst>
-              <a:gd name="adj" fmla="val 8000"/>
-            </a:avLst>
-          </a:prstGeom>
-          <a:solidFill>
-            <a:srgbClr val="FBEADF"/>
-          </a:solidFill>
-          <a:ln w="12700">
-            <a:solidFill>
-              <a:srgbClr val="FFFFFF"/>
-            </a:solidFill>
-            <a:prstDash val="solid"/>
-          </a:ln>
-        </p:spPr>
-        <p:txBody>
-          <a:bodyPr/>
-          <a:p/>
-        </p:txBody>
-      </p:sp>
-      <p:sp>
-        <p:nvSpPr>
-          <p:cNvPr id="16" name="Text 14"/>
-          <p:cNvSpPr txBox="1"/>
-          <p:nvPr/>
-        </p:nvSpPr>
-        <p:spPr>
-          <a:xfrm>
-            <a:off x="566928" y="3626510"/>
-            <a:ext cx="11064240" cy="914400"/>
-          </a:xfrm>
-          <a:prstGeom prst="rect">
-            <a:avLst/>
-          </a:prstGeom>
-          <a:noFill/>
-          <a:ln/>
-        </p:spPr>
-        <p:txBody>
-          <a:bodyPr wrap="square" lIns="0" tIns="0" rIns="0" bIns="0" rtlCol="0" anchor="ctr"/>
-          <a:lstStyle/>
-          <a:p>
-            <a:pPr algn="ctr" indent="0" marL="0">
-              <a:buNone/>
-            </a:pPr>
-            <a:r>
-              <a:rPr lang="en-US" sz="2200" b="1" dirty="0">
-                <a:solidFill>
-                  <a:srgbClr val="C2521C"/>
-                </a:solidFill>
-                <a:latin typeface="Consolas" pitchFamily="34" charset="0"/>
-                <a:ea typeface="Consolas" pitchFamily="34" charset="-122"/>
-                <a:cs typeface="Consolas" pitchFamily="34" charset="-120"/>
-              </a:rPr>
-              <a:t>표적 LLA  =  36.233700252°N   127.364344961°E   고도 41.4952 m</a:t>
-            </a:r>
-            <a:endParaRPr lang="en-US" sz="2200" dirty="0"/>
-          </a:p>
-        </p:txBody>
-      </p:sp>
-      <p:sp>
-        <p:nvSpPr>
-          <p:cNvPr id="17" name="Shape 15"/>
-          <p:cNvSpPr/>
-          <p:nvPr/>
-        </p:nvSpPr>
-        <p:spPr>
-          <a:xfrm>
-            <a:off x="566928" y="4681728"/>
-            <a:ext cx="11064240" cy="1554480"/>
-          </a:xfrm>
-          <a:prstGeom prst="roundRect">
-            <a:avLst>
-              <a:gd name="adj" fmla="val 4706"/>
-            </a:avLst>
-          </a:prstGeom>
-          <a:solidFill>
-            <a:srgbClr val="F4F6FA"/>
-          </a:solidFill>
-          <a:ln w="12700">
-            <a:solidFill>
-              <a:srgbClr val="FFFFFF"/>
-            </a:solidFill>
-            <a:prstDash val="solid"/>
-          </a:ln>
-        </p:spPr>
-        <p:txBody>
-          <a:bodyPr/>
-          <a:p/>
-        </p:txBody>
-      </p:sp>
-      <p:sp>
-        <p:nvSpPr>
-          <p:cNvPr id="18" name="Text 16"/>
-          <p:cNvSpPr txBox="1"/>
-          <p:nvPr/>
-        </p:nvSpPr>
-        <p:spPr>
-          <a:xfrm>
-            <a:off x="859536" y="4828032"/>
-            <a:ext cx="10424160" cy="347472"/>
-          </a:xfrm>
-          <a:prstGeom prst="rect">
-            <a:avLst/>
-          </a:prstGeom>
-          <a:noFill/>
-          <a:ln/>
-        </p:spPr>
-        <p:txBody>
-          <a:bodyPr wrap="square" lIns="0" tIns="0" rIns="0" bIns="0" rtlCol="0" anchor="ctr"/>
-          <a:lstStyle/>
-          <a:p>
-            <a:pPr indent="0" marL="0">
-              <a:buNone/>
-            </a:pPr>
-            <a:r>
-              <a:rPr lang="en-US" sz="1600" b="1" dirty="0">
-                <a:solidFill>
-                  <a:srgbClr val="1A2233"/>
-                </a:solidFill>
-                <a:latin typeface="맑은 고딕" pitchFamily="34" charset="0"/>
-                <a:ea typeface="맑은 고딕" pitchFamily="34" charset="-122"/>
-                <a:cs typeface="맑은 고딕" pitchFamily="34" charset="-120"/>
-              </a:rPr>
-              <a:t>왜 고도가 10 m 가 아니라 41.5 m 인가?</a:t>
-            </a:r>
-            <a:endParaRPr lang="en-US" sz="1600" dirty="0"/>
-          </a:p>
-        </p:txBody>
-      </p:sp>
-      <p:sp>
-        <p:nvSpPr>
-          <p:cNvPr id="19" name="Text 17"/>
-          <p:cNvSpPr txBox="1"/>
-          <p:nvPr/>
-        </p:nvSpPr>
-        <p:spPr>
-          <a:xfrm>
-            <a:off x="859536" y="5230368"/>
-            <a:ext cx="10424160" cy="822960"/>
-          </a:xfrm>
-          <a:prstGeom prst="rect">
-            <a:avLst/>
-          </a:prstGeom>
-          <a:noFill/>
-          <a:ln/>
-        </p:spPr>
-        <p:txBody>
-          <a:bodyPr wrap="square" lIns="0" tIns="0" rIns="0" bIns="0" rtlCol="0" anchor="ctr"/>
-          <a:lstStyle/>
-          <a:p>
-            <a:pPr indent="0" marL="0">
-              <a:lnSpc>
-                <a:spcPts val="2000"/>
-              </a:lnSpc>
-              <a:buNone/>
-            </a:pPr>
-            <a:r>
-              <a:rPr lang="en-US" sz="1350" dirty="0">
-                <a:solidFill>
-                  <a:srgbClr val="1A2233"/>
-                </a:solidFill>
-                <a:latin typeface="맑은 고딕" pitchFamily="34" charset="0"/>
-                <a:ea typeface="맑은 고딕" pitchFamily="34" charset="-122"/>
-                <a:cs typeface="맑은 고딕" pitchFamily="34" charset="-120"/>
-              </a:rPr>
-              <a:t>레이다는 수평(El = 0°)으로 쐈고 안테나는 10 m 높이니 "표적 고도 10 m" 일 것 같습니다.</a:t>
-            </a:r>
-            <a:endParaRPr lang="en-US" sz="1350" dirty="0"/>
-          </a:p>
-          <a:p>
-            <a:pPr indent="0" marL="0">
-              <a:lnSpc>
-                <a:spcPts val="2000"/>
-              </a:lnSpc>
-              <a:buNone/>
-            </a:pPr>
-            <a:r>
-              <a:rPr lang="en-US" sz="1350" dirty="0">
-                <a:solidFill>
-                  <a:srgbClr val="1A2233"/>
-                </a:solidFill>
-                <a:latin typeface="맑은 고딕" pitchFamily="34" charset="0"/>
-                <a:ea typeface="맑은 고딕" pitchFamily="34" charset="-122"/>
-                <a:cs typeface="맑은 고딕" pitchFamily="34" charset="-120"/>
-              </a:rPr>
-              <a:t>그런데 빔은 직진하는데 바다 표면은 멀어질수록 아래로 휘어 내려갑니다. 20 km 지점에서 그 차이가 31.5 m,  10 + 31.5 = 41.5 m.</a:t>
-            </a:r>
-            <a:endParaRPr lang="en-US" sz="1350" dirty="0"/>
-          </a:p>
-        </p:txBody>
-      </p:sp>
-      <p:sp>
-        <p:nvSpPr>
-          <p:cNvPr id="21" name="Rectangle 20"/>
-          <p:cNvSpPr/>
-          <p:nvPr/>
-        </p:nvSpPr>
-        <p:spPr>
-          <a:xfrm>
-            <a:off x="457200" y="411480"/>
-            <a:ext cx="11277295" cy="777240"/>
-          </a:xfrm>
-          <a:prstGeom prst="rect">
-            <a:avLst/>
-          </a:prstGeom>
-          <a:solidFill>
-            <a:srgbClr val="13233F"/>
-          </a:solidFill>
-          <a:ln>
-            <a:noFill/>
-          </a:ln>
-          <a:effectLst/>
-        </p:spPr>
-        <p:style>
-          <a:lnRef idx="1">
-            <a:schemeClr val="accent1"/>
-          </a:lnRef>
-          <a:fillRef idx="3">
-            <a:schemeClr val="accent1"/>
-          </a:fillRef>
-          <a:effectRef idx="2">
-            <a:schemeClr val="accent1"/>
-          </a:effectRef>
-          <a:fontRef idx="minor">
-            <a:schemeClr val="lt1"/>
-          </a:fontRef>
-        </p:style>
-        <p:txBody>
-          <a:bodyPr rtlCol="0" anchor="ctr" wrap="none"/>
-          <a:lstStyle/>
-          <a:p>
-            <a:pPr algn="ctr"/>
-          </a:p>
-        </p:txBody>
-      </p:sp>
-      <p:sp>
-        <p:nvSpPr>
-          <p:cNvPr id="22" name="TextBox 21"/>
-          <p:cNvSpPr txBox="1"/>
-          <p:nvPr/>
-        </p:nvSpPr>
-        <p:spPr>
-          <a:xfrm>
-            <a:off x="640080" y="411480"/>
-            <a:ext cx="8732520" cy="777240"/>
-          </a:xfrm>
-          <a:prstGeom prst="rect">
-            <a:avLst/>
-          </a:prstGeom>
-          <a:noFill/>
-        </p:spPr>
-        <p:txBody>
-          <a:bodyPr wrap="square" anchor="ctr" lIns="0" rIns="0" tIns="0" bIns="0">
-            <a:spAutoFit/>
-          </a:bodyPr>
-          <a:lstStyle/>
-          <a:p>
-            <a:pPr algn="l">
-              <a:spcAft>
-                <a:spcPts val="300"/>
-              </a:spcAft>
-            </a:pPr>
-            <a:r>
-              <a:rPr sz="2000" b="1">
-                <a:solidFill>
-                  <a:srgbClr val="FFFFFF"/>
-                </a:solidFill>
-                <a:latin typeface="맑은 고딕"/>
-              </a:rPr>
-              <a:t>02. 단계별 변환  ④~⑤  로컬 → ECEF → 위경도</a:t>
-            </a:r>
-          </a:p>
-        </p:txBody>
-      </p:sp>
-      <p:cxnSp>
-        <p:nvCxnSpPr>
-          <p:cNvPr id="24" name="Connector 23"/>
-          <p:cNvCxnSpPr/>
-          <p:nvPr/>
-        </p:nvCxnSpPr>
-        <p:spPr>
-          <a:xfrm>
-            <a:off x="457200" y="6355080"/>
-            <a:ext cx="11277295" cy="0"/>
-          </a:xfrm>
-          <a:prstGeom prst="line">
-            <a:avLst/>
-          </a:prstGeom>
-          <a:ln w="9525">
-            <a:solidFill>
-              <a:srgbClr val="B9C0CC"/>
-            </a:solidFill>
-          </a:ln>
-        </p:spPr>
-        <p:style>
-          <a:lnRef idx="2">
-            <a:schemeClr val="accent1"/>
-          </a:lnRef>
-          <a:fillRef idx="0">
-            <a:schemeClr val="accent1"/>
-          </a:fillRef>
-          <a:effectRef idx="1">
-            <a:schemeClr val="accent1"/>
-          </a:effectRef>
-          <a:fontRef idx="minor">
-            <a:schemeClr val="tx1"/>
-          </a:fontRef>
-        </p:style>
-      </p:cxnSp>
-      <p:sp>
-        <p:nvSpPr>
-          <p:cNvPr id="26" name="TextBox 25"/>
-          <p:cNvSpPr txBox="1"/>
-          <p:nvPr/>
-        </p:nvSpPr>
-        <p:spPr>
-          <a:xfrm>
-            <a:off x="5669280" y="6400800"/>
-            <a:ext cx="914400" cy="274320"/>
-          </a:xfrm>
-          <a:prstGeom prst="rect">
-            <a:avLst/>
-          </a:prstGeom>
-          <a:noFill/>
-        </p:spPr>
-        <p:txBody>
-          <a:bodyPr wrap="none" lIns="0" rIns="0" tIns="0" bIns="0">
-            <a:spAutoFit/>
-          </a:bodyPr>
-          <a:lstStyle/>
-          <a:p>
-            <a:pPr algn="ctr"/>
-            <a:fld id="{1D0B0B0B-0000-4000-8000-00000000C0DE}" type="slidenum">
-              <a:rPr lang="ko-KR" altLang="en-US" sz="1000" b="0" dirty="0">
-                <a:solidFill>
-                  <a:srgbClr val="1A2233"/>
-                </a:solidFill>
-                <a:latin typeface="Arial"/>
-                <a:ea typeface="Arial"/>
-              </a:rPr>
-              <a:t>1</a:t>
-            </a:fld>
-          </a:p>
-        </p:txBody>
-      </p:sp>
-    </p:spTree>
-  </p:cSld>
-  <p:clrMapOvr>
-    <a:masterClrMapping/>
-  </p:clrMapOvr>
-</p:sld>
-</file>
-
-<file path=ppt/slides/slide21.xml><?xml version="1.0" encoding="utf-8"?>
-<p:sld xmlns:a="http://schemas.openxmlformats.org/drawingml/2006/main" xmlns:r="http://schemas.openxmlformats.org/officeDocument/2006/relationships" xmlns:p="http://schemas.openxmlformats.org/presentationml/2006/main">
   <p:cSld name="Slide 28">
     <p:bg>
       <p:bgPr>
@@ -20228,7 +18625,7 @@
 </p:sld>
 </file>
 
-<file path=ppt/slides/slide22.xml><?xml version="1.0" encoding="utf-8"?>
+<file path=ppt/slides/slide21.xml><?xml version="1.0" encoding="utf-8"?>
 <p:sld xmlns:a="http://schemas.openxmlformats.org/drawingml/2006/main" xmlns:p="http://schemas.openxmlformats.org/presentationml/2006/main" xmlns:r="http://schemas.openxmlformats.org/officeDocument/2006/relationships">
   <p:cSld>
     <p:bg>
@@ -20751,7 +19148,7 @@
 </p:sld>
 </file>
 
-<file path=ppt/slides/slide23.xml><?xml version="1.0" encoding="utf-8"?>
+<file path=ppt/slides/slide22.xml><?xml version="1.0" encoding="utf-8"?>
 <p:sld xmlns:a="http://schemas.openxmlformats.org/drawingml/2006/main" xmlns:r="http://schemas.openxmlformats.org/officeDocument/2006/relationships" xmlns:p="http://schemas.openxmlformats.org/presentationml/2006/main">
   <p:cSld name="Slide 30">
     <p:bg>
@@ -22172,7 +20569,7 @@
 </p:sld>
 </file>
 
-<file path=ppt/slides/slide24.xml><?xml version="1.0" encoding="utf-8"?>
+<file path=ppt/slides/slide23.xml><?xml version="1.0" encoding="utf-8"?>
 <p:sld xmlns:a="http://schemas.openxmlformats.org/drawingml/2006/main" xmlns:p="http://schemas.openxmlformats.org/presentationml/2006/main" xmlns:r="http://schemas.openxmlformats.org/officeDocument/2006/relationships">
   <p:cSld>
     <p:bg>
@@ -25833,7 +24230,7 @@
 </p:sld>
 </file>
 
-<file path=ppt/slides/slide25.xml><?xml version="1.0" encoding="utf-8"?>
+<file path=ppt/slides/slide24.xml><?xml version="1.0" encoding="utf-8"?>
 <p:sld xmlns:a="http://schemas.openxmlformats.org/drawingml/2006/main" xmlns:r="http://schemas.openxmlformats.org/officeDocument/2006/relationships" xmlns:p="http://schemas.openxmlformats.org/presentationml/2006/main">
   <p:cSld name="Slide 32">
     <p:bg>
@@ -27247,7 +25644,7 @@
 </p:sld>
 </file>
 
-<file path=ppt/slides/slide26.xml><?xml version="1.0" encoding="utf-8"?>
+<file path=ppt/slides/slide25.xml><?xml version="1.0" encoding="utf-8"?>
 <p:sld xmlns:a="http://schemas.openxmlformats.org/drawingml/2006/main" xmlns:r="http://schemas.openxmlformats.org/officeDocument/2006/relationships" xmlns:p="http://schemas.openxmlformats.org/presentationml/2006/main">
   <p:cSld name="Slide 33">
     <p:bg>
@@ -28220,7 +26617,7 @@
 </p:sld>
 </file>
 
-<file path=ppt/slides/slide27.xml><?xml version="1.0" encoding="utf-8"?>
+<file path=ppt/slides/slide26.xml><?xml version="1.0" encoding="utf-8"?>
 <p:sld xmlns:a="http://schemas.openxmlformats.org/drawingml/2006/main" xmlns:r="http://schemas.openxmlformats.org/officeDocument/2006/relationships" xmlns:p="http://schemas.openxmlformats.org/presentationml/2006/main">
   <p:cSld name="Slide 15">
     <p:bg>
@@ -30105,7 +28502,7 @@
 </p:sld>
 </file>
 
-<file path=ppt/slides/slide28.xml><?xml version="1.0" encoding="utf-8"?>
+<file path=ppt/slides/slide27.xml><?xml version="1.0" encoding="utf-8"?>
 <p:sld xmlns:a="http://schemas.openxmlformats.org/drawingml/2006/main" xmlns:r="http://schemas.openxmlformats.org/officeDocument/2006/relationships" xmlns:p="http://schemas.openxmlformats.org/presentationml/2006/main">
   <p:cSld name="Slide 20">
     <p:bg>
@@ -33091,6 +31488,1277 @@
 </p:sld>
 </file>
 
+<file path=ppt/slides/slide28.xml><?xml version="1.0" encoding="utf-8"?>
+<p:sld xmlns:a="http://schemas.openxmlformats.org/drawingml/2006/main" xmlns:r="http://schemas.openxmlformats.org/officeDocument/2006/relationships" xmlns:p="http://schemas.openxmlformats.org/presentationml/2006/main">
+  <p:cSld name="Slide 12">
+    <p:bg>
+      <p:bgPr>
+        <a:solidFill>
+          <a:srgbClr val="E8EDF5"/>
+        </a:solidFill>
+        <a:effectLst/>
+      </p:bgPr>
+    </p:bg>
+    <p:spTree>
+      <p:nvGrpSpPr>
+        <p:cNvPr id="1" name=""/>
+        <p:cNvGrpSpPr/>
+        <p:nvPr/>
+      </p:nvGrpSpPr>
+      <p:grpSpPr>
+        <a:xfrm>
+          <a:off x="0" y="0"/>
+          <a:ext cx="0" cy="0"/>
+          <a:chOff x="0" y="0"/>
+          <a:chExt cx="0" cy="0"/>
+        </a:xfrm>
+      </p:grpSpPr>
+      <p:sp>
+        <p:nvSpPr>
+          <p:cNvPr id="30" name="Rectangle 29"/>
+          <p:cNvSpPr/>
+          <p:nvPr/>
+        </p:nvSpPr>
+        <p:spPr>
+          <a:xfrm>
+            <a:off x="457200" y="1243584"/>
+            <a:ext cx="11277295" cy="5047488"/>
+          </a:xfrm>
+          <a:prstGeom prst="rect">
+            <a:avLst/>
+          </a:prstGeom>
+          <a:solidFill>
+            <a:srgbClr val="FFFFFF"/>
+          </a:solidFill>
+          <a:ln>
+            <a:noFill/>
+          </a:ln>
+          <a:effectLst/>
+        </p:spPr>
+        <p:style>
+          <a:lnRef idx="1">
+            <a:schemeClr val="accent1"/>
+          </a:lnRef>
+          <a:fillRef idx="3">
+            <a:schemeClr val="accent1"/>
+          </a:fillRef>
+          <a:effectRef idx="2">
+            <a:schemeClr val="accent1"/>
+          </a:effectRef>
+          <a:fontRef idx="minor">
+            <a:schemeClr val="lt1"/>
+          </a:fontRef>
+        </p:style>
+        <p:txBody>
+          <a:bodyPr rtlCol="0" anchor="ctr" wrap="none"/>
+          <a:lstStyle/>
+          <a:p>
+            <a:pPr algn="ctr"/>
+          </a:p>
+        </p:txBody>
+      </p:sp>
+      <p:sp>
+        <p:nvSpPr>
+          <p:cNvPr id="4" name="Shape 2"/>
+          <p:cNvSpPr/>
+          <p:nvPr/>
+        </p:nvSpPr>
+        <p:spPr>
+          <a:xfrm>
+            <a:off x="2112264" y="1371600"/>
+            <a:ext cx="1170432" cy="300903"/>
+          </a:xfrm>
+          <a:prstGeom prst="roundRect">
+            <a:avLst>
+              <a:gd name="adj" fmla="val 47222"/>
+            </a:avLst>
+          </a:prstGeom>
+          <a:solidFill>
+            <a:srgbClr val="EEF1F7"/>
+          </a:solidFill>
+          <a:ln w="12700">
+            <a:solidFill>
+              <a:srgbClr val="C9D6EC"/>
+            </a:solidFill>
+            <a:prstDash val="solid"/>
+          </a:ln>
+        </p:spPr>
+        <p:txBody>
+          <a:bodyPr/>
+          <a:p/>
+        </p:txBody>
+      </p:sp>
+      <p:sp>
+        <p:nvSpPr>
+          <p:cNvPr id="5" name="Text 3"/>
+          <p:cNvSpPr txBox="1"/>
+          <p:nvPr/>
+        </p:nvSpPr>
+        <p:spPr>
+          <a:xfrm>
+            <a:off x="2112264" y="1371600"/>
+            <a:ext cx="1170432" cy="300903"/>
+          </a:xfrm>
+          <a:prstGeom prst="rect">
+            <a:avLst/>
+          </a:prstGeom>
+          <a:noFill/>
+          <a:ln/>
+        </p:spPr>
+        <p:txBody>
+          <a:bodyPr wrap="square" lIns="0" tIns="0" rIns="0" bIns="0" rtlCol="0" anchor="ctr"/>
+          <a:lstStyle/>
+          <a:p>
+            <a:pPr algn="ctr" indent="0" marL="0">
+              <a:buNone/>
+            </a:pPr>
+            <a:r>
+              <a:rPr lang="en-US" sz="1010" dirty="0">
+                <a:solidFill>
+                  <a:srgbClr val="5A6478"/>
+                </a:solidFill>
+                <a:latin typeface="맑은 고딕" pitchFamily="34" charset="0"/>
+                <a:ea typeface="맑은 고딕" pitchFamily="34" charset="-122"/>
+                <a:cs typeface="맑은 고딕" pitchFamily="34" charset="-120"/>
+              </a:rPr>
+              <a:t>측정</a:t>
+            </a:r>
+            <a:endParaRPr lang="en-US" sz="1100" dirty="0"/>
+          </a:p>
+        </p:txBody>
+      </p:sp>
+      <p:sp>
+        <p:nvSpPr>
+          <p:cNvPr id="6" name="Text 4"/>
+          <p:cNvSpPr txBox="1"/>
+          <p:nvPr/>
+        </p:nvSpPr>
+        <p:spPr>
+          <a:xfrm>
+            <a:off x="3282696" y="1371600"/>
+            <a:ext cx="182880" cy="300903"/>
+          </a:xfrm>
+          <a:prstGeom prst="rect">
+            <a:avLst/>
+          </a:prstGeom>
+          <a:noFill/>
+          <a:ln/>
+        </p:spPr>
+        <p:txBody>
+          <a:bodyPr wrap="square" lIns="0" tIns="0" rIns="0" bIns="0" rtlCol="0" anchor="ctr"/>
+          <a:lstStyle/>
+          <a:p>
+            <a:pPr algn="ctr" indent="0" marL="0">
+              <a:buNone/>
+            </a:pPr>
+            <a:r>
+              <a:rPr lang="en-US" sz="910" dirty="0">
+                <a:solidFill>
+                  <a:srgbClr val="C9D6EC"/>
+                </a:solidFill>
+              </a:rPr>
+              <a:t>▸</a:t>
+            </a:r>
+            <a:endParaRPr lang="en-US" sz="1000" dirty="0"/>
+          </a:p>
+        </p:txBody>
+      </p:sp>
+      <p:sp>
+        <p:nvSpPr>
+          <p:cNvPr id="7" name="Shape 5"/>
+          <p:cNvSpPr/>
+          <p:nvPr/>
+        </p:nvSpPr>
+        <p:spPr>
+          <a:xfrm>
+            <a:off x="3465576" y="1371600"/>
+            <a:ext cx="1170432" cy="300903"/>
+          </a:xfrm>
+          <a:prstGeom prst="roundRect">
+            <a:avLst>
+              <a:gd name="adj" fmla="val 47222"/>
+            </a:avLst>
+          </a:prstGeom>
+          <a:solidFill>
+            <a:srgbClr val="C2521C"/>
+          </a:solidFill>
+          <a:ln w="12700">
+            <a:solidFill>
+              <a:srgbClr val="C2521C"/>
+            </a:solidFill>
+            <a:prstDash val="solid"/>
+          </a:ln>
+        </p:spPr>
+        <p:txBody>
+          <a:bodyPr/>
+          <a:p/>
+        </p:txBody>
+      </p:sp>
+      <p:sp>
+        <p:nvSpPr>
+          <p:cNvPr id="8" name="Text 6"/>
+          <p:cNvSpPr txBox="1"/>
+          <p:nvPr/>
+        </p:nvSpPr>
+        <p:spPr>
+          <a:xfrm>
+            <a:off x="3465576" y="1371600"/>
+            <a:ext cx="1170432" cy="300903"/>
+          </a:xfrm>
+          <a:prstGeom prst="rect">
+            <a:avLst/>
+          </a:prstGeom>
+          <a:noFill/>
+          <a:ln/>
+        </p:spPr>
+        <p:txBody>
+          <a:bodyPr wrap="square" lIns="0" tIns="0" rIns="0" bIns="0" rtlCol="0" anchor="ctr"/>
+          <a:lstStyle/>
+          <a:p>
+            <a:pPr algn="ctr" indent="0" marL="0">
+              <a:buNone/>
+            </a:pPr>
+            <a:r>
+              <a:rPr lang="en-US" sz="1010" b="1" dirty="0">
+                <a:solidFill>
+                  <a:srgbClr val="FFFFFF"/>
+                </a:solidFill>
+                <a:latin typeface="맑은 고딕" pitchFamily="34" charset="0"/>
+                <a:ea typeface="맑은 고딕" pitchFamily="34" charset="-122"/>
+                <a:cs typeface="맑은 고딕" pitchFamily="34" charset="-120"/>
+              </a:rPr>
+              <a:t>안테나</a:t>
+            </a:r>
+            <a:endParaRPr lang="en-US" sz="1100" dirty="0"/>
+          </a:p>
+        </p:txBody>
+      </p:sp>
+      <p:sp>
+        <p:nvSpPr>
+          <p:cNvPr id="9" name="Text 7"/>
+          <p:cNvSpPr txBox="1"/>
+          <p:nvPr/>
+        </p:nvSpPr>
+        <p:spPr>
+          <a:xfrm>
+            <a:off x="4636008" y="1371600"/>
+            <a:ext cx="182880" cy="300903"/>
+          </a:xfrm>
+          <a:prstGeom prst="rect">
+            <a:avLst/>
+          </a:prstGeom>
+          <a:noFill/>
+          <a:ln/>
+        </p:spPr>
+        <p:txBody>
+          <a:bodyPr wrap="square" lIns="0" tIns="0" rIns="0" bIns="0" rtlCol="0" anchor="ctr"/>
+          <a:lstStyle/>
+          <a:p>
+            <a:pPr algn="ctr" indent="0" marL="0">
+              <a:buNone/>
+            </a:pPr>
+            <a:r>
+              <a:rPr lang="en-US" sz="910" dirty="0">
+                <a:solidFill>
+                  <a:srgbClr val="C9D6EC"/>
+                </a:solidFill>
+              </a:rPr>
+              <a:t>▸</a:t>
+            </a:r>
+            <a:endParaRPr lang="en-US" sz="1000" dirty="0"/>
+          </a:p>
+        </p:txBody>
+      </p:sp>
+      <p:sp>
+        <p:nvSpPr>
+          <p:cNvPr id="10" name="Shape 8"/>
+          <p:cNvSpPr/>
+          <p:nvPr/>
+        </p:nvSpPr>
+        <p:spPr>
+          <a:xfrm>
+            <a:off x="4818888" y="1371600"/>
+            <a:ext cx="1170432" cy="300903"/>
+          </a:xfrm>
+          <a:prstGeom prst="roundRect">
+            <a:avLst>
+              <a:gd name="adj" fmla="val 47222"/>
+            </a:avLst>
+          </a:prstGeom>
+          <a:solidFill>
+            <a:srgbClr val="EEF1F7"/>
+          </a:solidFill>
+          <a:ln w="12700">
+            <a:solidFill>
+              <a:srgbClr val="C9D6EC"/>
+            </a:solidFill>
+            <a:prstDash val="solid"/>
+          </a:ln>
+        </p:spPr>
+        <p:txBody>
+          <a:bodyPr/>
+          <a:p/>
+        </p:txBody>
+      </p:sp>
+      <p:sp>
+        <p:nvSpPr>
+          <p:cNvPr id="11" name="Text 9"/>
+          <p:cNvSpPr txBox="1"/>
+          <p:nvPr/>
+        </p:nvSpPr>
+        <p:spPr>
+          <a:xfrm>
+            <a:off x="4818888" y="1371600"/>
+            <a:ext cx="1170432" cy="300903"/>
+          </a:xfrm>
+          <a:prstGeom prst="rect">
+            <a:avLst/>
+          </a:prstGeom>
+          <a:noFill/>
+          <a:ln/>
+        </p:spPr>
+        <p:txBody>
+          <a:bodyPr wrap="square" lIns="0" tIns="0" rIns="0" bIns="0" rtlCol="0" anchor="ctr"/>
+          <a:lstStyle/>
+          <a:p>
+            <a:pPr algn="ctr" indent="0" marL="0">
+              <a:buNone/>
+            </a:pPr>
+            <a:r>
+              <a:rPr lang="en-US" sz="1010" dirty="0">
+                <a:solidFill>
+                  <a:srgbClr val="5A6478"/>
+                </a:solidFill>
+                <a:latin typeface="맑은 고딕" pitchFamily="34" charset="0"/>
+                <a:ea typeface="맑은 고딕" pitchFamily="34" charset="-122"/>
+                <a:cs typeface="맑은 고딕" pitchFamily="34" charset="-120"/>
+              </a:rPr>
+              <a:t>동체</a:t>
+            </a:r>
+            <a:endParaRPr lang="en-US" sz="1100" dirty="0"/>
+          </a:p>
+        </p:txBody>
+      </p:sp>
+      <p:sp>
+        <p:nvSpPr>
+          <p:cNvPr id="12" name="Text 10"/>
+          <p:cNvSpPr txBox="1"/>
+          <p:nvPr/>
+        </p:nvSpPr>
+        <p:spPr>
+          <a:xfrm>
+            <a:off x="5989320" y="1371600"/>
+            <a:ext cx="182880" cy="300903"/>
+          </a:xfrm>
+          <a:prstGeom prst="rect">
+            <a:avLst/>
+          </a:prstGeom>
+          <a:noFill/>
+          <a:ln/>
+        </p:spPr>
+        <p:txBody>
+          <a:bodyPr wrap="square" lIns="0" tIns="0" rIns="0" bIns="0" rtlCol="0" anchor="ctr"/>
+          <a:lstStyle/>
+          <a:p>
+            <a:pPr algn="ctr" indent="0" marL="0">
+              <a:buNone/>
+            </a:pPr>
+            <a:r>
+              <a:rPr lang="en-US" sz="910" dirty="0">
+                <a:solidFill>
+                  <a:srgbClr val="C9D6EC"/>
+                </a:solidFill>
+              </a:rPr>
+              <a:t>▸</a:t>
+            </a:r>
+            <a:endParaRPr lang="en-US" sz="1000" dirty="0"/>
+          </a:p>
+        </p:txBody>
+      </p:sp>
+      <p:sp>
+        <p:nvSpPr>
+          <p:cNvPr id="13" name="Shape 11"/>
+          <p:cNvSpPr/>
+          <p:nvPr/>
+        </p:nvSpPr>
+        <p:spPr>
+          <a:xfrm>
+            <a:off x="6172200" y="1371600"/>
+            <a:ext cx="1170432" cy="300903"/>
+          </a:xfrm>
+          <a:prstGeom prst="roundRect">
+            <a:avLst>
+              <a:gd name="adj" fmla="val 47222"/>
+            </a:avLst>
+          </a:prstGeom>
+          <a:solidFill>
+            <a:srgbClr val="EEF1F7"/>
+          </a:solidFill>
+          <a:ln w="12700">
+            <a:solidFill>
+              <a:srgbClr val="C9D6EC"/>
+            </a:solidFill>
+            <a:prstDash val="solid"/>
+          </a:ln>
+        </p:spPr>
+        <p:txBody>
+          <a:bodyPr/>
+          <a:p/>
+        </p:txBody>
+      </p:sp>
+      <p:sp>
+        <p:nvSpPr>
+          <p:cNvPr id="14" name="Text 12"/>
+          <p:cNvSpPr txBox="1"/>
+          <p:nvPr/>
+        </p:nvSpPr>
+        <p:spPr>
+          <a:xfrm>
+            <a:off x="6172200" y="1371600"/>
+            <a:ext cx="1170432" cy="300903"/>
+          </a:xfrm>
+          <a:prstGeom prst="rect">
+            <a:avLst/>
+          </a:prstGeom>
+          <a:noFill/>
+          <a:ln/>
+        </p:spPr>
+        <p:txBody>
+          <a:bodyPr wrap="square" lIns="0" tIns="0" rIns="0" bIns="0" rtlCol="0" anchor="ctr"/>
+          <a:lstStyle/>
+          <a:p>
+            <a:pPr algn="ctr" indent="0" marL="0">
+              <a:buNone/>
+            </a:pPr>
+            <a:r>
+              <a:rPr lang="en-US" sz="1010" dirty="0">
+                <a:solidFill>
+                  <a:srgbClr val="5A6478"/>
+                </a:solidFill>
+                <a:latin typeface="맑은 고딕" pitchFamily="34" charset="0"/>
+                <a:ea typeface="맑은 고딕" pitchFamily="34" charset="-122"/>
+                <a:cs typeface="맑은 고딕" pitchFamily="34" charset="-120"/>
+              </a:rPr>
+              <a:t>NED</a:t>
+            </a:r>
+            <a:endParaRPr lang="en-US" sz="1100" dirty="0"/>
+          </a:p>
+        </p:txBody>
+      </p:sp>
+      <p:sp>
+        <p:nvSpPr>
+          <p:cNvPr id="15" name="Text 13"/>
+          <p:cNvSpPr txBox="1"/>
+          <p:nvPr/>
+        </p:nvSpPr>
+        <p:spPr>
+          <a:xfrm>
+            <a:off x="7342632" y="1371600"/>
+            <a:ext cx="182880" cy="300903"/>
+          </a:xfrm>
+          <a:prstGeom prst="rect">
+            <a:avLst/>
+          </a:prstGeom>
+          <a:noFill/>
+          <a:ln/>
+        </p:spPr>
+        <p:txBody>
+          <a:bodyPr wrap="square" lIns="0" tIns="0" rIns="0" bIns="0" rtlCol="0" anchor="ctr"/>
+          <a:lstStyle/>
+          <a:p>
+            <a:pPr algn="ctr" indent="0" marL="0">
+              <a:buNone/>
+            </a:pPr>
+            <a:r>
+              <a:rPr lang="en-US" sz="910" dirty="0">
+                <a:solidFill>
+                  <a:srgbClr val="C9D6EC"/>
+                </a:solidFill>
+              </a:rPr>
+              <a:t>▸</a:t>
+            </a:r>
+            <a:endParaRPr lang="en-US" sz="1000" dirty="0"/>
+          </a:p>
+        </p:txBody>
+      </p:sp>
+      <p:sp>
+        <p:nvSpPr>
+          <p:cNvPr id="16" name="Shape 14"/>
+          <p:cNvSpPr/>
+          <p:nvPr/>
+        </p:nvSpPr>
+        <p:spPr>
+          <a:xfrm>
+            <a:off x="7525512" y="1371600"/>
+            <a:ext cx="1170432" cy="300903"/>
+          </a:xfrm>
+          <a:prstGeom prst="roundRect">
+            <a:avLst>
+              <a:gd name="adj" fmla="val 47222"/>
+            </a:avLst>
+          </a:prstGeom>
+          <a:solidFill>
+            <a:srgbClr val="EEF1F7"/>
+          </a:solidFill>
+          <a:ln w="12700">
+            <a:solidFill>
+              <a:srgbClr val="C9D6EC"/>
+            </a:solidFill>
+            <a:prstDash val="solid"/>
+          </a:ln>
+        </p:spPr>
+        <p:txBody>
+          <a:bodyPr/>
+          <a:p/>
+        </p:txBody>
+      </p:sp>
+      <p:sp>
+        <p:nvSpPr>
+          <p:cNvPr id="17" name="Text 15"/>
+          <p:cNvSpPr txBox="1"/>
+          <p:nvPr/>
+        </p:nvSpPr>
+        <p:spPr>
+          <a:xfrm>
+            <a:off x="7525512" y="1371600"/>
+            <a:ext cx="1170432" cy="300903"/>
+          </a:xfrm>
+          <a:prstGeom prst="rect">
+            <a:avLst/>
+          </a:prstGeom>
+          <a:noFill/>
+          <a:ln/>
+        </p:spPr>
+        <p:txBody>
+          <a:bodyPr wrap="square" lIns="0" tIns="0" rIns="0" bIns="0" rtlCol="0" anchor="ctr"/>
+          <a:lstStyle/>
+          <a:p>
+            <a:pPr algn="ctr" indent="0" marL="0">
+              <a:buNone/>
+            </a:pPr>
+            <a:r>
+              <a:rPr lang="en-US" sz="1010" dirty="0">
+                <a:solidFill>
+                  <a:srgbClr val="5A6478"/>
+                </a:solidFill>
+                <a:latin typeface="맑은 고딕" pitchFamily="34" charset="0"/>
+                <a:ea typeface="맑은 고딕" pitchFamily="34" charset="-122"/>
+                <a:cs typeface="맑은 고딕" pitchFamily="34" charset="-120"/>
+              </a:rPr>
+              <a:t>ECEF</a:t>
+            </a:r>
+            <a:endParaRPr lang="en-US" sz="1100" dirty="0"/>
+          </a:p>
+        </p:txBody>
+      </p:sp>
+      <p:sp>
+        <p:nvSpPr>
+          <p:cNvPr id="18" name="Text 16"/>
+          <p:cNvSpPr txBox="1"/>
+          <p:nvPr/>
+        </p:nvSpPr>
+        <p:spPr>
+          <a:xfrm>
+            <a:off x="8695944" y="1371600"/>
+            <a:ext cx="182880" cy="300903"/>
+          </a:xfrm>
+          <a:prstGeom prst="rect">
+            <a:avLst/>
+          </a:prstGeom>
+          <a:noFill/>
+          <a:ln/>
+        </p:spPr>
+        <p:txBody>
+          <a:bodyPr wrap="square" lIns="0" tIns="0" rIns="0" bIns="0" rtlCol="0" anchor="ctr"/>
+          <a:lstStyle/>
+          <a:p>
+            <a:pPr algn="ctr" indent="0" marL="0">
+              <a:buNone/>
+            </a:pPr>
+            <a:r>
+              <a:rPr lang="en-US" sz="910" dirty="0">
+                <a:solidFill>
+                  <a:srgbClr val="C9D6EC"/>
+                </a:solidFill>
+              </a:rPr>
+              <a:t>▸</a:t>
+            </a:r>
+            <a:endParaRPr lang="en-US" sz="1000" dirty="0"/>
+          </a:p>
+        </p:txBody>
+      </p:sp>
+      <p:sp>
+        <p:nvSpPr>
+          <p:cNvPr id="19" name="Shape 17"/>
+          <p:cNvSpPr/>
+          <p:nvPr/>
+        </p:nvSpPr>
+        <p:spPr>
+          <a:xfrm>
+            <a:off x="8878824" y="1371600"/>
+            <a:ext cx="1170432" cy="300903"/>
+          </a:xfrm>
+          <a:prstGeom prst="roundRect">
+            <a:avLst>
+              <a:gd name="adj" fmla="val 47222"/>
+            </a:avLst>
+          </a:prstGeom>
+          <a:solidFill>
+            <a:srgbClr val="EEF1F7"/>
+          </a:solidFill>
+          <a:ln w="12700">
+            <a:solidFill>
+              <a:srgbClr val="C9D6EC"/>
+            </a:solidFill>
+            <a:prstDash val="solid"/>
+          </a:ln>
+        </p:spPr>
+        <p:txBody>
+          <a:bodyPr/>
+          <a:p/>
+        </p:txBody>
+      </p:sp>
+      <p:sp>
+        <p:nvSpPr>
+          <p:cNvPr id="20" name="Text 18"/>
+          <p:cNvSpPr txBox="1"/>
+          <p:nvPr/>
+        </p:nvSpPr>
+        <p:spPr>
+          <a:xfrm>
+            <a:off x="8878824" y="1371600"/>
+            <a:ext cx="1170432" cy="300903"/>
+          </a:xfrm>
+          <a:prstGeom prst="rect">
+            <a:avLst/>
+          </a:prstGeom>
+          <a:noFill/>
+          <a:ln/>
+        </p:spPr>
+        <p:txBody>
+          <a:bodyPr wrap="square" lIns="0" tIns="0" rIns="0" bIns="0" rtlCol="0" anchor="ctr"/>
+          <a:lstStyle/>
+          <a:p>
+            <a:pPr algn="ctr" indent="0" marL="0">
+              <a:buNone/>
+            </a:pPr>
+            <a:r>
+              <a:rPr lang="en-US" sz="1010" dirty="0">
+                <a:solidFill>
+                  <a:srgbClr val="5A6478"/>
+                </a:solidFill>
+                <a:latin typeface="맑은 고딕" pitchFamily="34" charset="0"/>
+                <a:ea typeface="맑은 고딕" pitchFamily="34" charset="-122"/>
+                <a:cs typeface="맑은 고딕" pitchFamily="34" charset="-120"/>
+              </a:rPr>
+              <a:t>LLA</a:t>
+            </a:r>
+            <a:endParaRPr lang="en-US" sz="1100" dirty="0"/>
+          </a:p>
+        </p:txBody>
+      </p:sp>
+      <p:pic>
+        <p:nvPicPr>
+          <p:cNvPr id="29" name="Picture 28" descr="fig03_uv.png"/>
+          <p:cNvPicPr>
+            <a:picLocks noChangeAspect="1"/>
+          </p:cNvPicPr>
+          <p:nvPr/>
+        </p:nvPicPr>
+        <p:blipFill>
+          <a:blip r:embed="rId4"/>
+          <a:stretch>
+            <a:fillRect/>
+          </a:stretch>
+        </p:blipFill>
+        <p:spPr>
+          <a:xfrm>
+            <a:off x="1059020" y="1806238"/>
+            <a:ext cx="6239576" cy="3578580"/>
+          </a:xfrm>
+          <a:prstGeom prst="rect">
+            <a:avLst/>
+          </a:prstGeom>
+        </p:spPr>
+      </p:pic>
+      <p:sp>
+        <p:nvSpPr>
+          <p:cNvPr id="22" name="Shape 19"/>
+          <p:cNvSpPr/>
+          <p:nvPr/>
+        </p:nvSpPr>
+        <p:spPr>
+          <a:xfrm>
+            <a:off x="7973568" y="1822955"/>
+            <a:ext cx="3657600" cy="3560692"/>
+          </a:xfrm>
+          <a:prstGeom prst="roundRect">
+            <a:avLst>
+              <a:gd name="adj" fmla="val 2000"/>
+            </a:avLst>
+          </a:prstGeom>
+          <a:solidFill>
+            <a:srgbClr val="EEF1F7"/>
+          </a:solidFill>
+          <a:ln w="12700">
+            <a:solidFill>
+              <a:srgbClr val="FFFFFF"/>
+            </a:solidFill>
+            <a:prstDash val="solid"/>
+          </a:ln>
+        </p:spPr>
+        <p:txBody>
+          <a:bodyPr/>
+          <a:p/>
+        </p:txBody>
+      </p:sp>
+      <p:sp>
+        <p:nvSpPr>
+          <p:cNvPr id="23" name="Text 20"/>
+          <p:cNvSpPr txBox="1"/>
+          <p:nvPr/>
+        </p:nvSpPr>
+        <p:spPr>
+          <a:xfrm>
+            <a:off x="8229600" y="2056991"/>
+            <a:ext cx="3200400" cy="334337"/>
+          </a:xfrm>
+          <a:prstGeom prst="rect">
+            <a:avLst/>
+          </a:prstGeom>
+          <a:noFill/>
+          <a:ln/>
+        </p:spPr>
+        <p:txBody>
+          <a:bodyPr wrap="square" lIns="0" tIns="0" rIns="0" bIns="0" rtlCol="0" anchor="ctr"/>
+          <a:lstStyle/>
+          <a:p>
+            <a:pPr indent="0" marL="0">
+              <a:buNone/>
+            </a:pPr>
+            <a:r>
+              <a:rPr lang="en-US" sz="1460" b="1" dirty="0">
+                <a:solidFill>
+                  <a:srgbClr val="2B57A6"/>
+                </a:solidFill>
+                <a:latin typeface="맑은 고딕" pitchFamily="34" charset="0"/>
+                <a:ea typeface="맑은 고딕" pitchFamily="34" charset="-122"/>
+                <a:cs typeface="맑은 고딕" pitchFamily="34" charset="-120"/>
+              </a:rPr>
+              <a:t>왜 UV 를 쓰나</a:t>
+            </a:r>
+            <a:endParaRPr lang="en-US" sz="1600" dirty="0"/>
+          </a:p>
+        </p:txBody>
+      </p:sp>
+      <p:sp>
+        <p:nvSpPr>
+          <p:cNvPr id="24" name="Text 21"/>
+          <p:cNvSpPr txBox="1"/>
+          <p:nvPr/>
+        </p:nvSpPr>
+        <p:spPr>
+          <a:xfrm>
+            <a:off x="8229600" y="2441479"/>
+            <a:ext cx="3200400" cy="835843"/>
+          </a:xfrm>
+          <a:prstGeom prst="rect">
+            <a:avLst/>
+          </a:prstGeom>
+          <a:noFill/>
+          <a:ln/>
+        </p:spPr>
+        <p:txBody>
+          <a:bodyPr wrap="square" lIns="0" tIns="0" rIns="0" bIns="0" rtlCol="0" anchor="ctr"/>
+          <a:lstStyle/>
+          <a:p>
+            <a:pPr indent="0" marL="0">
+              <a:lnSpc>
+                <a:spcPts val="1645"/>
+              </a:lnSpc>
+              <a:buNone/>
+            </a:pPr>
+            <a:r>
+              <a:rPr lang="en-US" sz="1140" dirty="0">
+                <a:solidFill>
+                  <a:srgbClr val="1A2233"/>
+                </a:solidFill>
+                <a:latin typeface="맑은 고딕" pitchFamily="34" charset="0"/>
+                <a:ea typeface="맑은 고딕" pitchFamily="34" charset="-122"/>
+                <a:cs typeface="맑은 고딕" pitchFamily="34" charset="-120"/>
+              </a:rPr>
+              <a:t>현대 레이다는 대부분 위상배열이다.</a:t>
+            </a:r>
+            <a:endParaRPr lang="en-US" sz="1250" dirty="0"/>
+          </a:p>
+          <a:p>
+            <a:pPr indent="0" marL="0">
+              <a:lnSpc>
+                <a:spcPts val="1645"/>
+              </a:lnSpc>
+              <a:buNone/>
+            </a:pPr>
+            <a:r>
+              <a:rPr lang="en-US" sz="1140" dirty="0">
+                <a:solidFill>
+                  <a:srgbClr val="1A2233"/>
+                </a:solidFill>
+                <a:latin typeface="맑은 고딕" pitchFamily="34" charset="0"/>
+                <a:ea typeface="맑은 고딕" pitchFamily="34" charset="-122"/>
+                <a:cs typeface="맑은 고딕" pitchFamily="34" charset="-120"/>
+              </a:rPr>
+              <a:t>수백~수천 개 소자에 위상차를 줘서</a:t>
+            </a:r>
+            <a:endParaRPr lang="en-US" sz="1250" dirty="0"/>
+          </a:p>
+          <a:p>
+            <a:pPr indent="0" marL="0">
+              <a:lnSpc>
+                <a:spcPts val="1645"/>
+              </a:lnSpc>
+              <a:buNone/>
+            </a:pPr>
+            <a:r>
+              <a:rPr lang="en-US" sz="1140" dirty="0">
+                <a:solidFill>
+                  <a:srgbClr val="1A2233"/>
+                </a:solidFill>
+                <a:latin typeface="맑은 고딕" pitchFamily="34" charset="0"/>
+                <a:ea typeface="맑은 고딕" pitchFamily="34" charset="-122"/>
+                <a:cs typeface="맑은 고딕" pitchFamily="34" charset="-120"/>
+              </a:rPr>
+              <a:t>빔 방향을 전자적으로 바꾼다.</a:t>
+            </a:r>
+            <a:endParaRPr lang="en-US" sz="1250" dirty="0"/>
+          </a:p>
+        </p:txBody>
+      </p:sp>
+      <p:sp>
+        <p:nvSpPr>
+          <p:cNvPr id="25" name="Shape 22"/>
+          <p:cNvSpPr/>
+          <p:nvPr/>
+        </p:nvSpPr>
+        <p:spPr>
+          <a:xfrm>
+            <a:off x="8229600" y="3594943"/>
+            <a:ext cx="3200400" cy="585090"/>
+          </a:xfrm>
+          <a:prstGeom prst="roundRect">
+            <a:avLst>
+              <a:gd name="adj" fmla="val 11429"/>
+            </a:avLst>
+          </a:prstGeom>
+          <a:solidFill>
+            <a:srgbClr val="FFFFFF"/>
+          </a:solidFill>
+          <a:ln w="12700">
+            <a:solidFill>
+              <a:srgbClr val="FFFFFF"/>
+            </a:solidFill>
+            <a:prstDash val="solid"/>
+          </a:ln>
+        </p:spPr>
+        <p:txBody>
+          <a:bodyPr/>
+          <a:p/>
+        </p:txBody>
+      </p:sp>
+      <p:sp>
+        <p:nvSpPr>
+          <p:cNvPr id="26" name="Text 23"/>
+          <p:cNvSpPr txBox="1"/>
+          <p:nvPr/>
+        </p:nvSpPr>
+        <p:spPr>
+          <a:xfrm>
+            <a:off x="8229600" y="3594943"/>
+            <a:ext cx="3200400" cy="585090"/>
+          </a:xfrm>
+          <a:prstGeom prst="rect">
+            <a:avLst/>
+          </a:prstGeom>
+          <a:noFill/>
+          <a:ln/>
+        </p:spPr>
+        <p:txBody>
+          <a:bodyPr wrap="square" lIns="0" tIns="0" rIns="0" bIns="0" rtlCol="0" anchor="ctr"/>
+          <a:lstStyle/>
+          <a:p>
+            <a:pPr algn="ctr" indent="0" marL="0">
+              <a:buNone/>
+            </a:pPr>
+            <a:r>
+              <a:rPr lang="en-US" sz="1100" b="1" dirty="0">
+                <a:solidFill>
+                  <a:srgbClr val="C2521C"/>
+                </a:solidFill>
+                <a:latin typeface="Consolas" pitchFamily="34" charset="0"/>
+                <a:ea typeface="Consolas" pitchFamily="34" charset="-122"/>
+                <a:cs typeface="Consolas" pitchFamily="34" charset="-120"/>
+              </a:rPr>
+              <a:t>ψ = −k(m·d·u₀ + n·d·v₀)</a:t>
+            </a:r>
+            <a:endParaRPr lang="en-US" sz="1200" dirty="0"/>
+          </a:p>
+        </p:txBody>
+      </p:sp>
+      <p:sp>
+        <p:nvSpPr>
+          <p:cNvPr id="27" name="Text 24"/>
+          <p:cNvSpPr txBox="1"/>
+          <p:nvPr/>
+        </p:nvSpPr>
+        <p:spPr>
+          <a:xfrm>
+            <a:off x="8229600" y="4305409"/>
+            <a:ext cx="3200400" cy="1044804"/>
+          </a:xfrm>
+          <a:prstGeom prst="rect">
+            <a:avLst/>
+          </a:prstGeom>
+          <a:noFill/>
+          <a:ln/>
+        </p:spPr>
+        <p:txBody>
+          <a:bodyPr wrap="square" lIns="0" tIns="0" rIns="0" bIns="0" rtlCol="0" anchor="ctr"/>
+          <a:lstStyle/>
+          <a:p>
+            <a:pPr indent="0" marL="0">
+              <a:lnSpc>
+                <a:spcPts val="1553"/>
+              </a:lnSpc>
+              <a:buNone/>
+            </a:pPr>
+            <a:r>
+              <a:rPr lang="en-US" sz="1100" i="1" dirty="0">
+                <a:solidFill>
+                  <a:srgbClr val="5A6478"/>
+                </a:solidFill>
+                <a:latin typeface="맑은 고딕" pitchFamily="34" charset="0"/>
+                <a:ea typeface="맑은 고딕" pitchFamily="34" charset="-122"/>
+                <a:cs typeface="맑은 고딕" pitchFamily="34" charset="-120"/>
+              </a:rPr>
+              <a:t>소자 번호에 u, v 를 곱하기만 하면 된다.</a:t>
+            </a:r>
+            <a:endParaRPr lang="en-US" sz="1200" dirty="0"/>
+          </a:p>
+          <a:p>
+            <a:pPr indent="0" marL="0">
+              <a:lnSpc>
+                <a:spcPts val="1553"/>
+              </a:lnSpc>
+              <a:buNone/>
+            </a:pPr>
+            <a:r>
+              <a:rPr lang="en-US" sz="1100" i="1" dirty="0">
+                <a:solidFill>
+                  <a:srgbClr val="5A6478"/>
+                </a:solidFill>
+                <a:latin typeface="맑은 고딕" pitchFamily="34" charset="0"/>
+                <a:ea typeface="맑은 고딕" pitchFamily="34" charset="-122"/>
+                <a:cs typeface="맑은 고딕" pitchFamily="34" charset="-120"/>
+              </a:rPr>
+              <a:t>각도(Az, El)로는 이렇게 단순해지지 않는다.</a:t>
+            </a:r>
+            <a:endParaRPr lang="en-US" sz="1200" dirty="0"/>
+          </a:p>
+          <a:p>
+            <a:pPr indent="0" marL="0">
+              <a:lnSpc>
+                <a:spcPts val="1553"/>
+              </a:lnSpc>
+              <a:buNone/>
+            </a:pPr>
+            <a:r>
+              <a:rPr lang="en-US" sz="1100" i="1" dirty="0">
+                <a:solidFill>
+                  <a:srgbClr val="5A6478"/>
+                </a:solidFill>
+                <a:latin typeface="맑은 고딕" pitchFamily="34" charset="0"/>
+                <a:ea typeface="맑은 고딕" pitchFamily="34" charset="-122"/>
+                <a:cs typeface="맑은 고딕" pitchFamily="34" charset="-120"/>
+              </a:rPr>
+              <a:t>되돌릴 때는 asin 대신 atan2 를 쓴다.</a:t>
+            </a:r>
+            <a:endParaRPr lang="en-US" sz="1200" dirty="0"/>
+          </a:p>
+          <a:p>
+            <a:pPr indent="0" marL="0">
+              <a:lnSpc>
+                <a:spcPts val="1553"/>
+              </a:lnSpc>
+              <a:buNone/>
+            </a:pPr>
+            <a:r>
+              <a:rPr lang="en-US" sz="1100" i="1" dirty="0">
+                <a:solidFill>
+                  <a:srgbClr val="5A6478"/>
+                </a:solidFill>
+                <a:latin typeface="맑은 고딕" pitchFamily="34" charset="0"/>
+                <a:ea typeface="맑은 고딕" pitchFamily="34" charset="-122"/>
+                <a:cs typeface="맑은 고딕" pitchFamily="34" charset="-120"/>
+              </a:rPr>
+              <a:t>Az = atan2(u, w)</a:t>
+            </a:r>
+            <a:endParaRPr lang="en-US" sz="1200" dirty="0"/>
+          </a:p>
+          <a:p>
+            <a:pPr indent="0" marL="0">
+              <a:lnSpc>
+                <a:spcPts val="1553"/>
+              </a:lnSpc>
+              <a:buNone/>
+            </a:pPr>
+            <a:r>
+              <a:rPr lang="en-US" sz="1100" i="1" dirty="0">
+                <a:solidFill>
+                  <a:srgbClr val="5A6478"/>
+                </a:solidFill>
+                <a:latin typeface="맑은 고딕" pitchFamily="34" charset="0"/>
+                <a:ea typeface="맑은 고딕" pitchFamily="34" charset="-122"/>
+                <a:cs typeface="맑은 고딕" pitchFamily="34" charset="-120"/>
+              </a:rPr>
+              <a:t>El = atan2(v, √(u²+w²))</a:t>
+            </a:r>
+            <a:endParaRPr lang="en-US" sz="1200" dirty="0"/>
+          </a:p>
+        </p:txBody>
+      </p:sp>
+      <p:sp>
+        <p:nvSpPr>
+          <p:cNvPr id="28" name="Text 25"/>
+          <p:cNvSpPr txBox="1"/>
+          <p:nvPr/>
+        </p:nvSpPr>
+        <p:spPr>
+          <a:xfrm>
+            <a:off x="566928" y="5651117"/>
+            <a:ext cx="11064240" cy="585090"/>
+          </a:xfrm>
+          <a:prstGeom prst="rect">
+            <a:avLst/>
+          </a:prstGeom>
+          <a:noFill/>
+          <a:ln/>
+        </p:spPr>
+        <p:txBody>
+          <a:bodyPr wrap="square" lIns="0" tIns="0" rIns="0" bIns="0" rtlCol="0" anchor="ctr"/>
+          <a:lstStyle/>
+          <a:p>
+            <a:pPr algn="ctr" indent="0" marL="0">
+              <a:buNone/>
+            </a:pPr>
+            <a:r>
+              <a:rPr lang="en-US" sz="1190" i="1" dirty="0">
+                <a:solidFill>
+                  <a:srgbClr val="5A6478"/>
+                </a:solidFill>
+                <a:latin typeface="맑은 고딕" pitchFamily="34" charset="0"/>
+                <a:ea typeface="맑은 고딕" pitchFamily="34" charset="-122"/>
+                <a:cs typeface="맑은 고딕" pitchFamily="34" charset="-120"/>
+              </a:rPr>
+              <a:t>빔 굵기가 조향각과 무관하게 일정하고, 격자로브 위치도 u₀ ± λ/d 로 단순하게 나옵니다.</a:t>
+            </a:r>
+            <a:endParaRPr lang="en-US" sz="1300" dirty="0"/>
+          </a:p>
+          <a:p>
+            <a:pPr algn="ctr" indent="0" marL="0">
+              <a:buNone/>
+            </a:pPr>
+            <a:r>
+              <a:rPr lang="en-US" sz="1190" i="1" dirty="0">
+                <a:solidFill>
+                  <a:srgbClr val="5A6478"/>
+                </a:solidFill>
+                <a:latin typeface="맑은 고딕" pitchFamily="34" charset="0"/>
+                <a:ea typeface="맑은 고딕" pitchFamily="34" charset="-122"/>
+                <a:cs typeface="맑은 고딕" pitchFamily="34" charset="-120"/>
+              </a:rPr>
+              <a:t>UV 에는 거리가 없습니다 — 방향만 담는 표현이라, 표적 위치를 옮기는 이번 변환 체인에는 들어가지 않습니다.</a:t>
+            </a:r>
+            <a:endParaRPr lang="en-US" sz="1300" dirty="0"/>
+          </a:p>
+        </p:txBody>
+      </p:sp>
+      <p:sp>
+        <p:nvSpPr>
+          <p:cNvPr id="31" name="Rectangle 30"/>
+          <p:cNvSpPr/>
+          <p:nvPr/>
+        </p:nvSpPr>
+        <p:spPr>
+          <a:xfrm>
+            <a:off x="457200" y="411480"/>
+            <a:ext cx="11277295" cy="777240"/>
+          </a:xfrm>
+          <a:prstGeom prst="rect">
+            <a:avLst/>
+          </a:prstGeom>
+          <a:solidFill>
+            <a:srgbClr val="13233F"/>
+          </a:solidFill>
+          <a:ln>
+            <a:noFill/>
+          </a:ln>
+          <a:effectLst/>
+        </p:spPr>
+        <p:style>
+          <a:lnRef idx="1">
+            <a:schemeClr val="accent1"/>
+          </a:lnRef>
+          <a:fillRef idx="3">
+            <a:schemeClr val="accent1"/>
+          </a:fillRef>
+          <a:effectRef idx="2">
+            <a:schemeClr val="accent1"/>
+          </a:effectRef>
+          <a:fontRef idx="minor">
+            <a:schemeClr val="lt1"/>
+          </a:fontRef>
+        </p:style>
+        <p:txBody>
+          <a:bodyPr rtlCol="0" anchor="ctr" wrap="none"/>
+          <a:lstStyle/>
+          <a:p>
+            <a:pPr algn="ctr"/>
+          </a:p>
+        </p:txBody>
+      </p:sp>
+      <p:sp>
+        <p:nvSpPr>
+          <p:cNvPr id="32" name="TextBox 31"/>
+          <p:cNvSpPr txBox="1"/>
+          <p:nvPr/>
+        </p:nvSpPr>
+        <p:spPr>
+          <a:xfrm>
+            <a:off x="640080" y="411480"/>
+            <a:ext cx="8732520" cy="777240"/>
+          </a:xfrm>
+          <a:prstGeom prst="rect">
+            <a:avLst/>
+          </a:prstGeom>
+          <a:noFill/>
+        </p:spPr>
+        <p:txBody>
+          <a:bodyPr wrap="square" anchor="ctr" lIns="0" rIns="0" tIns="0" bIns="0">
+            <a:spAutoFit/>
+          </a:bodyPr>
+          <a:lstStyle/>
+          <a:p>
+            <a:pPr algn="l">
+              <a:spcAft>
+                <a:spcPts val="300"/>
+              </a:spcAft>
+            </a:pPr>
+            <a:r>
+              <a:rPr sz="1900" b="1">
+                <a:solidFill>
+                  <a:srgbClr val="FFFFFF"/>
+                </a:solidFill>
+                <a:latin typeface="맑은 고딕"/>
+              </a:rPr>
+              <a:t>부록 C.  UV (방향코사인)</a:t>
+            </a:r>
+          </a:p>
+          <a:p>
+            <a:pPr algn="l">
+              <a:lnSpc>
+                <a:spcPts val="1400"/>
+              </a:lnSpc>
+            </a:pPr>
+            <a:r>
+              <a:rPr sz="1100" b="0">
+                <a:solidFill>
+                  <a:srgbClr val="C9D6EC"/>
+                </a:solidFill>
+                <a:latin typeface="맑은 고딕"/>
+              </a:rPr>
+              <a:t>안테나 좌표를 적는 세 번째 방법.  빔 조향에 쓰는 표현이라 이번 변환 체인에는 들어가지 않습니다</a:t>
+            </a:r>
+          </a:p>
+        </p:txBody>
+      </p:sp>
+      <p:cxnSp>
+        <p:nvCxnSpPr>
+          <p:cNvPr id="34" name="Connector 33"/>
+          <p:cNvCxnSpPr/>
+          <p:nvPr/>
+        </p:nvCxnSpPr>
+        <p:spPr>
+          <a:xfrm>
+            <a:off x="457200" y="6355080"/>
+            <a:ext cx="11277295" cy="0"/>
+          </a:xfrm>
+          <a:prstGeom prst="line">
+            <a:avLst/>
+          </a:prstGeom>
+          <a:ln w="9525">
+            <a:solidFill>
+              <a:srgbClr val="B9C0CC"/>
+            </a:solidFill>
+          </a:ln>
+        </p:spPr>
+        <p:style>
+          <a:lnRef idx="2">
+            <a:schemeClr val="accent1"/>
+          </a:lnRef>
+          <a:fillRef idx="0">
+            <a:schemeClr val="accent1"/>
+          </a:fillRef>
+          <a:effectRef idx="1">
+            <a:schemeClr val="accent1"/>
+          </a:effectRef>
+          <a:fontRef idx="minor">
+            <a:schemeClr val="tx1"/>
+          </a:fontRef>
+        </p:style>
+      </p:cxnSp>
+      <p:sp>
+        <p:nvSpPr>
+          <p:cNvPr id="36" name="TextBox 35"/>
+          <p:cNvSpPr txBox="1"/>
+          <p:nvPr/>
+        </p:nvSpPr>
+        <p:spPr>
+          <a:xfrm>
+            <a:off x="5669280" y="6400800"/>
+            <a:ext cx="914400" cy="274320"/>
+          </a:xfrm>
+          <a:prstGeom prst="rect">
+            <a:avLst/>
+          </a:prstGeom>
+          <a:noFill/>
+        </p:spPr>
+        <p:txBody>
+          <a:bodyPr wrap="none" lIns="0" rIns="0" tIns="0" bIns="0">
+            <a:spAutoFit/>
+          </a:bodyPr>
+          <a:lstStyle/>
+          <a:p>
+            <a:pPr algn="ctr"/>
+            <a:fld id="{1D0B0B0B-0000-4000-8000-00000000C0DE}" type="slidenum">
+              <a:rPr lang="ko-KR" altLang="en-US" sz="1000" b="0" dirty="0">
+                <a:solidFill>
+                  <a:srgbClr val="1A2233"/>
+                </a:solidFill>
+                <a:latin typeface="Arial"/>
+                <a:ea typeface="Arial"/>
+              </a:rPr>
+              <a:t>1</a:t>
+            </a:fld>
+          </a:p>
+        </p:txBody>
+      </p:sp>
+    </p:spTree>
+  </p:cSld>
+  <p:clrMapOvr>
+    <a:masterClrMapping/>
+  </p:clrMapOvr>
+</p:sld>
+</file>
+
 <file path=ppt/slides/slide3.xml><?xml version="1.0" encoding="utf-8"?>
 <p:sld xmlns:a="http://schemas.openxmlformats.org/drawingml/2006/main" xmlns:r="http://schemas.openxmlformats.org/officeDocument/2006/relationships" xmlns:p="http://schemas.openxmlformats.org/presentationml/2006/main">
   <p:cSld name="Slide 4">
@@ -34148,66 +33816,6 @@
       </p:sp>
       <p:sp>
         <p:nvSpPr>
-          <p:cNvPr id="30" name="CardText 1"/>
-          <p:cNvSpPr txBox="1"/>
-          <p:nvPr/>
-        </p:nvSpPr>
-        <p:spPr>
-          <a:xfrm>
-            <a:off x="6382512" y="4261104"/>
-            <a:ext cx="5010912" cy="731520"/>
-          </a:xfrm>
-          <a:prstGeom prst="rect">
-            <a:avLst/>
-          </a:prstGeom>
-          <a:noFill/>
-          <a:ln/>
-        </p:spPr>
-        <p:txBody>
-          <a:bodyPr wrap="square" lIns="0" tIns="0" rIns="0" bIns="0" rtlCol="0" anchor="t"/>
-          <a:lstStyle/>
-          <a:p>
-            <a:pPr indent="0" marL="0">
-              <a:lnSpc>
-                <a:spcPts val="1900"/>
-              </a:lnSpc>
-              <a:buNone/>
-            </a:pPr>
-            <a:r>
-              <a:rPr lang="ko-KR" sz="1400" b="1" dirty="0">
-                <a:solidFill>
-                  <a:srgbClr val="C2521C"/>
-                </a:solidFill>
-                <a:latin typeface="맑은 고딕" pitchFamily="34" charset="0"/>
-                <a:ea typeface="맑은 고딕" pitchFamily="34" charset="-122"/>
-                <a:cs typeface="맑은 고딕" pitchFamily="34" charset="-120"/>
-              </a:rPr>
-              <a:t>② 평행이동 — 자리만 옮긴다</a:t>
-            </a:r>
-          </a:p>
-          <a:p>
-            <a:pPr indent="0" marL="0">
-              <a:lnSpc>
-                <a:spcPts val="1800"/>
-              </a:lnSpc>
-              <a:buNone/>
-            </a:pPr>
-            <a:r>
-              <a:rPr lang="ko-KR" sz="1200" b="0" dirty="0">
-                <a:solidFill>
-                  <a:srgbClr val="5A6478"/>
-                </a:solidFill>
-                <a:latin typeface="맑은 고딕" pitchFamily="34" charset="0"/>
-                <a:ea typeface="맑은 고딕" pitchFamily="34" charset="-122"/>
-                <a:cs typeface="맑은 고딕" pitchFamily="34" charset="-120"/>
-              </a:rPr>
-              <a:t>방향은 그대로다. 원점 사이의 차이를 벡터 하나로 더하거나 뺀다.</a:t>
-            </a:r>
-          </a:p>
-        </p:txBody>
-      </p:sp>
-      <p:sp>
-        <p:nvSpPr>
           <p:cNvPr id="31" name="Shape 2"/>
           <p:cNvSpPr/>
           <p:nvPr/>
@@ -34293,6 +33901,85 @@
                 <a:cs typeface="맑은 고딕" pitchFamily="34" charset="-120"/>
               </a:rPr>
               <a:t>R  회전행렬 (3×3)  ·  t  평행이동 (3×1).    모든 단계는 이 둘 중 하나거나, 둘 다입니다.</a:t>
+            </a:r>
+          </a:p>
+        </p:txBody>
+      </p:sp>
+      <p:sp>
+        <p:nvSpPr>
+          <p:cNvPr id="33" name="CardText 1"/>
+          <p:cNvSpPr txBox="1"/>
+          <p:nvPr/>
+        </p:nvSpPr>
+        <p:spPr>
+          <a:xfrm>
+            <a:off x="6382512" y="4261104"/>
+            <a:ext cx="5010912" cy="749808"/>
+          </a:xfrm>
+          <a:prstGeom prst="rect">
+            <a:avLst/>
+          </a:prstGeom>
+          <a:noFill/>
+          <a:ln/>
+        </p:spPr>
+        <p:txBody>
+          <a:bodyPr wrap="square" lIns="0" tIns="0" rIns="0" bIns="0" rtlCol="0" anchor="t"/>
+          <a:lstStyle/>
+          <a:p>
+            <a:pPr indent="0" marL="0">
+              <a:lnSpc>
+                <a:spcPts val="1900"/>
+              </a:lnSpc>
+              <a:buNone/>
+            </a:pPr>
+            <a:r>
+              <a:rPr lang="ko-KR" sz="1400" b="1" dirty="0">
+                <a:solidFill>
+                  <a:srgbClr val="C2521C"/>
+                </a:solidFill>
+                <a:latin typeface="맑은 고딕" pitchFamily="34" charset="0"/>
+                <a:ea typeface="맑은 고딕" pitchFamily="34" charset="-122"/>
+                <a:cs typeface="맑은 고딕" pitchFamily="34" charset="-120"/>
+              </a:rPr>
+              <a:t>② 평행이동 — 자리만 옮긴다</a:t>
+            </a:r>
+          </a:p>
+          <a:p>
+            <a:pPr indent="0" marL="0">
+              <a:lnSpc>
+                <a:spcPts val="1800"/>
+              </a:lnSpc>
+              <a:buNone/>
+            </a:pPr>
+            <a:r>
+              <a:rPr lang="ko-KR" sz="1200" b="0" dirty="0">
+                <a:solidFill>
+                  <a:srgbClr val="5A6478"/>
+                </a:solidFill>
+                <a:latin typeface="맑은 고딕" pitchFamily="34" charset="0"/>
+                <a:ea typeface="맑은 고딕" pitchFamily="34" charset="-122"/>
+                <a:cs typeface="맑은 고딕" pitchFamily="34" charset="-120"/>
+              </a:rPr>
+              <a:t>방향은 그대로다. 원점 사이의 차이를 벡터 하나로 더하거나 뺀다.</a:t>
+            </a:r>
+          </a:p>
+          <a:p>
+            <a:pPr indent="0" marL="0">
+              <a:lnSpc>
+                <a:spcPts val="1700"/>
+              </a:lnSpc>
+              <a:buNone/>
+            </a:pPr>
+            <a:r>
+              <a:rPr lang="ko-KR" sz="1100" b="0" dirty="0">
+                <a:solidFill>
+                  <a:srgbClr val="2B57A6"/>
+                </a:solidFill>
+                <a:latin typeface="맑은 고딕" pitchFamily="34" charset="0"/>
+                <a:ea typeface="맑은 고딕" pitchFamily="34" charset="-122"/>
+                <a:cs typeface="맑은 고딕" pitchFamily="34" charset="-120"/>
+              </a:rPr>
+              <a:t>장비 설치에서는 이 원점 차이를 레버암(lever arm) 이라고 부른다.</a:t>
             </a:r>
           </a:p>
         </p:txBody>
@@ -35061,7 +34748,7 @@
           <a:p>
             <a:pPr indent="0" marL="0">
               <a:lnSpc>
-                <a:spcPts val="1800"/>
+                <a:spcPts val="1700"/>
               </a:lnSpc>
               <a:buNone/>
             </a:pPr>
@@ -35074,13 +34761,13 @@
                 <a:ea typeface="맑은 고딕" pitchFamily="34" charset="-122"/>
                 <a:cs typeface="맑은 고딕" pitchFamily="34" charset="-120"/>
               </a:rPr>
-              <a:t>Rz · Ry · Rx 는 각각 z · y · x 축 둘레의 회전입니다.  도는 축의 성분은 변하지 않으니 그 행과 열은 1 과 0 으로 남고, 나머지 두 축 자리에 위의 두 줄이 들어갑니다.</a:t>
+              <a:t>Rz · Ry · Rx 는 각각 z · y · x 축 둘레의 회전입니다.  도는 축의 성분은 변하지 않으니 그 행과 열은 1 과 0 으로 남습니다.</a:t>
             </a:r>
           </a:p>
           <a:p>
             <a:pPr indent="0" marL="0">
               <a:lnSpc>
-                <a:spcPts val="1800"/>
+                <a:spcPts val="1700"/>
               </a:lnSpc>
               <a:buNone/>
             </a:pPr>
@@ -35094,6 +34781,25 @@
                 <a:cs typeface="맑은 고딕" pitchFamily="34" charset="-120"/>
               </a:rPr>
               <a:t>되돌리기는 θ → −θ 이고 그것은 sin 의 부호만 바꾸는 것이라, 행과 열을 맞바꾼 것과 같습니다.    R⁻¹ = Rᵀ</a:t>
+            </a:r>
+          </a:p>
+          <a:p>
+            <a:pPr indent="0" marL="0">
+              <a:lnSpc>
+                <a:spcPts val="1700"/>
+              </a:lnSpc>
+              <a:buNone/>
+            </a:pPr>
+            <a:r>
+              <a:rPr lang="ko-KR" sz="1150" b="0" dirty="0">
+                <a:solidFill>
+                  <a:srgbClr val="2B57A6"/>
+                </a:solidFill>
+                <a:latin typeface="맑은 고딕" pitchFamily="34" charset="0"/>
+                <a:ea typeface="맑은 고딕" pitchFamily="34" charset="-122"/>
+                <a:cs typeface="맑은 고딕" pitchFamily="34" charset="-120"/>
+              </a:rPr>
+              <a:t>표기 :  C_ned←body 는 동체 좌표를 NED 좌표로 바꾸는 회전행렬입니다.  화살표 방향이 곧 변환 방향이고, 거꾸로 갈 때는 전치를 곱합니다.</a:t>
             </a:r>
           </a:p>
         </p:txBody>
@@ -35390,7 +35096,7 @@
                 <a:ea typeface="맑은 고딕"/>
                 <a:cs typeface="맑은 고딕"/>
               </a:rPr>
-              <a:t>안테나 좌표계 — 극좌표 · 직교좌표 · UV</a:t>
+              <a:t>안테나 좌표계 — 극좌표 · 직교좌표</a:t>
             </a:r>
           </a:p>
         </p:txBody>
@@ -38618,8 +38324,8 @@
         </p:nvSpPr>
         <p:spPr>
           <a:xfrm>
-            <a:off x="566928" y="5358384"/>
-            <a:ext cx="11064240" cy="877824"/>
+            <a:off x="566928" y="5303520"/>
+            <a:ext cx="11064240" cy="932688"/>
           </a:xfrm>
           <a:prstGeom prst="roundRect">
             <a:avLst>
@@ -38649,8 +38355,8 @@
         </p:nvSpPr>
         <p:spPr>
           <a:xfrm>
-            <a:off x="786384" y="5468112"/>
-            <a:ext cx="10625328" cy="292608"/>
+            <a:off x="786384" y="5358384"/>
+            <a:ext cx="10625328" cy="274320"/>
           </a:xfrm>
           <a:prstGeom prst="rect">
             <a:avLst/>
@@ -38687,8 +38393,8 @@
         </p:nvSpPr>
         <p:spPr>
           <a:xfrm>
-            <a:off x="786384" y="5833872"/>
-            <a:ext cx="10625328" cy="292608"/>
+            <a:off x="786384" y="5650992"/>
+            <a:ext cx="10625328" cy="274320"/>
           </a:xfrm>
           <a:prstGeom prst="rect">
             <a:avLst/>
@@ -38713,6 +38419,44 @@
                 <a:cs typeface="맑은 고딕" pitchFamily="34" charset="-120"/>
               </a:rPr>
               <a:t>역변환은 asin 이 아니라 atan2 — 반올림으로 인자가 1 을 살짝 넘으면 asin 은 NaN 을 내고, ±90° 근처에서 정밀도가 무너지기 때문입니다.</a:t>
+            </a:r>
+          </a:p>
+        </p:txBody>
+      </p:sp>
+      <p:sp>
+        <p:nvSpPr>
+          <p:cNvPr id="51" name="Text 31"/>
+          <p:cNvSpPr txBox="1"/>
+          <p:nvPr/>
+        </p:nvSpPr>
+        <p:spPr>
+          <a:xfrm>
+            <a:off x="786384" y="5943600"/>
+            <a:ext cx="10625328" cy="274320"/>
+          </a:xfrm>
+          <a:prstGeom prst="rect">
+            <a:avLst/>
+          </a:prstGeom>
+          <a:noFill/>
+          <a:ln/>
+        </p:spPr>
+        <p:txBody>
+          <a:bodyPr wrap="square" lIns="0" tIns="0" rIns="0" bIns="0" rtlCol="0" anchor="ctr"/>
+          <a:lstStyle/>
+          <a:p>
+            <a:pPr indent="0" marL="0">
+              <a:buNone/>
+            </a:pPr>
+            <a:r>
+              <a:rPr lang="ko-KR" sz="1100" b="0" dirty="0">
+                <a:solidFill>
+                  <a:srgbClr val="5A6478"/>
+                </a:solidFill>
+                <a:latin typeface="맑은 고딕" pitchFamily="34" charset="0"/>
+                <a:ea typeface="맑은 고딕" pitchFamily="34" charset="-122"/>
+                <a:cs typeface="맑은 고딕" pitchFamily="34" charset="-120"/>
+              </a:rPr>
+              <a:t>안테나 좌표를 적는 방법이 하나 더 있습니다 — UV (방향코사인).  빔을 어디로 쏠지 정할 때 쓰는 표현이라 이 변환 체인에는 쓰지 않습니다  →  부록 C</a:t>
             </a:r>
           </a:p>
         </p:txBody>
@@ -38727,7 +38471,7 @@
 
 <file path=ppt/slides/slide9.xml><?xml version="1.0" encoding="utf-8"?>
 <p:sld xmlns:a="http://schemas.openxmlformats.org/drawingml/2006/main" xmlns:r="http://schemas.openxmlformats.org/officeDocument/2006/relationships" xmlns:p="http://schemas.openxmlformats.org/presentationml/2006/main">
-  <p:cSld name="Slide 12">
+  <p:cSld name="Slide 13">
     <p:bg>
       <p:bgPr>
         <a:solidFill>
@@ -38752,7 +38496,7 @@
       </p:grpSpPr>
       <p:sp>
         <p:nvSpPr>
-          <p:cNvPr id="30" name="Rectangle 29"/>
+          <p:cNvPr id="34" name="Rectangle 33"/>
           <p:cNvSpPr/>
           <p:nvPr/>
         </p:nvSpPr>
@@ -38803,7 +38547,7 @@
         <p:spPr>
           <a:xfrm>
             <a:off x="2112264" y="1371600"/>
-            <a:ext cx="1170432" cy="300903"/>
+            <a:ext cx="1170432" cy="312724"/>
           </a:xfrm>
           <a:prstGeom prst="roundRect">
             <a:avLst>
@@ -38834,7 +38578,7 @@
         <p:spPr>
           <a:xfrm>
             <a:off x="2112264" y="1371600"/>
-            <a:ext cx="1170432" cy="300903"/>
+            <a:ext cx="1170432" cy="312724"/>
           </a:xfrm>
           <a:prstGeom prst="rect">
             <a:avLst/>
@@ -38850,7 +38594,7 @@
               <a:buNone/>
             </a:pPr>
             <a:r>
-              <a:rPr lang="en-US" sz="1010" dirty="0">
+              <a:rPr lang="en-US" sz="1050" dirty="0">
                 <a:solidFill>
                   <a:srgbClr val="5A6478"/>
                 </a:solidFill>
@@ -38873,7 +38617,7 @@
         <p:spPr>
           <a:xfrm>
             <a:off x="3282696" y="1371600"/>
-            <a:ext cx="182880" cy="300903"/>
+            <a:ext cx="182880" cy="312724"/>
           </a:xfrm>
           <a:prstGeom prst="rect">
             <a:avLst/>
@@ -38889,7 +38633,7 @@
               <a:buNone/>
             </a:pPr>
             <a:r>
-              <a:rPr lang="en-US" sz="910" dirty="0">
+              <a:rPr lang="en-US" sz="950" dirty="0">
                 <a:solidFill>
                   <a:srgbClr val="C9D6EC"/>
                 </a:solidFill>
@@ -38909,7 +38653,113 @@
         <p:spPr>
           <a:xfrm>
             <a:off x="3465576" y="1371600"/>
-            <a:ext cx="1170432" cy="300903"/>
+            <a:ext cx="1170432" cy="312724"/>
+          </a:xfrm>
+          <a:prstGeom prst="roundRect">
+            <a:avLst>
+              <a:gd name="adj" fmla="val 47222"/>
+            </a:avLst>
+          </a:prstGeom>
+          <a:solidFill>
+            <a:srgbClr val="EEF1F7"/>
+          </a:solidFill>
+          <a:ln w="12700">
+            <a:solidFill>
+              <a:srgbClr val="C9D6EC"/>
+            </a:solidFill>
+            <a:prstDash val="solid"/>
+          </a:ln>
+        </p:spPr>
+        <p:txBody>
+          <a:bodyPr/>
+          <a:p/>
+        </p:txBody>
+      </p:sp>
+      <p:sp>
+        <p:nvSpPr>
+          <p:cNvPr id="8" name="Text 6"/>
+          <p:cNvSpPr txBox="1"/>
+          <p:nvPr/>
+        </p:nvSpPr>
+        <p:spPr>
+          <a:xfrm>
+            <a:off x="3465576" y="1371600"/>
+            <a:ext cx="1170432" cy="312724"/>
+          </a:xfrm>
+          <a:prstGeom prst="rect">
+            <a:avLst/>
+          </a:prstGeom>
+          <a:noFill/>
+          <a:ln/>
+        </p:spPr>
+        <p:txBody>
+          <a:bodyPr wrap="square" lIns="0" tIns="0" rIns="0" bIns="0" rtlCol="0" anchor="ctr"/>
+          <a:lstStyle/>
+          <a:p>
+            <a:pPr algn="ctr" indent="0" marL="0">
+              <a:buNone/>
+            </a:pPr>
+            <a:r>
+              <a:rPr lang="en-US" sz="1050" dirty="0">
+                <a:solidFill>
+                  <a:srgbClr val="5A6478"/>
+                </a:solidFill>
+                <a:latin typeface="맑은 고딕" pitchFamily="34" charset="0"/>
+                <a:ea typeface="맑은 고딕" pitchFamily="34" charset="-122"/>
+                <a:cs typeface="맑은 고딕" pitchFamily="34" charset="-120"/>
+              </a:rPr>
+              <a:t>안테나</a:t>
+            </a:r>
+            <a:endParaRPr lang="en-US" sz="1100" dirty="0"/>
+          </a:p>
+        </p:txBody>
+      </p:sp>
+      <p:sp>
+        <p:nvSpPr>
+          <p:cNvPr id="9" name="Text 7"/>
+          <p:cNvSpPr txBox="1"/>
+          <p:nvPr/>
+        </p:nvSpPr>
+        <p:spPr>
+          <a:xfrm>
+            <a:off x="4636008" y="1371600"/>
+            <a:ext cx="182880" cy="312724"/>
+          </a:xfrm>
+          <a:prstGeom prst="rect">
+            <a:avLst/>
+          </a:prstGeom>
+          <a:noFill/>
+          <a:ln/>
+        </p:spPr>
+        <p:txBody>
+          <a:bodyPr wrap="square" lIns="0" tIns="0" rIns="0" bIns="0" rtlCol="0" anchor="ctr"/>
+          <a:lstStyle/>
+          <a:p>
+            <a:pPr algn="ctr" indent="0" marL="0">
+              <a:buNone/>
+            </a:pPr>
+            <a:r>
+              <a:rPr lang="en-US" sz="950" dirty="0">
+                <a:solidFill>
+                  <a:srgbClr val="C9D6EC"/>
+                </a:solidFill>
+              </a:rPr>
+              <a:t>▸</a:t>
+            </a:r>
+            <a:endParaRPr lang="en-US" sz="1000" dirty="0"/>
+          </a:p>
+        </p:txBody>
+      </p:sp>
+      <p:sp>
+        <p:nvSpPr>
+          <p:cNvPr id="10" name="Shape 8"/>
+          <p:cNvSpPr/>
+          <p:nvPr/>
+        </p:nvSpPr>
+        <p:spPr>
+          <a:xfrm>
+            <a:off x="4818888" y="1371600"/>
+            <a:ext cx="1170432" cy="312724"/>
           </a:xfrm>
           <a:prstGeom prst="roundRect">
             <a:avLst>
@@ -38933,14 +38783,14 @@
       </p:sp>
       <p:sp>
         <p:nvSpPr>
-          <p:cNvPr id="8" name="Text 6"/>
+          <p:cNvPr id="11" name="Text 9"/>
           <p:cNvSpPr txBox="1"/>
           <p:nvPr/>
         </p:nvSpPr>
         <p:spPr>
           <a:xfrm>
-            <a:off x="3465576" y="1371600"/>
-            <a:ext cx="1170432" cy="300903"/>
+            <a:off x="4818888" y="1371600"/>
+            <a:ext cx="1170432" cy="312724"/>
           </a:xfrm>
           <a:prstGeom prst="rect">
             <a:avLst/>
@@ -38956,7 +38806,7 @@
               <a:buNone/>
             </a:pPr>
             <a:r>
-              <a:rPr lang="en-US" sz="1010" b="1" dirty="0">
+              <a:rPr lang="en-US" sz="1050" b="1" dirty="0">
                 <a:solidFill>
                   <a:srgbClr val="FFFFFF"/>
                 </a:solidFill>
@@ -38964,7 +38814,7 @@
                 <a:ea typeface="맑은 고딕" pitchFamily="34" charset="-122"/>
                 <a:cs typeface="맑은 고딕" pitchFamily="34" charset="-120"/>
               </a:rPr>
-              <a:t>안테나</a:t>
+              <a:t>동체</a:t>
             </a:r>
             <a:endParaRPr lang="en-US" sz="1100" dirty="0"/>
           </a:p>
@@ -38972,14 +38822,14 @@
       </p:sp>
       <p:sp>
         <p:nvSpPr>
-          <p:cNvPr id="9" name="Text 7"/>
+          <p:cNvPr id="12" name="Text 10"/>
           <p:cNvSpPr txBox="1"/>
           <p:nvPr/>
         </p:nvSpPr>
         <p:spPr>
           <a:xfrm>
-            <a:off x="4636008" y="1371600"/>
-            <a:ext cx="182880" cy="300903"/>
+            <a:off x="5989320" y="1371600"/>
+            <a:ext cx="182880" cy="312724"/>
           </a:xfrm>
           <a:prstGeom prst="rect">
             <a:avLst/>
@@ -38995,7 +38845,7 @@
               <a:buNone/>
             </a:pPr>
             <a:r>
-              <a:rPr lang="en-US" sz="910" dirty="0">
+              <a:rPr lang="en-US" sz="950" dirty="0">
                 <a:solidFill>
                   <a:srgbClr val="C9D6EC"/>
                 </a:solidFill>
@@ -39008,14 +38858,14 @@
       </p:sp>
       <p:sp>
         <p:nvSpPr>
-          <p:cNvPr id="10" name="Shape 8"/>
+          <p:cNvPr id="13" name="Shape 11"/>
           <p:cNvSpPr/>
           <p:nvPr/>
         </p:nvSpPr>
         <p:spPr>
           <a:xfrm>
-            <a:off x="4818888" y="1371600"/>
-            <a:ext cx="1170432" cy="300903"/>
+            <a:off x="6172200" y="1371600"/>
+            <a:ext cx="1170432" cy="312724"/>
           </a:xfrm>
           <a:prstGeom prst="roundRect">
             <a:avLst>
@@ -39039,14 +38889,14 @@
       </p:sp>
       <p:sp>
         <p:nvSpPr>
-          <p:cNvPr id="11" name="Text 9"/>
+          <p:cNvPr id="14" name="Text 12"/>
           <p:cNvSpPr txBox="1"/>
           <p:nvPr/>
         </p:nvSpPr>
         <p:spPr>
           <a:xfrm>
-            <a:off x="4818888" y="1371600"/>
-            <a:ext cx="1170432" cy="300903"/>
+            <a:off x="6172200" y="1371600"/>
+            <a:ext cx="1170432" cy="312724"/>
           </a:xfrm>
           <a:prstGeom prst="rect">
             <a:avLst/>
@@ -39062,7 +38912,7 @@
               <a:buNone/>
             </a:pPr>
             <a:r>
-              <a:rPr lang="en-US" sz="1010" dirty="0">
+              <a:rPr lang="en-US" sz="1050" dirty="0">
                 <a:solidFill>
                   <a:srgbClr val="5A6478"/>
                 </a:solidFill>
@@ -39070,7 +38920,7 @@
                 <a:ea typeface="맑은 고딕" pitchFamily="34" charset="-122"/>
                 <a:cs typeface="맑은 고딕" pitchFamily="34" charset="-120"/>
               </a:rPr>
-              <a:t>동체</a:t>
+              <a:t>NED</a:t>
             </a:r>
             <a:endParaRPr lang="en-US" sz="1100" dirty="0"/>
           </a:p>
@@ -39078,14 +38928,14 @@
       </p:sp>
       <p:sp>
         <p:nvSpPr>
-          <p:cNvPr id="12" name="Text 10"/>
+          <p:cNvPr id="15" name="Text 13"/>
           <p:cNvSpPr txBox="1"/>
           <p:nvPr/>
         </p:nvSpPr>
         <p:spPr>
           <a:xfrm>
-            <a:off x="5989320" y="1371600"/>
-            <a:ext cx="182880" cy="300903"/>
+            <a:off x="7342632" y="1371600"/>
+            <a:ext cx="182880" cy="312724"/>
           </a:xfrm>
           <a:prstGeom prst="rect">
             <a:avLst/>
@@ -39101,7 +38951,7 @@
               <a:buNone/>
             </a:pPr>
             <a:r>
-              <a:rPr lang="en-US" sz="910" dirty="0">
+              <a:rPr lang="en-US" sz="950" dirty="0">
                 <a:solidFill>
                   <a:srgbClr val="C9D6EC"/>
                 </a:solidFill>
@@ -39114,14 +38964,14 @@
       </p:sp>
       <p:sp>
         <p:nvSpPr>
-          <p:cNvPr id="13" name="Shape 11"/>
+          <p:cNvPr id="16" name="Shape 14"/>
           <p:cNvSpPr/>
           <p:nvPr/>
         </p:nvSpPr>
         <p:spPr>
           <a:xfrm>
-            <a:off x="6172200" y="1371600"/>
-            <a:ext cx="1170432" cy="300903"/>
+            <a:off x="7525512" y="1371600"/>
+            <a:ext cx="1170432" cy="312724"/>
           </a:xfrm>
           <a:prstGeom prst="roundRect">
             <a:avLst>
@@ -39145,14 +38995,14 @@
       </p:sp>
       <p:sp>
         <p:nvSpPr>
-          <p:cNvPr id="14" name="Text 12"/>
+          <p:cNvPr id="17" name="Text 15"/>
           <p:cNvSpPr txBox="1"/>
           <p:nvPr/>
         </p:nvSpPr>
         <p:spPr>
           <a:xfrm>
-            <a:off x="6172200" y="1371600"/>
-            <a:ext cx="1170432" cy="300903"/>
+            <a:off x="7525512" y="1371600"/>
+            <a:ext cx="1170432" cy="312724"/>
           </a:xfrm>
           <a:prstGeom prst="rect">
             <a:avLst/>
@@ -39168,7 +39018,7 @@
               <a:buNone/>
             </a:pPr>
             <a:r>
-              <a:rPr lang="en-US" sz="1010" dirty="0">
+              <a:rPr lang="en-US" sz="1050" dirty="0">
                 <a:solidFill>
                   <a:srgbClr val="5A6478"/>
                 </a:solidFill>
@@ -39176,7 +39026,7 @@
                 <a:ea typeface="맑은 고딕" pitchFamily="34" charset="-122"/>
                 <a:cs typeface="맑은 고딕" pitchFamily="34" charset="-120"/>
               </a:rPr>
-              <a:t>NED</a:t>
+              <a:t>ECEF</a:t>
             </a:r>
             <a:endParaRPr lang="en-US" sz="1100" dirty="0"/>
           </a:p>
@@ -39184,14 +39034,14 @@
       </p:sp>
       <p:sp>
         <p:nvSpPr>
-          <p:cNvPr id="15" name="Text 13"/>
+          <p:cNvPr id="18" name="Text 16"/>
           <p:cNvSpPr txBox="1"/>
           <p:nvPr/>
         </p:nvSpPr>
         <p:spPr>
           <a:xfrm>
-            <a:off x="7342632" y="1371600"/>
-            <a:ext cx="182880" cy="300903"/>
+            <a:off x="8695944" y="1371600"/>
+            <a:ext cx="182880" cy="312724"/>
           </a:xfrm>
           <a:prstGeom prst="rect">
             <a:avLst/>
@@ -39207,7 +39057,7 @@
               <a:buNone/>
             </a:pPr>
             <a:r>
-              <a:rPr lang="en-US" sz="910" dirty="0">
+              <a:rPr lang="en-US" sz="950" dirty="0">
                 <a:solidFill>
                   <a:srgbClr val="C9D6EC"/>
                 </a:solidFill>
@@ -39220,14 +39070,14 @@
       </p:sp>
       <p:sp>
         <p:nvSpPr>
-          <p:cNvPr id="16" name="Shape 14"/>
+          <p:cNvPr id="19" name="Shape 17"/>
           <p:cNvSpPr/>
           <p:nvPr/>
         </p:nvSpPr>
         <p:spPr>
           <a:xfrm>
-            <a:off x="7525512" y="1371600"/>
-            <a:ext cx="1170432" cy="300903"/>
+            <a:off x="8878824" y="1371600"/>
+            <a:ext cx="1170432" cy="312724"/>
           </a:xfrm>
           <a:prstGeom prst="roundRect">
             <a:avLst>
@@ -39251,14 +39101,14 @@
       </p:sp>
       <p:sp>
         <p:nvSpPr>
-          <p:cNvPr id="17" name="Text 15"/>
+          <p:cNvPr id="20" name="Text 18"/>
           <p:cNvSpPr txBox="1"/>
           <p:nvPr/>
         </p:nvSpPr>
         <p:spPr>
           <a:xfrm>
-            <a:off x="7525512" y="1371600"/>
-            <a:ext cx="1170432" cy="300903"/>
+            <a:off x="8878824" y="1371600"/>
+            <a:ext cx="1170432" cy="312724"/>
           </a:xfrm>
           <a:prstGeom prst="rect">
             <a:avLst/>
@@ -39274,7 +39124,7 @@
               <a:buNone/>
             </a:pPr>
             <a:r>
-              <a:rPr lang="en-US" sz="1010" dirty="0">
+              <a:rPr lang="en-US" sz="1050" dirty="0">
                 <a:solidFill>
                   <a:srgbClr val="5A6478"/>
                 </a:solidFill>
@@ -39282,112 +39132,6 @@
                 <a:ea typeface="맑은 고딕" pitchFamily="34" charset="-122"/>
                 <a:cs typeface="맑은 고딕" pitchFamily="34" charset="-120"/>
               </a:rPr>
-              <a:t>ECEF</a:t>
-            </a:r>
-            <a:endParaRPr lang="en-US" sz="1100" dirty="0"/>
-          </a:p>
-        </p:txBody>
-      </p:sp>
-      <p:sp>
-        <p:nvSpPr>
-          <p:cNvPr id="18" name="Text 16"/>
-          <p:cNvSpPr txBox="1"/>
-          <p:nvPr/>
-        </p:nvSpPr>
-        <p:spPr>
-          <a:xfrm>
-            <a:off x="8695944" y="1371600"/>
-            <a:ext cx="182880" cy="300903"/>
-          </a:xfrm>
-          <a:prstGeom prst="rect">
-            <a:avLst/>
-          </a:prstGeom>
-          <a:noFill/>
-          <a:ln/>
-        </p:spPr>
-        <p:txBody>
-          <a:bodyPr wrap="square" lIns="0" tIns="0" rIns="0" bIns="0" rtlCol="0" anchor="ctr"/>
-          <a:lstStyle/>
-          <a:p>
-            <a:pPr algn="ctr" indent="0" marL="0">
-              <a:buNone/>
-            </a:pPr>
-            <a:r>
-              <a:rPr lang="en-US" sz="910" dirty="0">
-                <a:solidFill>
-                  <a:srgbClr val="C9D6EC"/>
-                </a:solidFill>
-              </a:rPr>
-              <a:t>▸</a:t>
-            </a:r>
-            <a:endParaRPr lang="en-US" sz="1000" dirty="0"/>
-          </a:p>
-        </p:txBody>
-      </p:sp>
-      <p:sp>
-        <p:nvSpPr>
-          <p:cNvPr id="19" name="Shape 17"/>
-          <p:cNvSpPr/>
-          <p:nvPr/>
-        </p:nvSpPr>
-        <p:spPr>
-          <a:xfrm>
-            <a:off x="8878824" y="1371600"/>
-            <a:ext cx="1170432" cy="300903"/>
-          </a:xfrm>
-          <a:prstGeom prst="roundRect">
-            <a:avLst>
-              <a:gd name="adj" fmla="val 47222"/>
-            </a:avLst>
-          </a:prstGeom>
-          <a:solidFill>
-            <a:srgbClr val="EEF1F7"/>
-          </a:solidFill>
-          <a:ln w="12700">
-            <a:solidFill>
-              <a:srgbClr val="C9D6EC"/>
-            </a:solidFill>
-            <a:prstDash val="solid"/>
-          </a:ln>
-        </p:spPr>
-        <p:txBody>
-          <a:bodyPr/>
-          <a:p/>
-        </p:txBody>
-      </p:sp>
-      <p:sp>
-        <p:nvSpPr>
-          <p:cNvPr id="20" name="Text 18"/>
-          <p:cNvSpPr txBox="1"/>
-          <p:nvPr/>
-        </p:nvSpPr>
-        <p:spPr>
-          <a:xfrm>
-            <a:off x="8878824" y="1371600"/>
-            <a:ext cx="1170432" cy="300903"/>
-          </a:xfrm>
-          <a:prstGeom prst="rect">
-            <a:avLst/>
-          </a:prstGeom>
-          <a:noFill/>
-          <a:ln/>
-        </p:spPr>
-        <p:txBody>
-          <a:bodyPr wrap="square" lIns="0" tIns="0" rIns="0" bIns="0" rtlCol="0" anchor="ctr"/>
-          <a:lstStyle/>
-          <a:p>
-            <a:pPr algn="ctr" indent="0" marL="0">
-              <a:buNone/>
-            </a:pPr>
-            <a:r>
-              <a:rPr lang="en-US" sz="1010" dirty="0">
-                <a:solidFill>
-                  <a:srgbClr val="5A6478"/>
-                </a:solidFill>
-                <a:latin typeface="맑은 고딕" pitchFamily="34" charset="0"/>
-                <a:ea typeface="맑은 고딕" pitchFamily="34" charset="-122"/>
-                <a:cs typeface="맑은 고딕" pitchFamily="34" charset="-120"/>
-              </a:rPr>
               <a:t>LLA</a:t>
             </a:r>
             <a:endParaRPr lang="en-US" sz="1100" dirty="0"/>
@@ -39396,22 +39140,22 @@
       </p:sp>
       <p:pic>
         <p:nvPicPr>
-          <p:cNvPr id="29" name="Picture 28" descr="fig03_uv.png"/>
+          <p:cNvPr id="21" name="Image 0" descr="/home/claude/gitpkg/Part2_CoordFrames/doc/figures/fig06_body.png">    </p:cNvPr>
           <p:cNvPicPr>
             <a:picLocks noChangeAspect="1"/>
           </p:cNvPicPr>
           <p:nvPr/>
         </p:nvPicPr>
         <p:blipFill>
-          <a:blip r:embed="rId4"/>
+          <a:blip r:embed="rId1"/>
           <a:stretch>
             <a:fillRect/>
           </a:stretch>
         </p:blipFill>
         <p:spPr>
           <a:xfrm>
-            <a:off x="1059020" y="1806238"/>
-            <a:ext cx="6239576" cy="3578580"/>
+            <a:off x="2331720" y="1755648"/>
+            <a:ext cx="7534656" cy="3218688"/>
           </a:xfrm>
           <a:prstGeom prst="rect">
             <a:avLst/>
@@ -39426,12 +39170,12 @@
         </p:nvSpPr>
         <p:spPr>
           <a:xfrm>
-            <a:off x="7973568" y="1822955"/>
-            <a:ext cx="3657600" cy="3560692"/>
+            <a:off x="566928" y="5065776"/>
+            <a:ext cx="2651760" cy="1170432"/>
           </a:xfrm>
           <a:prstGeom prst="roundRect">
             <a:avLst>
-              <a:gd name="adj" fmla="val 2000"/>
+              <a:gd name="adj" fmla="val 6667"/>
             </a:avLst>
           </a:prstGeom>
           <a:solidFill>
@@ -39457,8 +39201,8 @@
         </p:nvSpPr>
         <p:spPr>
           <a:xfrm>
-            <a:off x="8229600" y="2056991"/>
-            <a:ext cx="3200400" cy="334337"/>
+            <a:off x="749808" y="5166360"/>
+            <a:ext cx="2286000" cy="260604"/>
           </a:xfrm>
           <a:prstGeom prst="rect">
             <a:avLst/>
@@ -39474,7 +39218,7 @@
               <a:buNone/>
             </a:pPr>
             <a:r>
-              <a:rPr lang="en-US" sz="1460" b="1" dirty="0">
+              <a:rPr lang="en-US" sz="1140" b="1" dirty="0">
                 <a:solidFill>
                   <a:srgbClr val="2B57A6"/>
                 </a:solidFill>
@@ -39482,9 +39226,9 @@
                 <a:ea typeface="맑은 고딕" pitchFamily="34" charset="-122"/>
                 <a:cs typeface="맑은 고딕" pitchFamily="34" charset="-120"/>
               </a:rPr>
-              <a:t>왜 UV 를 쓰나</a:t>
-            </a:r>
-            <a:endParaRPr lang="en-US" sz="1600" dirty="0"/>
+              <a:t>원점</a:t>
+            </a:r>
+            <a:endParaRPr lang="en-US" sz="1200" dirty="0"/>
           </a:p>
         </p:txBody>
       </p:sp>
@@ -39496,8 +39240,8 @@
         </p:nvSpPr>
         <p:spPr>
           <a:xfrm>
-            <a:off x="8229600" y="2441479"/>
-            <a:ext cx="3200400" cy="835843"/>
+            <a:off x="749808" y="5468112"/>
+            <a:ext cx="2286000" cy="731520"/>
           </a:xfrm>
           <a:prstGeom prst="rect">
             <a:avLst/>
@@ -39511,12 +39255,12 @@
           <a:p>
             <a:pPr indent="0" marL="0">
               <a:lnSpc>
-                <a:spcPts val="1645"/>
+                <a:spcPts val="1520"/>
               </a:lnSpc>
               <a:buNone/>
             </a:pPr>
             <a:r>
-              <a:rPr lang="en-US" sz="1140" dirty="0">
+              <a:rPr lang="en-US" sz="1090" dirty="0">
                 <a:solidFill>
                   <a:srgbClr val="1A2233"/>
                 </a:solidFill>
@@ -39524,49 +39268,9 @@
                 <a:ea typeface="맑은 고딕" pitchFamily="34" charset="-122"/>
                 <a:cs typeface="맑은 고딕" pitchFamily="34" charset="-120"/>
               </a:rPr>
-              <a:t>현대 레이다는 대부분 위상배열이다.</a:t>
-            </a:r>
-            <a:endParaRPr lang="en-US" sz="1250" dirty="0"/>
-          </a:p>
-          <a:p>
-            <a:pPr indent="0" marL="0">
-              <a:lnSpc>
-                <a:spcPts val="1645"/>
-              </a:lnSpc>
-              <a:buNone/>
-            </a:pPr>
-            <a:r>
-              <a:rPr lang="en-US" sz="1140" dirty="0">
-                <a:solidFill>
-                  <a:srgbClr val="1A2233"/>
-                </a:solidFill>
-                <a:latin typeface="맑은 고딕" pitchFamily="34" charset="0"/>
-                <a:ea typeface="맑은 고딕" pitchFamily="34" charset="-122"/>
-                <a:cs typeface="맑은 고딕" pitchFamily="34" charset="-120"/>
-              </a:rPr>
-              <a:t>수백~수천 개 소자에 위상차를 줘서</a:t>
-            </a:r>
-            <a:endParaRPr lang="en-US" sz="1250" dirty="0"/>
-          </a:p>
-          <a:p>
-            <a:pPr indent="0" marL="0">
-              <a:lnSpc>
-                <a:spcPts val="1645"/>
-              </a:lnSpc>
-              <a:buNone/>
-            </a:pPr>
-            <a:r>
-              <a:rPr lang="en-US" sz="1140" dirty="0">
-                <a:solidFill>
-                  <a:srgbClr val="1A2233"/>
-                </a:solidFill>
-                <a:latin typeface="맑은 고딕" pitchFamily="34" charset="0"/>
-                <a:ea typeface="맑은 고딕" pitchFamily="34" charset="-122"/>
-                <a:cs typeface="맑은 고딕" pitchFamily="34" charset="-120"/>
-              </a:rPr>
-              <a:t>빔 방향을 전자적으로 바꾼다.</a:t>
-            </a:r>
-            <a:endParaRPr lang="en-US" sz="1250" dirty="0"/>
+              <a:t>배의 무게중심</a:t>
+            </a:r>
+            <a:endParaRPr lang="en-US" sz="1150" dirty="0"/>
           </a:p>
         </p:txBody>
       </p:sp>
@@ -39578,16 +39282,16 @@
         </p:nvSpPr>
         <p:spPr>
           <a:xfrm>
-            <a:off x="8229600" y="3594943"/>
-            <a:ext cx="3200400" cy="585090"/>
+            <a:off x="3364992" y="5065776"/>
+            <a:ext cx="2651760" cy="1170432"/>
           </a:xfrm>
           <a:prstGeom prst="roundRect">
             <a:avLst>
-              <a:gd name="adj" fmla="val 11429"/>
+              <a:gd name="adj" fmla="val 6667"/>
             </a:avLst>
           </a:prstGeom>
           <a:solidFill>
-            <a:srgbClr val="FFFFFF"/>
+            <a:srgbClr val="EEF1F7"/>
           </a:solidFill>
           <a:ln w="12700">
             <a:solidFill>
@@ -39609,8 +39313,8 @@
         </p:nvSpPr>
         <p:spPr>
           <a:xfrm>
-            <a:off x="8229600" y="3594943"/>
-            <a:ext cx="3200400" cy="585090"/>
+            <a:off x="3547872" y="5166360"/>
+            <a:ext cx="2286000" cy="260604"/>
           </a:xfrm>
           <a:prstGeom prst="rect">
             <a:avLst/>
@@ -39622,141 +39326,243 @@
           <a:bodyPr wrap="square" lIns="0" tIns="0" rIns="0" bIns="0" rtlCol="0" anchor="ctr"/>
           <a:lstStyle/>
           <a:p>
-            <a:pPr algn="ctr" indent="0" marL="0">
+            <a:pPr indent="0" marL="0">
               <a:buNone/>
             </a:pPr>
             <a:r>
-              <a:rPr lang="en-US" sz="1100" b="1" dirty="0">
-                <a:solidFill>
-                  <a:srgbClr val="C2521C"/>
-                </a:solidFill>
-                <a:latin typeface="Consolas" pitchFamily="34" charset="0"/>
-                <a:ea typeface="Consolas" pitchFamily="34" charset="-122"/>
-                <a:cs typeface="Consolas" pitchFamily="34" charset="-120"/>
-              </a:rPr>
-              <a:t>ψ = −k(m·d·u₀ + n·d·v₀)</a:t>
-            </a:r>
-            <a:endParaRPr lang="en-US" sz="1200" dirty="0"/>
-          </a:p>
-        </p:txBody>
-      </p:sp>
-      <p:sp>
-        <p:nvSpPr>
-          <p:cNvPr id="27" name="Text 24"/>
-          <p:cNvSpPr txBox="1"/>
-          <p:nvPr/>
-        </p:nvSpPr>
-        <p:spPr>
-          <a:xfrm>
-            <a:off x="8229600" y="4305409"/>
-            <a:ext cx="3200400" cy="1044804"/>
-          </a:xfrm>
-          <a:prstGeom prst="rect">
-            <a:avLst/>
-          </a:prstGeom>
-          <a:noFill/>
-          <a:ln/>
-        </p:spPr>
-        <p:txBody>
-          <a:bodyPr wrap="square" lIns="0" tIns="0" rIns="0" bIns="0" rtlCol="0" anchor="ctr"/>
-          <a:lstStyle/>
-          <a:p>
-            <a:pPr indent="0" marL="0">
-              <a:lnSpc>
-                <a:spcPts val="1553"/>
-              </a:lnSpc>
-              <a:buNone/>
-            </a:pPr>
-            <a:r>
-              <a:rPr lang="en-US" sz="1100" i="1" dirty="0">
-                <a:solidFill>
-                  <a:srgbClr val="5A6478"/>
+              <a:rPr lang="en-US" sz="1140" b="1" dirty="0">
+                <a:solidFill>
+                  <a:srgbClr val="2B57A6"/>
                 </a:solidFill>
                 <a:latin typeface="맑은 고딕" pitchFamily="34" charset="0"/>
                 <a:ea typeface="맑은 고딕" pitchFamily="34" charset="-122"/>
                 <a:cs typeface="맑은 고딕" pitchFamily="34" charset="-120"/>
               </a:rPr>
-              <a:t>소자 번호에 u, v 를 곱하기만 하면 된다.</a:t>
+              <a:t>축</a:t>
             </a:r>
             <a:endParaRPr lang="en-US" sz="1200" dirty="0"/>
           </a:p>
+        </p:txBody>
+      </p:sp>
+      <p:sp>
+        <p:nvSpPr>
+          <p:cNvPr id="27" name="Text 24"/>
+          <p:cNvSpPr txBox="1"/>
+          <p:nvPr/>
+        </p:nvSpPr>
+        <p:spPr>
+          <a:xfrm>
+            <a:off x="3547872" y="5468112"/>
+            <a:ext cx="2286000" cy="731520"/>
+          </a:xfrm>
+          <a:prstGeom prst="rect">
+            <a:avLst/>
+          </a:prstGeom>
+          <a:noFill/>
+          <a:ln/>
+        </p:spPr>
+        <p:txBody>
+          <a:bodyPr wrap="square" lIns="0" tIns="0" rIns="0" bIns="0" rtlCol="0" anchor="ctr"/>
+          <a:lstStyle/>
           <a:p>
             <a:pPr indent="0" marL="0">
               <a:lnSpc>
-                <a:spcPts val="1553"/>
+                <a:spcPts val="1520"/>
               </a:lnSpc>
               <a:buNone/>
             </a:pPr>
             <a:r>
-              <a:rPr lang="en-US" sz="1100" i="1" dirty="0">
-                <a:solidFill>
-                  <a:srgbClr val="5A6478"/>
+              <a:rPr lang="en-US" sz="1090" dirty="0">
+                <a:solidFill>
+                  <a:srgbClr val="1A2233"/>
                 </a:solidFill>
                 <a:latin typeface="맑은 고딕" pitchFamily="34" charset="0"/>
                 <a:ea typeface="맑은 고딕" pitchFamily="34" charset="-122"/>
                 <a:cs typeface="맑은 고딕" pitchFamily="34" charset="-120"/>
               </a:rPr>
-              <a:t>각도(Az, El)로는 이렇게 단순해지지 않는다.</a:t>
-            </a:r>
-            <a:endParaRPr lang="en-US" sz="1200" dirty="0"/>
-          </a:p>
+              <a:t>x 선수(앞) · y 우현(오른쪽) · z 아래  →  FRD</a:t>
+            </a:r>
+            <a:endParaRPr lang="en-US" sz="1150" dirty="0"/>
+          </a:p>
+        </p:txBody>
+      </p:sp>
+      <p:sp>
+        <p:nvSpPr>
+          <p:cNvPr id="28" name="Shape 25"/>
+          <p:cNvSpPr/>
+          <p:nvPr/>
+        </p:nvSpPr>
+        <p:spPr>
+          <a:xfrm>
+            <a:off x="6163056" y="5065776"/>
+            <a:ext cx="2651760" cy="1170432"/>
+          </a:xfrm>
+          <a:prstGeom prst="roundRect">
+            <a:avLst>
+              <a:gd name="adj" fmla="val 6667"/>
+            </a:avLst>
+          </a:prstGeom>
+          <a:solidFill>
+            <a:srgbClr val="EEF1F7"/>
+          </a:solidFill>
+          <a:ln w="12700">
+            <a:solidFill>
+              <a:srgbClr val="FFFFFF"/>
+            </a:solidFill>
+            <a:prstDash val="solid"/>
+          </a:ln>
+        </p:spPr>
+        <p:txBody>
+          <a:bodyPr/>
+          <a:p/>
+        </p:txBody>
+      </p:sp>
+      <p:sp>
+        <p:nvSpPr>
+          <p:cNvPr id="29" name="Text 26"/>
+          <p:cNvSpPr txBox="1"/>
+          <p:nvPr/>
+        </p:nvSpPr>
+        <p:spPr>
+          <a:xfrm>
+            <a:off x="6345936" y="5166360"/>
+            <a:ext cx="2286000" cy="260604"/>
+          </a:xfrm>
+          <a:prstGeom prst="rect">
+            <a:avLst/>
+          </a:prstGeom>
+          <a:noFill/>
+          <a:ln/>
+        </p:spPr>
+        <p:txBody>
+          <a:bodyPr wrap="square" lIns="0" tIns="0" rIns="0" bIns="0" rtlCol="0" anchor="ctr"/>
+          <a:lstStyle/>
           <a:p>
             <a:pPr indent="0" marL="0">
-              <a:lnSpc>
-                <a:spcPts val="1553"/>
-              </a:lnSpc>
               <a:buNone/>
             </a:pPr>
             <a:r>
-              <a:rPr lang="en-US" sz="1100" i="1" dirty="0">
-                <a:solidFill>
-                  <a:srgbClr val="5A6478"/>
+              <a:rPr lang="en-US" sz="1140" b="1" dirty="0">
+                <a:solidFill>
+                  <a:srgbClr val="2B57A6"/>
                 </a:solidFill>
                 <a:latin typeface="맑은 고딕" pitchFamily="34" charset="0"/>
                 <a:ea typeface="맑은 고딕" pitchFamily="34" charset="-122"/>
                 <a:cs typeface="맑은 고딕" pitchFamily="34" charset="-120"/>
               </a:rPr>
-              <a:t>되돌릴 때는 asin 대신 atan2 를 쓴다.</a:t>
+              <a:t>자세각</a:t>
             </a:r>
             <a:endParaRPr lang="en-US" sz="1200" dirty="0"/>
           </a:p>
+        </p:txBody>
+      </p:sp>
+      <p:sp>
+        <p:nvSpPr>
+          <p:cNvPr id="30" name="Text 27"/>
+          <p:cNvSpPr txBox="1"/>
+          <p:nvPr/>
+        </p:nvSpPr>
+        <p:spPr>
+          <a:xfrm>
+            <a:off x="6345936" y="5468112"/>
+            <a:ext cx="2286000" cy="731520"/>
+          </a:xfrm>
+          <a:prstGeom prst="rect">
+            <a:avLst/>
+          </a:prstGeom>
+          <a:noFill/>
+          <a:ln/>
+        </p:spPr>
+        <p:txBody>
+          <a:bodyPr wrap="square" lIns="0" tIns="0" rIns="0" bIns="0" rtlCol="0" anchor="ctr"/>
+          <a:lstStyle/>
           <a:p>
             <a:pPr indent="0" marL="0">
               <a:lnSpc>
-                <a:spcPts val="1553"/>
+                <a:spcPts val="1520"/>
               </a:lnSpc>
               <a:buNone/>
             </a:pPr>
             <a:r>
-              <a:rPr lang="en-US" sz="1100" i="1" dirty="0">
-                <a:solidFill>
-                  <a:srgbClr val="5A6478"/>
+              <a:rPr lang="en-US" sz="1090" dirty="0">
+                <a:solidFill>
+                  <a:srgbClr val="1A2233"/>
                 </a:solidFill>
                 <a:latin typeface="맑은 고딕" pitchFamily="34" charset="0"/>
                 <a:ea typeface="맑은 고딕" pitchFamily="34" charset="-122"/>
                 <a:cs typeface="맑은 고딕" pitchFamily="34" charset="-120"/>
               </a:rPr>
-              <a:t>Az = atan2(u, w)</a:t>
-            </a:r>
-            <a:endParaRPr lang="en-US" sz="1200" dirty="0"/>
-          </a:p>
+              <a:t>roll 좌우 기울기 · pitch 앞뒤 기울기 · yaw 선수 방위</a:t>
+            </a:r>
+            <a:endParaRPr lang="en-US" sz="1150" dirty="0"/>
+          </a:p>
+        </p:txBody>
+      </p:sp>
+      <p:sp>
+        <p:nvSpPr>
+          <p:cNvPr id="31" name="Shape 28"/>
+          <p:cNvSpPr/>
+          <p:nvPr/>
+        </p:nvSpPr>
+        <p:spPr>
+          <a:xfrm>
+            <a:off x="8961120" y="5065776"/>
+            <a:ext cx="2651760" cy="1170432"/>
+          </a:xfrm>
+          <a:prstGeom prst="roundRect">
+            <a:avLst>
+              <a:gd name="adj" fmla="val 6667"/>
+            </a:avLst>
+          </a:prstGeom>
+          <a:solidFill>
+            <a:srgbClr val="EEF1F7"/>
+          </a:solidFill>
+          <a:ln w="12700">
+            <a:solidFill>
+              <a:srgbClr val="FFFFFF"/>
+            </a:solidFill>
+            <a:prstDash val="solid"/>
+          </a:ln>
+        </p:spPr>
+        <p:txBody>
+          <a:bodyPr/>
+          <a:p/>
+        </p:txBody>
+      </p:sp>
+      <p:sp>
+        <p:nvSpPr>
+          <p:cNvPr id="32" name="Text 29"/>
+          <p:cNvSpPr txBox="1"/>
+          <p:nvPr/>
+        </p:nvSpPr>
+        <p:spPr>
+          <a:xfrm>
+            <a:off x="9144000" y="5166360"/>
+            <a:ext cx="2286000" cy="260604"/>
+          </a:xfrm>
+          <a:prstGeom prst="rect">
+            <a:avLst/>
+          </a:prstGeom>
+          <a:noFill/>
+          <a:ln/>
+        </p:spPr>
+        <p:txBody>
+          <a:bodyPr wrap="square" lIns="0" tIns="0" rIns="0" bIns="0" rtlCol="0" anchor="ctr"/>
+          <a:lstStyle/>
           <a:p>
             <a:pPr indent="0" marL="0">
-              <a:lnSpc>
-                <a:spcPts val="1553"/>
-              </a:lnSpc>
               <a:buNone/>
             </a:pPr>
             <a:r>
-              <a:rPr lang="en-US" sz="1100" i="1" dirty="0">
-                <a:solidFill>
-                  <a:srgbClr val="5A6478"/>
+              <a:rPr lang="en-US" sz="1140" b="1" dirty="0">
+                <a:solidFill>
+                  <a:srgbClr val="2B57A6"/>
                 </a:solidFill>
                 <a:latin typeface="맑은 고딕" pitchFamily="34" charset="0"/>
                 <a:ea typeface="맑은 고딕" pitchFamily="34" charset="-122"/>
                 <a:cs typeface="맑은 고딕" pitchFamily="34" charset="-120"/>
               </a:rPr>
-              <a:t>El = atan2(v, √(u²+w²))</a:t>
+              <a:t>합치는 순서</a:t>
             </a:r>
             <a:endParaRPr lang="en-US" sz="1200" dirty="0"/>
           </a:p>
@@ -39764,63 +39570,7 @@
       </p:sp>
       <p:sp>
         <p:nvSpPr>
-          <p:cNvPr id="28" name="Text 25"/>
-          <p:cNvSpPr txBox="1"/>
-          <p:nvPr/>
-        </p:nvSpPr>
-        <p:spPr>
-          <a:xfrm>
-            <a:off x="566928" y="5651117"/>
-            <a:ext cx="11064240" cy="585090"/>
-          </a:xfrm>
-          <a:prstGeom prst="rect">
-            <a:avLst/>
-          </a:prstGeom>
-          <a:noFill/>
-          <a:ln/>
-        </p:spPr>
-        <p:txBody>
-          <a:bodyPr wrap="square" lIns="0" tIns="0" rIns="0" bIns="0" rtlCol="0" anchor="ctr"/>
-          <a:lstStyle/>
-          <a:p>
-            <a:pPr algn="ctr" indent="0" marL="0">
-              <a:buNone/>
-            </a:pPr>
-            <a:r>
-              <a:rPr lang="en-US" sz="1190" i="1" dirty="0">
-                <a:solidFill>
-                  <a:srgbClr val="5A6478"/>
-                </a:solidFill>
-                <a:latin typeface="맑은 고딕" pitchFamily="34" charset="0"/>
-                <a:ea typeface="맑은 고딕" pitchFamily="34" charset="-122"/>
-                <a:cs typeface="맑은 고딕" pitchFamily="34" charset="-120"/>
-              </a:rPr>
-              <a:t>빔 굵기가 조향각과 무관하게 일정하고, 격자로브 위치도 u₀ ± λ/d 로 단순하게 나옵니다.</a:t>
-            </a:r>
-            <a:endParaRPr lang="en-US" sz="1300" dirty="0"/>
-          </a:p>
-          <a:p>
-            <a:pPr algn="ctr" indent="0" marL="0">
-              <a:buNone/>
-            </a:pPr>
-            <a:r>
-              <a:rPr lang="en-US" sz="1190" i="1" dirty="0">
-                <a:solidFill>
-                  <a:srgbClr val="5A6478"/>
-                </a:solidFill>
-                <a:latin typeface="맑은 고딕" pitchFamily="34" charset="0"/>
-                <a:ea typeface="맑은 고딕" pitchFamily="34" charset="-122"/>
-                <a:cs typeface="맑은 고딕" pitchFamily="34" charset="-120"/>
-              </a:rPr>
-              <a:t>UV 에는 거리가 없습니다 — 방향만 담는 표현이라, 표적 위치를 옮기는 이번 변환 체인에는 들어가지 않습니다.</a:t>
-            </a:r>
-            <a:endParaRPr lang="en-US" sz="1300" dirty="0"/>
-          </a:p>
-        </p:txBody>
-      </p:sp>
-      <p:sp>
-        <p:nvSpPr>
-          <p:cNvPr id="31" name="Rectangle 30"/>
+          <p:cNvPr id="35" name="Rectangle 34"/>
           <p:cNvSpPr/>
           <p:nvPr/>
         </p:nvSpPr>
@@ -39864,7 +39614,7 @@
       </p:sp>
       <p:sp>
         <p:nvSpPr>
-          <p:cNvPr id="32" name="TextBox 31"/>
+          <p:cNvPr id="36" name="TextBox 35"/>
           <p:cNvSpPr txBox="1"/>
           <p:nvPr/>
         </p:nvSpPr>
@@ -39896,7 +39646,7 @@
                 </a:solidFill>
                 <a:latin typeface="맑은 고딕"/>
               </a:rPr>
-              <a:t>01. 안테나 좌표계 ③  UV (방향코사인)</a:t>
+              <a:t>01. 동체(Body) 좌표계</a:t>
             </a:r>
           </a:p>
           <a:p>
@@ -39912,14 +39662,14 @@
                 </a:solidFill>
                 <a:latin typeface="맑은 고딕"/>
               </a:rPr>
-              <a:t>표적 방향을 길이 1 인 화살표로 보고, 그 화살표를 안테나 세 축에 나눠 담은 값입니다</a:t>
+              <a:t>배에 실린 모든 장비의 공통 기준 — 안테나 · INS (Inertial Navigation System) · 무장이 여기로 모입니다</a:t>
             </a:r>
           </a:p>
         </p:txBody>
       </p:sp>
       <p:cxnSp>
         <p:nvCxnSpPr>
-          <p:cNvPr id="34" name="Connector 33"/>
+          <p:cNvPr id="38" name="Connector 37"/>
           <p:cNvCxnSpPr/>
           <p:nvPr/>
         </p:nvCxnSpPr>
@@ -39954,7 +39704,7 @@
       </p:cxnSp>
       <p:sp>
         <p:nvSpPr>
-          <p:cNvPr id="36" name="TextBox 35"/>
+          <p:cNvPr id="40" name="TextBox 39"/>
           <p:cNvSpPr txBox="1"/>
           <p:nvPr/>
         </p:nvSpPr>
@@ -39985,6 +39735,85 @@
               </a:rPr>
               <a:t>1</a:t>
             </a:fld>
+          </a:p>
+        </p:txBody>
+      </p:sp>
+      <p:sp>
+        <p:nvSpPr>
+          <p:cNvPr id="41" name="Text 30"/>
+          <p:cNvSpPr txBox="1"/>
+          <p:nvPr/>
+        </p:nvSpPr>
+        <p:spPr>
+          <a:xfrm>
+            <a:off x="9144000" y="5468112"/>
+            <a:ext cx="2286000" cy="731520"/>
+          </a:xfrm>
+          <a:prstGeom prst="rect">
+            <a:avLst/>
+          </a:prstGeom>
+          <a:noFill/>
+          <a:ln/>
+        </p:spPr>
+        <p:txBody>
+          <a:bodyPr wrap="square" lIns="0" tIns="0" rIns="0" bIns="0" rtlCol="0" anchor="t"/>
+          <a:lstStyle/>
+          <a:p>
+            <a:pPr indent="0" marL="0">
+              <a:lnSpc>
+                <a:spcPts val="1500"/>
+              </a:lnSpc>
+              <a:buNone/>
+            </a:pPr>
+            <a:r>
+              <a:rPr lang="ko-KR" sz="1090" b="0" dirty="0">
+                <a:solidFill>
+                  <a:srgbClr val="1A2233"/>
+                </a:solidFill>
+                <a:latin typeface="맑은 고딕" pitchFamily="34" charset="0"/>
+                <a:ea typeface="맑은 고딕" pitchFamily="34" charset="-122"/>
+                <a:cs typeface="맑은 고딕" pitchFamily="34" charset="-120"/>
+              </a:rPr>
+              <a:t>3-2-1  (yaw → pitch → roll)</a:t>
+            </a:r>
+          </a:p>
+          <a:p>
+            <a:pPr indent="0" marL="0">
+              <a:lnSpc>
+                <a:spcPts val="1300"/>
+              </a:lnSpc>
+              <a:buNone/>
+            </a:pPr>
+            <a:r>
+              <a:rPr lang="ko-KR" sz="950" b="0" dirty="0">
+                <a:solidFill>
+                  <a:srgbClr val="C2521C"/>
+                </a:solidFill>
+                <a:latin typeface="맑은 고딕" pitchFamily="34" charset="0"/>
+                <a:ea typeface="맑은 고딕" pitchFamily="34" charset="-122"/>
+                <a:cs typeface="맑은 고딕" pitchFamily="34" charset="-120"/>
+              </a:rPr>
+              <a:t>순서를 바꾸면 다른 자세가 된다.</a:t>
+            </a:r>
+          </a:p>
+          <a:p>
+            <a:pPr indent="0" marL="0">
+              <a:lnSpc>
+                <a:spcPts val="1300"/>
+              </a:lnSpc>
+              <a:buNone/>
+            </a:pPr>
+            <a:r>
+              <a:rPr lang="ko-KR" sz="950" b="0" dirty="0">
+                <a:solidFill>
+                  <a:srgbClr val="5A6478"/>
+                </a:solidFill>
+                <a:latin typeface="맑은 고딕" pitchFamily="34" charset="0"/>
+                <a:ea typeface="맑은 고딕" pitchFamily="34" charset="-122"/>
+                <a:cs typeface="맑은 고딕" pitchFamily="34" charset="-120"/>
+              </a:rPr>
+              <a:t>책을 x축 90° → y축 90° 로 돌린 것과 반대로 돌린 것을 비교해 보면 바로 보인다.</a:t>
+            </a:r>
           </a:p>
         </p:txBody>
       </p:sp>
